--- a/진명 석사졸업 연구 정리.pptx
+++ b/진명 석사졸업 연구 정리.pptx
@@ -12,8 +12,8 @@
     <p:sldId id="329" r:id="rId3"/>
     <p:sldId id="330" r:id="rId4"/>
     <p:sldId id="331" r:id="rId5"/>
-    <p:sldId id="332" r:id="rId6"/>
-    <p:sldId id="315" r:id="rId7"/>
+    <p:sldId id="315" r:id="rId6"/>
+    <p:sldId id="333" r:id="rId7"/>
     <p:sldId id="320" r:id="rId8"/>
     <p:sldId id="322" r:id="rId9"/>
     <p:sldId id="324" r:id="rId10"/>
@@ -608,6 +608,22 @@
   <p:clrMapOvr>
     <a:masterClrMapping/>
   </p:clrMapOvr>
+  <p:extLst>
+    <p:ext uri="{DCECCB84-F9BA-43D5-87BE-67443E8EF086}">
+      <p15:sldGuideLst xmlns:p15="http://schemas.microsoft.com/office/powerpoint/2012/main">
+        <p15:guide id="1" orient="horz" pos="2160" userDrawn="1">
+          <p15:clr>
+            <a:srgbClr val="FBAE40"/>
+          </p15:clr>
+        </p15:guide>
+        <p15:guide id="2" pos="2880" userDrawn="1">
+          <p15:clr>
+            <a:srgbClr val="FBAE40"/>
+          </p15:clr>
+        </p15:guide>
+      </p15:sldGuideLst>
+    </p:ext>
+  </p:extLst>
 </p:sldLayout>
 </file>
 
@@ -2064,7 +2080,7 @@
                   <a:srgbClr val="FFFFFF"/>
                 </a:solidFill>
               </a:rPr>
-              <a:t>/ 9</a:t>
+              <a:t>/ 17</a:t>
             </a:r>
             <a:endParaRPr lang="ko-KR" altLang="en-US" sz="1800" dirty="0">
               <a:solidFill>
@@ -5404,64 +5420,6 @@
           </a:fontRef>
         </p:style>
       </p:cxnSp>
-      <p:sp>
-        <p:nvSpPr>
-          <p:cNvPr id="2" name="TextBox 1">
-            <a:extLst>
-              <a:ext uri="{FF2B5EF4-FFF2-40B4-BE49-F238E27FC236}">
-                <a16:creationId xmlns:a16="http://schemas.microsoft.com/office/drawing/2014/main" id="{796CB929-075D-426F-22B0-AAE760E7E180}"/>
-              </a:ext>
-            </a:extLst>
-          </p:cNvPr>
-          <p:cNvSpPr txBox="1"/>
-          <p:nvPr/>
-        </p:nvSpPr>
-        <p:spPr>
-          <a:xfrm>
-            <a:off x="0" y="0"/>
-            <a:ext cx="580103" cy="276999"/>
-          </a:xfrm>
-          <a:prstGeom prst="rect">
-            <a:avLst/>
-          </a:prstGeom>
-          <a:noFill/>
-        </p:spPr>
-        <p:txBody>
-          <a:bodyPr wrap="square" rtlCol="0">
-            <a:spAutoFit/>
-          </a:bodyPr>
-          <a:lstStyle/>
-          <a:p>
-            <a:r>
-              <a:rPr lang="en-US" altLang="ko-KR" sz="1200" dirty="0">
-                <a:ln w="9525">
-                  <a:solidFill>
-                    <a:schemeClr val="tx1">
-                      <a:alpha val="29000"/>
-                    </a:schemeClr>
-                  </a:solidFill>
-                </a:ln>
-                <a:latin typeface="Times New Roman"/>
-                <a:ea typeface="맑은 고딕"/>
-                <a:cs typeface="Times New Roman"/>
-              </a:rPr>
-              <a:t>(EDL) </a:t>
-            </a:r>
-            <a:endParaRPr lang="ko-KR" altLang="en-US" sz="1200" dirty="0">
-              <a:ln w="9525">
-                <a:solidFill>
-                  <a:schemeClr val="tx1">
-                    <a:alpha val="29000"/>
-                  </a:schemeClr>
-                </a:solidFill>
-              </a:ln>
-              <a:latin typeface="Times New Roman"/>
-              <a:ea typeface="맑은 고딕"/>
-              <a:cs typeface="Times New Roman"/>
-            </a:endParaRPr>
-          </a:p>
-        </p:txBody>
-      </p:sp>
     </p:spTree>
     <p:extLst>
       <p:ext uri="{BB962C8B-B14F-4D97-AF65-F5344CB8AC3E}">
@@ -6961,64 +6919,6 @@
           </a:fontRef>
         </p:style>
       </p:cxnSp>
-      <p:sp>
-        <p:nvSpPr>
-          <p:cNvPr id="3" name="TextBox 2">
-            <a:extLst>
-              <a:ext uri="{FF2B5EF4-FFF2-40B4-BE49-F238E27FC236}">
-                <a16:creationId xmlns:a16="http://schemas.microsoft.com/office/drawing/2014/main" id="{1C2A82BE-B92B-3BAF-1EF3-72BD80E68564}"/>
-              </a:ext>
-            </a:extLst>
-          </p:cNvPr>
-          <p:cNvSpPr txBox="1"/>
-          <p:nvPr/>
-        </p:nvSpPr>
-        <p:spPr>
-          <a:xfrm>
-            <a:off x="0" y="0"/>
-            <a:ext cx="580103" cy="276999"/>
-          </a:xfrm>
-          <a:prstGeom prst="rect">
-            <a:avLst/>
-          </a:prstGeom>
-          <a:noFill/>
-        </p:spPr>
-        <p:txBody>
-          <a:bodyPr wrap="square" rtlCol="0">
-            <a:spAutoFit/>
-          </a:bodyPr>
-          <a:lstStyle/>
-          <a:p>
-            <a:r>
-              <a:rPr lang="en-US" altLang="ko-KR" sz="1200" dirty="0">
-                <a:ln w="9525">
-                  <a:solidFill>
-                    <a:schemeClr val="tx1">
-                      <a:alpha val="29000"/>
-                    </a:schemeClr>
-                  </a:solidFill>
-                </a:ln>
-                <a:latin typeface="Times New Roman"/>
-                <a:ea typeface="맑은 고딕"/>
-                <a:cs typeface="Times New Roman"/>
-              </a:rPr>
-              <a:t>(EDL) </a:t>
-            </a:r>
-            <a:endParaRPr lang="ko-KR" altLang="en-US" sz="1200" dirty="0">
-              <a:ln w="9525">
-                <a:solidFill>
-                  <a:schemeClr val="tx1">
-                    <a:alpha val="29000"/>
-                  </a:schemeClr>
-                </a:solidFill>
-              </a:ln>
-              <a:latin typeface="Times New Roman"/>
-              <a:ea typeface="맑은 고딕"/>
-              <a:cs typeface="Times New Roman"/>
-            </a:endParaRPr>
-          </a:p>
-        </p:txBody>
-      </p:sp>
     </p:spTree>
     <p:extLst>
       <p:ext uri="{BB962C8B-B14F-4D97-AF65-F5344CB8AC3E}">
@@ -7357,64 +7257,6 @@
               </a:rPr>
               <a:t>measurement</a:t>
             </a:r>
-          </a:p>
-        </p:txBody>
-      </p:sp>
-      <p:sp>
-        <p:nvSpPr>
-          <p:cNvPr id="6" name="TextBox 5">
-            <a:extLst>
-              <a:ext uri="{FF2B5EF4-FFF2-40B4-BE49-F238E27FC236}">
-                <a16:creationId xmlns:a16="http://schemas.microsoft.com/office/drawing/2014/main" id="{D9E91588-2DD7-9F1A-3299-60F0EA0092D2}"/>
-              </a:ext>
-            </a:extLst>
-          </p:cNvPr>
-          <p:cNvSpPr txBox="1"/>
-          <p:nvPr/>
-        </p:nvSpPr>
-        <p:spPr>
-          <a:xfrm>
-            <a:off x="0" y="0"/>
-            <a:ext cx="580103" cy="276999"/>
-          </a:xfrm>
-          <a:prstGeom prst="rect">
-            <a:avLst/>
-          </a:prstGeom>
-          <a:noFill/>
-        </p:spPr>
-        <p:txBody>
-          <a:bodyPr wrap="square" rtlCol="0">
-            <a:spAutoFit/>
-          </a:bodyPr>
-          <a:lstStyle/>
-          <a:p>
-            <a:r>
-              <a:rPr lang="en-US" altLang="ko-KR" sz="1200" dirty="0">
-                <a:ln w="9525">
-                  <a:solidFill>
-                    <a:schemeClr val="tx1">
-                      <a:alpha val="29000"/>
-                    </a:schemeClr>
-                  </a:solidFill>
-                </a:ln>
-                <a:latin typeface="Times New Roman"/>
-                <a:ea typeface="맑은 고딕"/>
-                <a:cs typeface="Times New Roman"/>
-              </a:rPr>
-              <a:t>(EDL) </a:t>
-            </a:r>
-            <a:endParaRPr lang="ko-KR" altLang="en-US" sz="1200" dirty="0">
-              <a:ln w="9525">
-                <a:solidFill>
-                  <a:schemeClr val="tx1">
-                    <a:alpha val="29000"/>
-                  </a:schemeClr>
-                </a:solidFill>
-              </a:ln>
-              <a:latin typeface="Times New Roman"/>
-              <a:ea typeface="맑은 고딕"/>
-              <a:cs typeface="Times New Roman"/>
-            </a:endParaRPr>
           </a:p>
         </p:txBody>
       </p:sp>
@@ -8208,64 +8050,6 @@
           </a:p>
         </p:txBody>
       </p:sp>
-      <p:sp>
-        <p:nvSpPr>
-          <p:cNvPr id="4" name="TextBox 3">
-            <a:extLst>
-              <a:ext uri="{FF2B5EF4-FFF2-40B4-BE49-F238E27FC236}">
-                <a16:creationId xmlns:a16="http://schemas.microsoft.com/office/drawing/2014/main" id="{BAAC7132-B415-F738-D902-326EBCCA64D1}"/>
-              </a:ext>
-            </a:extLst>
-          </p:cNvPr>
-          <p:cNvSpPr txBox="1"/>
-          <p:nvPr/>
-        </p:nvSpPr>
-        <p:spPr>
-          <a:xfrm>
-            <a:off x="0" y="0"/>
-            <a:ext cx="580103" cy="276999"/>
-          </a:xfrm>
-          <a:prstGeom prst="rect">
-            <a:avLst/>
-          </a:prstGeom>
-          <a:noFill/>
-        </p:spPr>
-        <p:txBody>
-          <a:bodyPr wrap="square" rtlCol="0">
-            <a:spAutoFit/>
-          </a:bodyPr>
-          <a:lstStyle/>
-          <a:p>
-            <a:r>
-              <a:rPr lang="en-US" altLang="ko-KR" sz="1200" dirty="0">
-                <a:ln w="9525">
-                  <a:solidFill>
-                    <a:schemeClr val="tx1">
-                      <a:alpha val="29000"/>
-                    </a:schemeClr>
-                  </a:solidFill>
-                </a:ln>
-                <a:latin typeface="Times New Roman"/>
-                <a:ea typeface="맑은 고딕"/>
-                <a:cs typeface="Times New Roman"/>
-              </a:rPr>
-              <a:t>(EDL) </a:t>
-            </a:r>
-            <a:endParaRPr lang="ko-KR" altLang="en-US" sz="1200" dirty="0">
-              <a:ln w="9525">
-                <a:solidFill>
-                  <a:schemeClr val="tx1">
-                    <a:alpha val="29000"/>
-                  </a:schemeClr>
-                </a:solidFill>
-              </a:ln>
-              <a:latin typeface="Times New Roman"/>
-              <a:ea typeface="맑은 고딕"/>
-              <a:cs typeface="Times New Roman"/>
-            </a:endParaRPr>
-          </a:p>
-        </p:txBody>
-      </p:sp>
     </p:spTree>
     <p:extLst>
       <p:ext uri="{BB962C8B-B14F-4D97-AF65-F5344CB8AC3E}">
@@ -8330,64 +8114,6 @@
               <a:t>Test</a:t>
             </a:r>
             <a:endParaRPr lang="ko-KR" altLang="en-US" dirty="0"/>
-          </a:p>
-        </p:txBody>
-      </p:sp>
-      <p:sp>
-        <p:nvSpPr>
-          <p:cNvPr id="3" name="TextBox 2">
-            <a:extLst>
-              <a:ext uri="{FF2B5EF4-FFF2-40B4-BE49-F238E27FC236}">
-                <a16:creationId xmlns:a16="http://schemas.microsoft.com/office/drawing/2014/main" id="{AD47A566-F3F7-6469-E576-70F183C04546}"/>
-              </a:ext>
-            </a:extLst>
-          </p:cNvPr>
-          <p:cNvSpPr txBox="1"/>
-          <p:nvPr/>
-        </p:nvSpPr>
-        <p:spPr>
-          <a:xfrm>
-            <a:off x="0" y="0"/>
-            <a:ext cx="580103" cy="276999"/>
-          </a:xfrm>
-          <a:prstGeom prst="rect">
-            <a:avLst/>
-          </a:prstGeom>
-          <a:noFill/>
-        </p:spPr>
-        <p:txBody>
-          <a:bodyPr wrap="square" rtlCol="0">
-            <a:spAutoFit/>
-          </a:bodyPr>
-          <a:lstStyle/>
-          <a:p>
-            <a:r>
-              <a:rPr lang="en-US" altLang="ko-KR" sz="1200" dirty="0">
-                <a:ln w="9525">
-                  <a:solidFill>
-                    <a:schemeClr val="tx1">
-                      <a:alpha val="29000"/>
-                    </a:schemeClr>
-                  </a:solidFill>
-                </a:ln>
-                <a:latin typeface="Times New Roman"/>
-                <a:ea typeface="맑은 고딕"/>
-                <a:cs typeface="Times New Roman"/>
-              </a:rPr>
-              <a:t>(EDL) </a:t>
-            </a:r>
-            <a:endParaRPr lang="ko-KR" altLang="en-US" sz="1200" dirty="0">
-              <a:ln w="9525">
-                <a:solidFill>
-                  <a:schemeClr val="tx1">
-                    <a:alpha val="29000"/>
-                  </a:schemeClr>
-                </a:solidFill>
-              </a:ln>
-              <a:latin typeface="Times New Roman"/>
-              <a:ea typeface="맑은 고딕"/>
-              <a:cs typeface="Times New Roman"/>
-            </a:endParaRPr>
           </a:p>
         </p:txBody>
       </p:sp>
@@ -11044,64 +10770,6 @@
           </a:p>
         </p:txBody>
       </p:sp>
-      <p:sp>
-        <p:nvSpPr>
-          <p:cNvPr id="3" name="TextBox 2">
-            <a:extLst>
-              <a:ext uri="{FF2B5EF4-FFF2-40B4-BE49-F238E27FC236}">
-                <a16:creationId xmlns:a16="http://schemas.microsoft.com/office/drawing/2014/main" id="{9BFDDE8B-6486-1217-BCE8-24449350D495}"/>
-              </a:ext>
-            </a:extLst>
-          </p:cNvPr>
-          <p:cNvSpPr txBox="1"/>
-          <p:nvPr/>
-        </p:nvSpPr>
-        <p:spPr>
-          <a:xfrm>
-            <a:off x="0" y="0"/>
-            <a:ext cx="580103" cy="276999"/>
-          </a:xfrm>
-          <a:prstGeom prst="rect">
-            <a:avLst/>
-          </a:prstGeom>
-          <a:noFill/>
-        </p:spPr>
-        <p:txBody>
-          <a:bodyPr wrap="square" rtlCol="0">
-            <a:spAutoFit/>
-          </a:bodyPr>
-          <a:lstStyle/>
-          <a:p>
-            <a:r>
-              <a:rPr lang="en-US" altLang="ko-KR" sz="1200" dirty="0">
-                <a:ln w="9525">
-                  <a:solidFill>
-                    <a:schemeClr val="tx1">
-                      <a:alpha val="29000"/>
-                    </a:schemeClr>
-                  </a:solidFill>
-                </a:ln>
-                <a:latin typeface="Times New Roman"/>
-                <a:ea typeface="맑은 고딕"/>
-                <a:cs typeface="Times New Roman"/>
-              </a:rPr>
-              <a:t>(EDL) </a:t>
-            </a:r>
-            <a:endParaRPr lang="ko-KR" altLang="en-US" sz="1200" dirty="0">
-              <a:ln w="9525">
-                <a:solidFill>
-                  <a:schemeClr val="tx1">
-                    <a:alpha val="29000"/>
-                  </a:schemeClr>
-                </a:solidFill>
-              </a:ln>
-              <a:latin typeface="Times New Roman"/>
-              <a:ea typeface="맑은 고딕"/>
-              <a:cs typeface="Times New Roman"/>
-            </a:endParaRPr>
-          </a:p>
-        </p:txBody>
-      </p:sp>
     </p:spTree>
     <p:extLst>
       <p:ext uri="{BB962C8B-B14F-4D97-AF65-F5344CB8AC3E}">
@@ -11171,10 +10839,10 @@
       </p:sp>
       <p:sp>
         <p:nvSpPr>
-          <p:cNvPr id="3" name="TextBox 2">
+          <p:cNvPr id="118" name="TextBox 117">
             <a:extLst>
               <a:ext uri="{FF2B5EF4-FFF2-40B4-BE49-F238E27FC236}">
-                <a16:creationId xmlns:a16="http://schemas.microsoft.com/office/drawing/2014/main" id="{4B4671DC-160D-4059-D90E-C6878BEA0E82}"/>
+                <a16:creationId xmlns:a16="http://schemas.microsoft.com/office/drawing/2014/main" id="{6A7530F4-DFF5-C2D3-08BE-884D26D63F9D}"/>
               </a:ext>
             </a:extLst>
           </p:cNvPr>
@@ -11183,8 +10851,8 @@
         </p:nvSpPr>
         <p:spPr>
           <a:xfrm>
-            <a:off x="0" y="0"/>
-            <a:ext cx="580103" cy="276999"/>
+            <a:off x="580103" y="1212714"/>
+            <a:ext cx="8343403" cy="707886"/>
           </a:xfrm>
           <a:prstGeom prst="rect">
             <a:avLst/>
@@ -11198,7 +10866,7 @@
           <a:lstStyle/>
           <a:p>
             <a:r>
-              <a:rPr lang="en-US" altLang="ko-KR" sz="1200" dirty="0">
+              <a:rPr lang="en-US" altLang="ko-KR" sz="2000" dirty="0">
                 <a:ln w="9525">
                   <a:solidFill>
                     <a:schemeClr val="tx1">
@@ -11210,9 +10878,3454 @@
                 <a:ea typeface="맑은 고딕"/>
                 <a:cs typeface="Times New Roman"/>
               </a:rPr>
-              <a:t>(TED) </a:t>
-            </a:r>
-            <a:endParaRPr lang="ko-KR" altLang="en-US" sz="1200" dirty="0">
+              <a:t>Bandgap-engineered tunneling oxide</a:t>
+            </a:r>
+            <a:r>
+              <a:rPr lang="ko-KR" altLang="en-US" sz="2000" dirty="0">
+                <a:ln w="9525">
+                  <a:solidFill>
+                    <a:schemeClr val="tx1">
+                      <a:alpha val="29000"/>
+                    </a:schemeClr>
+                  </a:solidFill>
+                </a:ln>
+                <a:latin typeface="Times New Roman"/>
+                <a:ea typeface="맑은 고딕"/>
+                <a:cs typeface="Times New Roman"/>
+              </a:rPr>
+              <a:t> </a:t>
+            </a:r>
+            <a:r>
+              <a:rPr lang="en-US" altLang="ko-KR" sz="2000" dirty="0">
+                <a:ln w="9525">
+                  <a:solidFill>
+                    <a:schemeClr val="tx1">
+                      <a:alpha val="29000"/>
+                    </a:schemeClr>
+                  </a:solidFill>
+                </a:ln>
+                <a:latin typeface="Times New Roman"/>
+                <a:ea typeface="맑은 고딕"/>
+                <a:cs typeface="Times New Roman"/>
+              </a:rPr>
+              <a:t>(BETOX)</a:t>
+            </a:r>
+            <a:r>
+              <a:rPr lang="ko-KR" altLang="en-US" sz="2000" dirty="0">
+                <a:ln w="9525">
+                  <a:solidFill>
+                    <a:schemeClr val="tx1">
+                      <a:alpha val="29000"/>
+                    </a:schemeClr>
+                  </a:solidFill>
+                </a:ln>
+                <a:latin typeface="Times New Roman"/>
+                <a:ea typeface="맑은 고딕"/>
+                <a:cs typeface="Times New Roman"/>
+              </a:rPr>
+              <a:t>으로부터의 </a:t>
+            </a:r>
+            <a:r>
+              <a:rPr lang="en-US" altLang="ko-KR" sz="2000" dirty="0" err="1">
+                <a:ln w="9525">
+                  <a:solidFill>
+                    <a:schemeClr val="tx1">
+                      <a:alpha val="29000"/>
+                    </a:schemeClr>
+                  </a:solidFill>
+                </a:ln>
+                <a:latin typeface="Times New Roman"/>
+                <a:ea typeface="맑은 고딕"/>
+                <a:cs typeface="Times New Roman"/>
+              </a:rPr>
+              <a:t>detrapping</a:t>
+            </a:r>
+            <a:r>
+              <a:rPr lang="ko-KR" altLang="en-US" sz="2000" dirty="0">
+                <a:ln w="9525">
+                  <a:solidFill>
+                    <a:schemeClr val="tx1">
+                      <a:alpha val="29000"/>
+                    </a:schemeClr>
+                  </a:solidFill>
+                </a:ln>
+                <a:latin typeface="Times New Roman"/>
+                <a:ea typeface="맑은 고딕"/>
+                <a:cs typeface="Times New Roman"/>
+              </a:rPr>
+              <a:t>  </a:t>
+            </a:r>
+            <a:r>
+              <a:rPr lang="en-US" altLang="ko-KR" sz="2000" dirty="0">
+                <a:ln w="9525">
+                  <a:solidFill>
+                    <a:schemeClr val="tx1">
+                      <a:alpha val="29000"/>
+                    </a:schemeClr>
+                  </a:solidFill>
+                </a:ln>
+                <a:latin typeface="Times New Roman"/>
+                <a:ea typeface="맑은 고딕"/>
+                <a:cs typeface="Times New Roman"/>
+              </a:rPr>
+              <a:t>retention</a:t>
+            </a:r>
+            <a:r>
+              <a:rPr lang="ko-KR" altLang="en-US" sz="2000" dirty="0">
+                <a:ln w="9525">
+                  <a:solidFill>
+                    <a:schemeClr val="tx1">
+                      <a:alpha val="29000"/>
+                    </a:schemeClr>
+                  </a:solidFill>
+                </a:ln>
+                <a:latin typeface="Times New Roman"/>
+                <a:ea typeface="맑은 고딕"/>
+                <a:cs typeface="Times New Roman"/>
+              </a:rPr>
+              <a:t> </a:t>
+            </a:r>
+            <a:r>
+              <a:rPr lang="en-US" altLang="ko-KR" sz="2000" dirty="0">
+                <a:ln w="9525">
+                  <a:solidFill>
+                    <a:schemeClr val="tx1">
+                      <a:alpha val="29000"/>
+                    </a:schemeClr>
+                  </a:solidFill>
+                </a:ln>
+                <a:latin typeface="Times New Roman"/>
+                <a:ea typeface="맑은 고딕"/>
+                <a:cs typeface="Times New Roman"/>
+              </a:rPr>
+              <a:t>failure</a:t>
+            </a:r>
+            <a:r>
+              <a:rPr lang="ko-KR" altLang="en-US" sz="2000" dirty="0">
+                <a:ln w="9525">
+                  <a:solidFill>
+                    <a:schemeClr val="tx1">
+                      <a:alpha val="29000"/>
+                    </a:schemeClr>
+                  </a:solidFill>
+                </a:ln>
+                <a:latin typeface="Times New Roman"/>
+                <a:ea typeface="맑은 고딕"/>
+                <a:cs typeface="Times New Roman"/>
+              </a:rPr>
+              <a:t>는 프로그램이 완료된 산포의 </a:t>
+            </a:r>
+            <a:r>
+              <a:rPr lang="en-US" altLang="ko-KR" sz="2000" dirty="0">
+                <a:ln w="9525">
+                  <a:solidFill>
+                    <a:schemeClr val="tx1">
+                      <a:alpha val="29000"/>
+                    </a:schemeClr>
+                  </a:solidFill>
+                </a:ln>
+                <a:latin typeface="Times New Roman"/>
+                <a:ea typeface="맑은 고딕"/>
+                <a:cs typeface="Times New Roman"/>
+              </a:rPr>
+              <a:t>memory window</a:t>
+            </a:r>
+            <a:r>
+              <a:rPr lang="ko-KR" altLang="en-US" sz="2000" dirty="0">
+                <a:ln w="9525">
+                  <a:solidFill>
+                    <a:schemeClr val="tx1">
+                      <a:alpha val="29000"/>
+                    </a:schemeClr>
+                  </a:solidFill>
+                </a:ln>
+                <a:latin typeface="Times New Roman"/>
+                <a:ea typeface="맑은 고딕"/>
+                <a:cs typeface="Times New Roman"/>
+              </a:rPr>
+              <a:t>를 감소시킴</a:t>
+            </a:r>
+          </a:p>
+        </p:txBody>
+      </p:sp>
+      <p:grpSp>
+        <p:nvGrpSpPr>
+          <p:cNvPr id="148" name="그룹 147">
+            <a:extLst>
+              <a:ext uri="{FF2B5EF4-FFF2-40B4-BE49-F238E27FC236}">
+                <a16:creationId xmlns:a16="http://schemas.microsoft.com/office/drawing/2014/main" id="{38406C99-2751-D660-D4DC-A1878FA56216}"/>
+              </a:ext>
+            </a:extLst>
+          </p:cNvPr>
+          <p:cNvGrpSpPr/>
+          <p:nvPr/>
+        </p:nvGrpSpPr>
+        <p:grpSpPr>
+          <a:xfrm>
+            <a:off x="3916154" y="1984393"/>
+            <a:ext cx="4855023" cy="1887729"/>
+            <a:chOff x="1243852" y="6710751"/>
+            <a:chExt cx="4855023" cy="1887729"/>
+          </a:xfrm>
+        </p:grpSpPr>
+        <p:grpSp>
+          <p:nvGrpSpPr>
+            <p:cNvPr id="151" name="그룹 150">
+              <a:extLst>
+                <a:ext uri="{FF2B5EF4-FFF2-40B4-BE49-F238E27FC236}">
+                  <a16:creationId xmlns:a16="http://schemas.microsoft.com/office/drawing/2014/main" id="{B286B78F-470F-11F8-DCC7-BB68E495B296}"/>
+                </a:ext>
+              </a:extLst>
+            </p:cNvPr>
+            <p:cNvGrpSpPr/>
+            <p:nvPr/>
+          </p:nvGrpSpPr>
+          <p:grpSpPr>
+            <a:xfrm>
+              <a:off x="1243852" y="6710751"/>
+              <a:ext cx="4855023" cy="1887729"/>
+              <a:chOff x="1891552" y="487631"/>
+              <a:chExt cx="4855023" cy="4014610"/>
+            </a:xfrm>
+          </p:grpSpPr>
+          <p:sp>
+            <p:nvSpPr>
+              <p:cNvPr id="153" name="자유형: 도형 152">
+                <a:extLst>
+                  <a:ext uri="{FF2B5EF4-FFF2-40B4-BE49-F238E27FC236}">
+                    <a16:creationId xmlns:a16="http://schemas.microsoft.com/office/drawing/2014/main" id="{87E071EA-0E85-BEDC-C178-B4760616F5D9}"/>
+                  </a:ext>
+                </a:extLst>
+              </p:cNvPr>
+              <p:cNvSpPr/>
+              <p:nvPr/>
+            </p:nvSpPr>
+            <p:spPr>
+              <a:xfrm>
+                <a:off x="2114550" y="1733542"/>
+                <a:ext cx="1085850" cy="1714508"/>
+              </a:xfrm>
+              <a:custGeom>
+                <a:avLst/>
+                <a:gdLst>
+                  <a:gd name="connsiteX0" fmla="*/ 0 w 1085850"/>
+                  <a:gd name="connsiteY0" fmla="*/ 1714508 h 1714508"/>
+                  <a:gd name="connsiteX1" fmla="*/ 577850 w 1085850"/>
+                  <a:gd name="connsiteY1" fmla="*/ 8 h 1714508"/>
+                  <a:gd name="connsiteX2" fmla="*/ 1085850 w 1085850"/>
+                  <a:gd name="connsiteY2" fmla="*/ 1695458 h 1714508"/>
+                </a:gdLst>
+                <a:ahLst/>
+                <a:cxnLst>
+                  <a:cxn ang="0">
+                    <a:pos x="connsiteX0" y="connsiteY0"/>
+                  </a:cxn>
+                  <a:cxn ang="0">
+                    <a:pos x="connsiteX1" y="connsiteY1"/>
+                  </a:cxn>
+                  <a:cxn ang="0">
+                    <a:pos x="connsiteX2" y="connsiteY2"/>
+                  </a:cxn>
+                </a:cxnLst>
+                <a:rect l="l" t="t" r="r" b="b"/>
+                <a:pathLst>
+                  <a:path w="1085850" h="1714508">
+                    <a:moveTo>
+                      <a:pt x="0" y="1714508"/>
+                    </a:moveTo>
+                    <a:cubicBezTo>
+                      <a:pt x="198437" y="858845"/>
+                      <a:pt x="396875" y="3183"/>
+                      <a:pt x="577850" y="8"/>
+                    </a:cubicBezTo>
+                    <a:cubicBezTo>
+                      <a:pt x="758825" y="-3167"/>
+                      <a:pt x="922337" y="846145"/>
+                      <a:pt x="1085850" y="1695458"/>
+                    </a:cubicBezTo>
+                  </a:path>
+                </a:pathLst>
+              </a:custGeom>
+              <a:noFill/>
+              <a:ln w="57150"/>
+            </p:spPr>
+            <p:style>
+              <a:lnRef idx="2">
+                <a:schemeClr val="accent1">
+                  <a:shade val="15000"/>
+                </a:schemeClr>
+              </a:lnRef>
+              <a:fillRef idx="1">
+                <a:schemeClr val="accent1"/>
+              </a:fillRef>
+              <a:effectRef idx="0">
+                <a:schemeClr val="accent1"/>
+              </a:effectRef>
+              <a:fontRef idx="minor">
+                <a:schemeClr val="lt1"/>
+              </a:fontRef>
+            </p:style>
+            <p:txBody>
+              <a:bodyPr rtlCol="0" anchor="ctr"/>
+              <a:lstStyle/>
+              <a:p>
+                <a:pPr algn="ctr"/>
+                <a:endParaRPr lang="ko-KR" altLang="en-US"/>
+              </a:p>
+            </p:txBody>
+          </p:sp>
+          <p:cxnSp>
+            <p:nvCxnSpPr>
+              <p:cNvPr id="154" name="직선 연결선 153">
+                <a:extLst>
+                  <a:ext uri="{FF2B5EF4-FFF2-40B4-BE49-F238E27FC236}">
+                    <a16:creationId xmlns:a16="http://schemas.microsoft.com/office/drawing/2014/main" id="{0C799CD1-16A5-C91C-EFF9-7C4D6BF9D907}"/>
+                  </a:ext>
+                </a:extLst>
+              </p:cNvPr>
+              <p:cNvCxnSpPr>
+                <a:cxnSpLocks/>
+              </p:cNvCxnSpPr>
+              <p:nvPr/>
+            </p:nvCxnSpPr>
+            <p:spPr>
+              <a:xfrm flipV="1">
+                <a:off x="1891552" y="3437470"/>
+                <a:ext cx="4855023" cy="8768"/>
+              </a:xfrm>
+              <a:prstGeom prst="line">
+                <a:avLst/>
+              </a:prstGeom>
+              <a:ln w="38100">
+                <a:solidFill>
+                  <a:schemeClr val="tx1"/>
+                </a:solidFill>
+              </a:ln>
+            </p:spPr>
+            <p:style>
+              <a:lnRef idx="2">
+                <a:schemeClr val="accent1"/>
+              </a:lnRef>
+              <a:fillRef idx="0">
+                <a:schemeClr val="accent1"/>
+              </a:fillRef>
+              <a:effectRef idx="1">
+                <a:schemeClr val="accent1"/>
+              </a:effectRef>
+              <a:fontRef idx="minor">
+                <a:schemeClr val="tx1"/>
+              </a:fontRef>
+            </p:style>
+          </p:cxnSp>
+          <p:sp>
+            <p:nvSpPr>
+              <p:cNvPr id="155" name="자유형: 도형 154">
+                <a:extLst>
+                  <a:ext uri="{FF2B5EF4-FFF2-40B4-BE49-F238E27FC236}">
+                    <a16:creationId xmlns:a16="http://schemas.microsoft.com/office/drawing/2014/main" id="{BD9D4617-C92B-A9E2-4648-F18228B4ECA8}"/>
+                  </a:ext>
+                </a:extLst>
+              </p:cNvPr>
+              <p:cNvSpPr/>
+              <p:nvPr/>
+            </p:nvSpPr>
+            <p:spPr>
+              <a:xfrm>
+                <a:off x="4508500" y="1733542"/>
+                <a:ext cx="330200" cy="1714508"/>
+              </a:xfrm>
+              <a:custGeom>
+                <a:avLst/>
+                <a:gdLst>
+                  <a:gd name="connsiteX0" fmla="*/ 0 w 1085850"/>
+                  <a:gd name="connsiteY0" fmla="*/ 1714508 h 1714508"/>
+                  <a:gd name="connsiteX1" fmla="*/ 577850 w 1085850"/>
+                  <a:gd name="connsiteY1" fmla="*/ 8 h 1714508"/>
+                  <a:gd name="connsiteX2" fmla="*/ 1085850 w 1085850"/>
+                  <a:gd name="connsiteY2" fmla="*/ 1695458 h 1714508"/>
+                </a:gdLst>
+                <a:ahLst/>
+                <a:cxnLst>
+                  <a:cxn ang="0">
+                    <a:pos x="connsiteX0" y="connsiteY0"/>
+                  </a:cxn>
+                  <a:cxn ang="0">
+                    <a:pos x="connsiteX1" y="connsiteY1"/>
+                  </a:cxn>
+                  <a:cxn ang="0">
+                    <a:pos x="connsiteX2" y="connsiteY2"/>
+                  </a:cxn>
+                </a:cxnLst>
+                <a:rect l="l" t="t" r="r" b="b"/>
+                <a:pathLst>
+                  <a:path w="1085850" h="1714508">
+                    <a:moveTo>
+                      <a:pt x="0" y="1714508"/>
+                    </a:moveTo>
+                    <a:cubicBezTo>
+                      <a:pt x="198437" y="858845"/>
+                      <a:pt x="396875" y="3183"/>
+                      <a:pt x="577850" y="8"/>
+                    </a:cubicBezTo>
+                    <a:cubicBezTo>
+                      <a:pt x="758825" y="-3167"/>
+                      <a:pt x="922337" y="846145"/>
+                      <a:pt x="1085850" y="1695458"/>
+                    </a:cubicBezTo>
+                  </a:path>
+                </a:pathLst>
+              </a:custGeom>
+              <a:noFill/>
+              <a:ln w="28575"/>
+            </p:spPr>
+            <p:style>
+              <a:lnRef idx="2">
+                <a:schemeClr val="accent1">
+                  <a:shade val="15000"/>
+                </a:schemeClr>
+              </a:lnRef>
+              <a:fillRef idx="1">
+                <a:schemeClr val="accent1"/>
+              </a:fillRef>
+              <a:effectRef idx="0">
+                <a:schemeClr val="accent1"/>
+              </a:effectRef>
+              <a:fontRef idx="minor">
+                <a:schemeClr val="lt1"/>
+              </a:fontRef>
+            </p:style>
+            <p:txBody>
+              <a:bodyPr rtlCol="0" anchor="ctr"/>
+              <a:lstStyle/>
+              <a:p>
+                <a:pPr algn="ctr"/>
+                <a:endParaRPr lang="ko-KR" altLang="en-US"/>
+              </a:p>
+            </p:txBody>
+          </p:sp>
+          <p:sp>
+            <p:nvSpPr>
+              <p:cNvPr id="156" name="자유형: 도형 155">
+                <a:extLst>
+                  <a:ext uri="{FF2B5EF4-FFF2-40B4-BE49-F238E27FC236}">
+                    <a16:creationId xmlns:a16="http://schemas.microsoft.com/office/drawing/2014/main" id="{BE08FB68-E36F-2D8F-A3E0-07BBBE0507B5}"/>
+                  </a:ext>
+                </a:extLst>
+              </p:cNvPr>
+              <p:cNvSpPr/>
+              <p:nvPr/>
+            </p:nvSpPr>
+            <p:spPr>
+              <a:xfrm>
+                <a:off x="5029200" y="1733542"/>
+                <a:ext cx="330200" cy="1714508"/>
+              </a:xfrm>
+              <a:custGeom>
+                <a:avLst/>
+                <a:gdLst>
+                  <a:gd name="connsiteX0" fmla="*/ 0 w 1085850"/>
+                  <a:gd name="connsiteY0" fmla="*/ 1714508 h 1714508"/>
+                  <a:gd name="connsiteX1" fmla="*/ 577850 w 1085850"/>
+                  <a:gd name="connsiteY1" fmla="*/ 8 h 1714508"/>
+                  <a:gd name="connsiteX2" fmla="*/ 1085850 w 1085850"/>
+                  <a:gd name="connsiteY2" fmla="*/ 1695458 h 1714508"/>
+                </a:gdLst>
+                <a:ahLst/>
+                <a:cxnLst>
+                  <a:cxn ang="0">
+                    <a:pos x="connsiteX0" y="connsiteY0"/>
+                  </a:cxn>
+                  <a:cxn ang="0">
+                    <a:pos x="connsiteX1" y="connsiteY1"/>
+                  </a:cxn>
+                  <a:cxn ang="0">
+                    <a:pos x="connsiteX2" y="connsiteY2"/>
+                  </a:cxn>
+                </a:cxnLst>
+                <a:rect l="l" t="t" r="r" b="b"/>
+                <a:pathLst>
+                  <a:path w="1085850" h="1714508">
+                    <a:moveTo>
+                      <a:pt x="0" y="1714508"/>
+                    </a:moveTo>
+                    <a:cubicBezTo>
+                      <a:pt x="198437" y="858845"/>
+                      <a:pt x="396875" y="3183"/>
+                      <a:pt x="577850" y="8"/>
+                    </a:cubicBezTo>
+                    <a:cubicBezTo>
+                      <a:pt x="758825" y="-3167"/>
+                      <a:pt x="922337" y="846145"/>
+                      <a:pt x="1085850" y="1695458"/>
+                    </a:cubicBezTo>
+                  </a:path>
+                </a:pathLst>
+              </a:custGeom>
+              <a:noFill/>
+              <a:ln w="28575"/>
+            </p:spPr>
+            <p:style>
+              <a:lnRef idx="2">
+                <a:schemeClr val="accent1">
+                  <a:shade val="15000"/>
+                </a:schemeClr>
+              </a:lnRef>
+              <a:fillRef idx="1">
+                <a:schemeClr val="accent1"/>
+              </a:fillRef>
+              <a:effectRef idx="0">
+                <a:schemeClr val="accent1"/>
+              </a:effectRef>
+              <a:fontRef idx="minor">
+                <a:schemeClr val="lt1"/>
+              </a:fontRef>
+            </p:style>
+            <p:txBody>
+              <a:bodyPr rtlCol="0" anchor="ctr"/>
+              <a:lstStyle/>
+              <a:p>
+                <a:pPr algn="ctr"/>
+                <a:endParaRPr lang="ko-KR" altLang="en-US"/>
+              </a:p>
+            </p:txBody>
+          </p:sp>
+          <p:sp>
+            <p:nvSpPr>
+              <p:cNvPr id="157" name="자유형: 도형 156">
+                <a:extLst>
+                  <a:ext uri="{FF2B5EF4-FFF2-40B4-BE49-F238E27FC236}">
+                    <a16:creationId xmlns:a16="http://schemas.microsoft.com/office/drawing/2014/main" id="{4CB384F7-DEA9-7FDC-F7F8-3E02D2E399C9}"/>
+                  </a:ext>
+                </a:extLst>
+              </p:cNvPr>
+              <p:cNvSpPr/>
+              <p:nvPr/>
+            </p:nvSpPr>
+            <p:spPr>
+              <a:xfrm>
+                <a:off x="5549900" y="1733542"/>
+                <a:ext cx="330200" cy="1714508"/>
+              </a:xfrm>
+              <a:custGeom>
+                <a:avLst/>
+                <a:gdLst>
+                  <a:gd name="connsiteX0" fmla="*/ 0 w 1085850"/>
+                  <a:gd name="connsiteY0" fmla="*/ 1714508 h 1714508"/>
+                  <a:gd name="connsiteX1" fmla="*/ 577850 w 1085850"/>
+                  <a:gd name="connsiteY1" fmla="*/ 8 h 1714508"/>
+                  <a:gd name="connsiteX2" fmla="*/ 1085850 w 1085850"/>
+                  <a:gd name="connsiteY2" fmla="*/ 1695458 h 1714508"/>
+                </a:gdLst>
+                <a:ahLst/>
+                <a:cxnLst>
+                  <a:cxn ang="0">
+                    <a:pos x="connsiteX0" y="connsiteY0"/>
+                  </a:cxn>
+                  <a:cxn ang="0">
+                    <a:pos x="connsiteX1" y="connsiteY1"/>
+                  </a:cxn>
+                  <a:cxn ang="0">
+                    <a:pos x="connsiteX2" y="connsiteY2"/>
+                  </a:cxn>
+                </a:cxnLst>
+                <a:rect l="l" t="t" r="r" b="b"/>
+                <a:pathLst>
+                  <a:path w="1085850" h="1714508">
+                    <a:moveTo>
+                      <a:pt x="0" y="1714508"/>
+                    </a:moveTo>
+                    <a:cubicBezTo>
+                      <a:pt x="198437" y="858845"/>
+                      <a:pt x="396875" y="3183"/>
+                      <a:pt x="577850" y="8"/>
+                    </a:cubicBezTo>
+                    <a:cubicBezTo>
+                      <a:pt x="758825" y="-3167"/>
+                      <a:pt x="922337" y="846145"/>
+                      <a:pt x="1085850" y="1695458"/>
+                    </a:cubicBezTo>
+                  </a:path>
+                </a:pathLst>
+              </a:custGeom>
+              <a:noFill/>
+              <a:ln w="28575"/>
+            </p:spPr>
+            <p:style>
+              <a:lnRef idx="2">
+                <a:schemeClr val="accent1">
+                  <a:shade val="15000"/>
+                </a:schemeClr>
+              </a:lnRef>
+              <a:fillRef idx="1">
+                <a:schemeClr val="accent1"/>
+              </a:fillRef>
+              <a:effectRef idx="0">
+                <a:schemeClr val="accent1"/>
+              </a:effectRef>
+              <a:fontRef idx="minor">
+                <a:schemeClr val="lt1"/>
+              </a:fontRef>
+            </p:style>
+            <p:txBody>
+              <a:bodyPr rtlCol="0" anchor="ctr"/>
+              <a:lstStyle/>
+              <a:p>
+                <a:pPr algn="ctr"/>
+                <a:endParaRPr lang="ko-KR" altLang="en-US"/>
+              </a:p>
+            </p:txBody>
+          </p:sp>
+          <p:sp>
+            <p:nvSpPr>
+              <p:cNvPr id="158" name="자유형: 도형 157">
+                <a:extLst>
+                  <a:ext uri="{FF2B5EF4-FFF2-40B4-BE49-F238E27FC236}">
+                    <a16:creationId xmlns:a16="http://schemas.microsoft.com/office/drawing/2014/main" id="{ADFECE3C-213A-1A63-1C0A-FEA56D301240}"/>
+                  </a:ext>
+                </a:extLst>
+              </p:cNvPr>
+              <p:cNvSpPr/>
+              <p:nvPr/>
+            </p:nvSpPr>
+            <p:spPr>
+              <a:xfrm>
+                <a:off x="6070600" y="1733542"/>
+                <a:ext cx="330200" cy="1714508"/>
+              </a:xfrm>
+              <a:custGeom>
+                <a:avLst/>
+                <a:gdLst>
+                  <a:gd name="connsiteX0" fmla="*/ 0 w 1085850"/>
+                  <a:gd name="connsiteY0" fmla="*/ 1714508 h 1714508"/>
+                  <a:gd name="connsiteX1" fmla="*/ 577850 w 1085850"/>
+                  <a:gd name="connsiteY1" fmla="*/ 8 h 1714508"/>
+                  <a:gd name="connsiteX2" fmla="*/ 1085850 w 1085850"/>
+                  <a:gd name="connsiteY2" fmla="*/ 1695458 h 1714508"/>
+                </a:gdLst>
+                <a:ahLst/>
+                <a:cxnLst>
+                  <a:cxn ang="0">
+                    <a:pos x="connsiteX0" y="connsiteY0"/>
+                  </a:cxn>
+                  <a:cxn ang="0">
+                    <a:pos x="connsiteX1" y="connsiteY1"/>
+                  </a:cxn>
+                  <a:cxn ang="0">
+                    <a:pos x="connsiteX2" y="connsiteY2"/>
+                  </a:cxn>
+                </a:cxnLst>
+                <a:rect l="l" t="t" r="r" b="b"/>
+                <a:pathLst>
+                  <a:path w="1085850" h="1714508">
+                    <a:moveTo>
+                      <a:pt x="0" y="1714508"/>
+                    </a:moveTo>
+                    <a:cubicBezTo>
+                      <a:pt x="198437" y="858845"/>
+                      <a:pt x="396875" y="3183"/>
+                      <a:pt x="577850" y="8"/>
+                    </a:cubicBezTo>
+                    <a:cubicBezTo>
+                      <a:pt x="758825" y="-3167"/>
+                      <a:pt x="922337" y="846145"/>
+                      <a:pt x="1085850" y="1695458"/>
+                    </a:cubicBezTo>
+                  </a:path>
+                </a:pathLst>
+              </a:custGeom>
+              <a:noFill/>
+              <a:ln w="28575"/>
+            </p:spPr>
+            <p:style>
+              <a:lnRef idx="2">
+                <a:schemeClr val="accent1">
+                  <a:shade val="15000"/>
+                </a:schemeClr>
+              </a:lnRef>
+              <a:fillRef idx="1">
+                <a:schemeClr val="accent1"/>
+              </a:fillRef>
+              <a:effectRef idx="0">
+                <a:schemeClr val="accent1"/>
+              </a:effectRef>
+              <a:fontRef idx="minor">
+                <a:schemeClr val="lt1"/>
+              </a:fontRef>
+            </p:style>
+            <p:txBody>
+              <a:bodyPr rtlCol="0" anchor="ctr"/>
+              <a:lstStyle/>
+              <a:p>
+                <a:pPr algn="ctr"/>
+                <a:endParaRPr lang="ko-KR" altLang="en-US"/>
+              </a:p>
+            </p:txBody>
+          </p:sp>
+          <p:sp>
+            <p:nvSpPr>
+              <p:cNvPr id="159" name="자유형: 도형 158">
+                <a:extLst>
+                  <a:ext uri="{FF2B5EF4-FFF2-40B4-BE49-F238E27FC236}">
+                    <a16:creationId xmlns:a16="http://schemas.microsoft.com/office/drawing/2014/main" id="{B50D7640-1B1E-DB7E-7F48-63DB289965F5}"/>
+                  </a:ext>
+                </a:extLst>
+              </p:cNvPr>
+              <p:cNvSpPr/>
+              <p:nvPr/>
+            </p:nvSpPr>
+            <p:spPr>
+              <a:xfrm>
+                <a:off x="4368800" y="1733542"/>
+                <a:ext cx="330200" cy="1714508"/>
+              </a:xfrm>
+              <a:custGeom>
+                <a:avLst/>
+                <a:gdLst>
+                  <a:gd name="connsiteX0" fmla="*/ 0 w 1085850"/>
+                  <a:gd name="connsiteY0" fmla="*/ 1714508 h 1714508"/>
+                  <a:gd name="connsiteX1" fmla="*/ 577850 w 1085850"/>
+                  <a:gd name="connsiteY1" fmla="*/ 8 h 1714508"/>
+                  <a:gd name="connsiteX2" fmla="*/ 1085850 w 1085850"/>
+                  <a:gd name="connsiteY2" fmla="*/ 1695458 h 1714508"/>
+                </a:gdLst>
+                <a:ahLst/>
+                <a:cxnLst>
+                  <a:cxn ang="0">
+                    <a:pos x="connsiteX0" y="connsiteY0"/>
+                  </a:cxn>
+                  <a:cxn ang="0">
+                    <a:pos x="connsiteX1" y="connsiteY1"/>
+                  </a:cxn>
+                  <a:cxn ang="0">
+                    <a:pos x="connsiteX2" y="connsiteY2"/>
+                  </a:cxn>
+                </a:cxnLst>
+                <a:rect l="l" t="t" r="r" b="b"/>
+                <a:pathLst>
+                  <a:path w="1085850" h="1714508">
+                    <a:moveTo>
+                      <a:pt x="0" y="1714508"/>
+                    </a:moveTo>
+                    <a:cubicBezTo>
+                      <a:pt x="198437" y="858845"/>
+                      <a:pt x="396875" y="3183"/>
+                      <a:pt x="577850" y="8"/>
+                    </a:cubicBezTo>
+                    <a:cubicBezTo>
+                      <a:pt x="758825" y="-3167"/>
+                      <a:pt x="922337" y="846145"/>
+                      <a:pt x="1085850" y="1695458"/>
+                    </a:cubicBezTo>
+                  </a:path>
+                </a:pathLst>
+              </a:custGeom>
+              <a:noFill/>
+              <a:ln w="19050">
+                <a:solidFill>
+                  <a:srgbClr val="FF0000"/>
+                </a:solidFill>
+                <a:prstDash val="dash"/>
+              </a:ln>
+            </p:spPr>
+            <p:style>
+              <a:lnRef idx="2">
+                <a:schemeClr val="accent1">
+                  <a:shade val="15000"/>
+                </a:schemeClr>
+              </a:lnRef>
+              <a:fillRef idx="1">
+                <a:schemeClr val="accent1"/>
+              </a:fillRef>
+              <a:effectRef idx="0">
+                <a:schemeClr val="accent1"/>
+              </a:effectRef>
+              <a:fontRef idx="minor">
+                <a:schemeClr val="lt1"/>
+              </a:fontRef>
+            </p:style>
+            <p:txBody>
+              <a:bodyPr rtlCol="0" anchor="ctr"/>
+              <a:lstStyle/>
+              <a:p>
+                <a:pPr algn="ctr"/>
+                <a:endParaRPr lang="ko-KR" altLang="en-US"/>
+              </a:p>
+            </p:txBody>
+          </p:sp>
+          <p:sp>
+            <p:nvSpPr>
+              <p:cNvPr id="160" name="자유형: 도형 159">
+                <a:extLst>
+                  <a:ext uri="{FF2B5EF4-FFF2-40B4-BE49-F238E27FC236}">
+                    <a16:creationId xmlns:a16="http://schemas.microsoft.com/office/drawing/2014/main" id="{416DB71C-B0EF-0B75-E1D2-7DC7570BF692}"/>
+                  </a:ext>
+                </a:extLst>
+              </p:cNvPr>
+              <p:cNvSpPr/>
+              <p:nvPr/>
+            </p:nvSpPr>
+            <p:spPr>
+              <a:xfrm>
+                <a:off x="4889500" y="1733542"/>
+                <a:ext cx="330200" cy="1714508"/>
+              </a:xfrm>
+              <a:custGeom>
+                <a:avLst/>
+                <a:gdLst>
+                  <a:gd name="connsiteX0" fmla="*/ 0 w 1085850"/>
+                  <a:gd name="connsiteY0" fmla="*/ 1714508 h 1714508"/>
+                  <a:gd name="connsiteX1" fmla="*/ 577850 w 1085850"/>
+                  <a:gd name="connsiteY1" fmla="*/ 8 h 1714508"/>
+                  <a:gd name="connsiteX2" fmla="*/ 1085850 w 1085850"/>
+                  <a:gd name="connsiteY2" fmla="*/ 1695458 h 1714508"/>
+                </a:gdLst>
+                <a:ahLst/>
+                <a:cxnLst>
+                  <a:cxn ang="0">
+                    <a:pos x="connsiteX0" y="connsiteY0"/>
+                  </a:cxn>
+                  <a:cxn ang="0">
+                    <a:pos x="connsiteX1" y="connsiteY1"/>
+                  </a:cxn>
+                  <a:cxn ang="0">
+                    <a:pos x="connsiteX2" y="connsiteY2"/>
+                  </a:cxn>
+                </a:cxnLst>
+                <a:rect l="l" t="t" r="r" b="b"/>
+                <a:pathLst>
+                  <a:path w="1085850" h="1714508">
+                    <a:moveTo>
+                      <a:pt x="0" y="1714508"/>
+                    </a:moveTo>
+                    <a:cubicBezTo>
+                      <a:pt x="198437" y="858845"/>
+                      <a:pt x="396875" y="3183"/>
+                      <a:pt x="577850" y="8"/>
+                    </a:cubicBezTo>
+                    <a:cubicBezTo>
+                      <a:pt x="758825" y="-3167"/>
+                      <a:pt x="922337" y="846145"/>
+                      <a:pt x="1085850" y="1695458"/>
+                    </a:cubicBezTo>
+                  </a:path>
+                </a:pathLst>
+              </a:custGeom>
+              <a:noFill/>
+              <a:ln w="19050">
+                <a:solidFill>
+                  <a:srgbClr val="FF0000"/>
+                </a:solidFill>
+                <a:prstDash val="dash"/>
+              </a:ln>
+            </p:spPr>
+            <p:style>
+              <a:lnRef idx="2">
+                <a:schemeClr val="accent1">
+                  <a:shade val="15000"/>
+                </a:schemeClr>
+              </a:lnRef>
+              <a:fillRef idx="1">
+                <a:schemeClr val="accent1"/>
+              </a:fillRef>
+              <a:effectRef idx="0">
+                <a:schemeClr val="accent1"/>
+              </a:effectRef>
+              <a:fontRef idx="minor">
+                <a:schemeClr val="lt1"/>
+              </a:fontRef>
+            </p:style>
+            <p:txBody>
+              <a:bodyPr rtlCol="0" anchor="ctr"/>
+              <a:lstStyle/>
+              <a:p>
+                <a:pPr algn="ctr"/>
+                <a:endParaRPr lang="ko-KR" altLang="en-US"/>
+              </a:p>
+            </p:txBody>
+          </p:sp>
+          <p:sp>
+            <p:nvSpPr>
+              <p:cNvPr id="161" name="자유형: 도형 160">
+                <a:extLst>
+                  <a:ext uri="{FF2B5EF4-FFF2-40B4-BE49-F238E27FC236}">
+                    <a16:creationId xmlns:a16="http://schemas.microsoft.com/office/drawing/2014/main" id="{F6097671-7E92-1935-A528-ABB864E0F7D1}"/>
+                  </a:ext>
+                </a:extLst>
+              </p:cNvPr>
+              <p:cNvSpPr/>
+              <p:nvPr/>
+            </p:nvSpPr>
+            <p:spPr>
+              <a:xfrm>
+                <a:off x="5410200" y="1733542"/>
+                <a:ext cx="330200" cy="1714508"/>
+              </a:xfrm>
+              <a:custGeom>
+                <a:avLst/>
+                <a:gdLst>
+                  <a:gd name="connsiteX0" fmla="*/ 0 w 1085850"/>
+                  <a:gd name="connsiteY0" fmla="*/ 1714508 h 1714508"/>
+                  <a:gd name="connsiteX1" fmla="*/ 577850 w 1085850"/>
+                  <a:gd name="connsiteY1" fmla="*/ 8 h 1714508"/>
+                  <a:gd name="connsiteX2" fmla="*/ 1085850 w 1085850"/>
+                  <a:gd name="connsiteY2" fmla="*/ 1695458 h 1714508"/>
+                </a:gdLst>
+                <a:ahLst/>
+                <a:cxnLst>
+                  <a:cxn ang="0">
+                    <a:pos x="connsiteX0" y="connsiteY0"/>
+                  </a:cxn>
+                  <a:cxn ang="0">
+                    <a:pos x="connsiteX1" y="connsiteY1"/>
+                  </a:cxn>
+                  <a:cxn ang="0">
+                    <a:pos x="connsiteX2" y="connsiteY2"/>
+                  </a:cxn>
+                </a:cxnLst>
+                <a:rect l="l" t="t" r="r" b="b"/>
+                <a:pathLst>
+                  <a:path w="1085850" h="1714508">
+                    <a:moveTo>
+                      <a:pt x="0" y="1714508"/>
+                    </a:moveTo>
+                    <a:cubicBezTo>
+                      <a:pt x="198437" y="858845"/>
+                      <a:pt x="396875" y="3183"/>
+                      <a:pt x="577850" y="8"/>
+                    </a:cubicBezTo>
+                    <a:cubicBezTo>
+                      <a:pt x="758825" y="-3167"/>
+                      <a:pt x="922337" y="846145"/>
+                      <a:pt x="1085850" y="1695458"/>
+                    </a:cubicBezTo>
+                  </a:path>
+                </a:pathLst>
+              </a:custGeom>
+              <a:noFill/>
+              <a:ln w="19050">
+                <a:solidFill>
+                  <a:srgbClr val="FF0000"/>
+                </a:solidFill>
+                <a:prstDash val="dash"/>
+              </a:ln>
+            </p:spPr>
+            <p:style>
+              <a:lnRef idx="2">
+                <a:schemeClr val="accent1">
+                  <a:shade val="15000"/>
+                </a:schemeClr>
+              </a:lnRef>
+              <a:fillRef idx="1">
+                <a:schemeClr val="accent1"/>
+              </a:fillRef>
+              <a:effectRef idx="0">
+                <a:schemeClr val="accent1"/>
+              </a:effectRef>
+              <a:fontRef idx="minor">
+                <a:schemeClr val="lt1"/>
+              </a:fontRef>
+            </p:style>
+            <p:txBody>
+              <a:bodyPr rtlCol="0" anchor="ctr"/>
+              <a:lstStyle/>
+              <a:p>
+                <a:pPr algn="ctr"/>
+                <a:endParaRPr lang="ko-KR" altLang="en-US"/>
+              </a:p>
+            </p:txBody>
+          </p:sp>
+          <p:sp>
+            <p:nvSpPr>
+              <p:cNvPr id="162" name="자유형: 도형 161">
+                <a:extLst>
+                  <a:ext uri="{FF2B5EF4-FFF2-40B4-BE49-F238E27FC236}">
+                    <a16:creationId xmlns:a16="http://schemas.microsoft.com/office/drawing/2014/main" id="{77FBA6FF-CA49-F050-2367-B38ABF4D9B27}"/>
+                  </a:ext>
+                </a:extLst>
+              </p:cNvPr>
+              <p:cNvSpPr/>
+              <p:nvPr/>
+            </p:nvSpPr>
+            <p:spPr>
+              <a:xfrm>
+                <a:off x="5930900" y="1733542"/>
+                <a:ext cx="330200" cy="1714508"/>
+              </a:xfrm>
+              <a:custGeom>
+                <a:avLst/>
+                <a:gdLst>
+                  <a:gd name="connsiteX0" fmla="*/ 0 w 1085850"/>
+                  <a:gd name="connsiteY0" fmla="*/ 1714508 h 1714508"/>
+                  <a:gd name="connsiteX1" fmla="*/ 577850 w 1085850"/>
+                  <a:gd name="connsiteY1" fmla="*/ 8 h 1714508"/>
+                  <a:gd name="connsiteX2" fmla="*/ 1085850 w 1085850"/>
+                  <a:gd name="connsiteY2" fmla="*/ 1695458 h 1714508"/>
+                </a:gdLst>
+                <a:ahLst/>
+                <a:cxnLst>
+                  <a:cxn ang="0">
+                    <a:pos x="connsiteX0" y="connsiteY0"/>
+                  </a:cxn>
+                  <a:cxn ang="0">
+                    <a:pos x="connsiteX1" y="connsiteY1"/>
+                  </a:cxn>
+                  <a:cxn ang="0">
+                    <a:pos x="connsiteX2" y="connsiteY2"/>
+                  </a:cxn>
+                </a:cxnLst>
+                <a:rect l="l" t="t" r="r" b="b"/>
+                <a:pathLst>
+                  <a:path w="1085850" h="1714508">
+                    <a:moveTo>
+                      <a:pt x="0" y="1714508"/>
+                    </a:moveTo>
+                    <a:cubicBezTo>
+                      <a:pt x="198437" y="858845"/>
+                      <a:pt x="396875" y="3183"/>
+                      <a:pt x="577850" y="8"/>
+                    </a:cubicBezTo>
+                    <a:cubicBezTo>
+                      <a:pt x="758825" y="-3167"/>
+                      <a:pt x="922337" y="846145"/>
+                      <a:pt x="1085850" y="1695458"/>
+                    </a:cubicBezTo>
+                  </a:path>
+                </a:pathLst>
+              </a:custGeom>
+              <a:noFill/>
+              <a:ln w="19050">
+                <a:solidFill>
+                  <a:srgbClr val="FF0000"/>
+                </a:solidFill>
+                <a:prstDash val="dash"/>
+              </a:ln>
+            </p:spPr>
+            <p:style>
+              <a:lnRef idx="2">
+                <a:schemeClr val="accent1">
+                  <a:shade val="15000"/>
+                </a:schemeClr>
+              </a:lnRef>
+              <a:fillRef idx="1">
+                <a:schemeClr val="accent1"/>
+              </a:fillRef>
+              <a:effectRef idx="0">
+                <a:schemeClr val="accent1"/>
+              </a:effectRef>
+              <a:fontRef idx="minor">
+                <a:schemeClr val="lt1"/>
+              </a:fontRef>
+            </p:style>
+            <p:txBody>
+              <a:bodyPr rtlCol="0" anchor="ctr"/>
+              <a:lstStyle/>
+              <a:p>
+                <a:pPr algn="ctr"/>
+                <a:endParaRPr lang="ko-KR" altLang="en-US"/>
+              </a:p>
+            </p:txBody>
+          </p:sp>
+          <p:sp>
+            <p:nvSpPr>
+              <p:cNvPr id="163" name="화살표: 왼쪽 162">
+                <a:extLst>
+                  <a:ext uri="{FF2B5EF4-FFF2-40B4-BE49-F238E27FC236}">
+                    <a16:creationId xmlns:a16="http://schemas.microsoft.com/office/drawing/2014/main" id="{1621D767-D5D0-8694-CEB1-15E4757A1FFF}"/>
+                  </a:ext>
+                </a:extLst>
+              </p:cNvPr>
+              <p:cNvSpPr/>
+              <p:nvPr/>
+            </p:nvSpPr>
+            <p:spPr>
+              <a:xfrm>
+                <a:off x="4518025" y="1555750"/>
+                <a:ext cx="209550" cy="82550"/>
+              </a:xfrm>
+              <a:prstGeom prst="leftArrow">
+                <a:avLst/>
+              </a:prstGeom>
+            </p:spPr>
+            <p:style>
+              <a:lnRef idx="2">
+                <a:schemeClr val="accent1">
+                  <a:shade val="15000"/>
+                </a:schemeClr>
+              </a:lnRef>
+              <a:fillRef idx="1">
+                <a:schemeClr val="accent1"/>
+              </a:fillRef>
+              <a:effectRef idx="0">
+                <a:schemeClr val="accent1"/>
+              </a:effectRef>
+              <a:fontRef idx="minor">
+                <a:schemeClr val="lt1"/>
+              </a:fontRef>
+            </p:style>
+            <p:txBody>
+              <a:bodyPr rtlCol="0" anchor="ctr"/>
+              <a:lstStyle/>
+              <a:p>
+                <a:pPr algn="ctr"/>
+                <a:endParaRPr lang="ko-KR" altLang="en-US"/>
+              </a:p>
+            </p:txBody>
+          </p:sp>
+          <p:sp>
+            <p:nvSpPr>
+              <p:cNvPr id="164" name="화살표: 왼쪽 163">
+                <a:extLst>
+                  <a:ext uri="{FF2B5EF4-FFF2-40B4-BE49-F238E27FC236}">
+                    <a16:creationId xmlns:a16="http://schemas.microsoft.com/office/drawing/2014/main" id="{6DB4EA02-3DDD-59EE-047E-26208119CD64}"/>
+                  </a:ext>
+                </a:extLst>
+              </p:cNvPr>
+              <p:cNvSpPr/>
+              <p:nvPr/>
+            </p:nvSpPr>
+            <p:spPr>
+              <a:xfrm>
+                <a:off x="5029200" y="1555750"/>
+                <a:ext cx="209550" cy="82550"/>
+              </a:xfrm>
+              <a:prstGeom prst="leftArrow">
+                <a:avLst/>
+              </a:prstGeom>
+            </p:spPr>
+            <p:style>
+              <a:lnRef idx="2">
+                <a:schemeClr val="accent1">
+                  <a:shade val="15000"/>
+                </a:schemeClr>
+              </a:lnRef>
+              <a:fillRef idx="1">
+                <a:schemeClr val="accent1"/>
+              </a:fillRef>
+              <a:effectRef idx="0">
+                <a:schemeClr val="accent1"/>
+              </a:effectRef>
+              <a:fontRef idx="minor">
+                <a:schemeClr val="lt1"/>
+              </a:fontRef>
+            </p:style>
+            <p:txBody>
+              <a:bodyPr rtlCol="0" anchor="ctr"/>
+              <a:lstStyle/>
+              <a:p>
+                <a:pPr algn="ctr"/>
+                <a:endParaRPr lang="ko-KR" altLang="en-US"/>
+              </a:p>
+            </p:txBody>
+          </p:sp>
+          <p:sp>
+            <p:nvSpPr>
+              <p:cNvPr id="165" name="화살표: 왼쪽 164">
+                <a:extLst>
+                  <a:ext uri="{FF2B5EF4-FFF2-40B4-BE49-F238E27FC236}">
+                    <a16:creationId xmlns:a16="http://schemas.microsoft.com/office/drawing/2014/main" id="{1D187FDC-D8B8-7B97-1A41-840A59537510}"/>
+                  </a:ext>
+                </a:extLst>
+              </p:cNvPr>
+              <p:cNvSpPr/>
+              <p:nvPr/>
+            </p:nvSpPr>
+            <p:spPr>
+              <a:xfrm>
+                <a:off x="5540375" y="1555750"/>
+                <a:ext cx="209550" cy="82550"/>
+              </a:xfrm>
+              <a:prstGeom prst="leftArrow">
+                <a:avLst/>
+              </a:prstGeom>
+            </p:spPr>
+            <p:style>
+              <a:lnRef idx="2">
+                <a:schemeClr val="accent1">
+                  <a:shade val="15000"/>
+                </a:schemeClr>
+              </a:lnRef>
+              <a:fillRef idx="1">
+                <a:schemeClr val="accent1"/>
+              </a:fillRef>
+              <a:effectRef idx="0">
+                <a:schemeClr val="accent1"/>
+              </a:effectRef>
+              <a:fontRef idx="minor">
+                <a:schemeClr val="lt1"/>
+              </a:fontRef>
+            </p:style>
+            <p:txBody>
+              <a:bodyPr rtlCol="0" anchor="ctr"/>
+              <a:lstStyle/>
+              <a:p>
+                <a:pPr algn="ctr"/>
+                <a:endParaRPr lang="ko-KR" altLang="en-US"/>
+              </a:p>
+            </p:txBody>
+          </p:sp>
+          <p:sp>
+            <p:nvSpPr>
+              <p:cNvPr id="166" name="화살표: 왼쪽 165">
+                <a:extLst>
+                  <a:ext uri="{FF2B5EF4-FFF2-40B4-BE49-F238E27FC236}">
+                    <a16:creationId xmlns:a16="http://schemas.microsoft.com/office/drawing/2014/main" id="{C5C81004-2FB8-4F70-8172-8DE428A97A42}"/>
+                  </a:ext>
+                </a:extLst>
+              </p:cNvPr>
+              <p:cNvSpPr/>
+              <p:nvPr/>
+            </p:nvSpPr>
+            <p:spPr>
+              <a:xfrm>
+                <a:off x="6051550" y="1555750"/>
+                <a:ext cx="209550" cy="82550"/>
+              </a:xfrm>
+              <a:prstGeom prst="leftArrow">
+                <a:avLst/>
+              </a:prstGeom>
+            </p:spPr>
+            <p:style>
+              <a:lnRef idx="2">
+                <a:schemeClr val="accent1">
+                  <a:shade val="15000"/>
+                </a:schemeClr>
+              </a:lnRef>
+              <a:fillRef idx="1">
+                <a:schemeClr val="accent1"/>
+              </a:fillRef>
+              <a:effectRef idx="0">
+                <a:schemeClr val="accent1"/>
+              </a:effectRef>
+              <a:fontRef idx="minor">
+                <a:schemeClr val="lt1"/>
+              </a:fontRef>
+            </p:style>
+            <p:txBody>
+              <a:bodyPr rtlCol="0" anchor="ctr"/>
+              <a:lstStyle/>
+              <a:p>
+                <a:pPr algn="ctr"/>
+                <a:endParaRPr lang="ko-KR" altLang="en-US"/>
+              </a:p>
+            </p:txBody>
+          </p:sp>
+          <p:cxnSp>
+            <p:nvCxnSpPr>
+              <p:cNvPr id="167" name="직선 연결선 166">
+                <a:extLst>
+                  <a:ext uri="{FF2B5EF4-FFF2-40B4-BE49-F238E27FC236}">
+                    <a16:creationId xmlns:a16="http://schemas.microsoft.com/office/drawing/2014/main" id="{F1FEF953-2BFF-2E41-03A7-CCE818094AAE}"/>
+                  </a:ext>
+                </a:extLst>
+              </p:cNvPr>
+              <p:cNvCxnSpPr>
+                <a:cxnSpLocks/>
+              </p:cNvCxnSpPr>
+              <p:nvPr/>
+            </p:nvCxnSpPr>
+            <p:spPr>
+              <a:xfrm>
+                <a:off x="3200400" y="1155700"/>
+                <a:ext cx="0" cy="3143250"/>
+              </a:xfrm>
+              <a:prstGeom prst="line">
+                <a:avLst/>
+              </a:prstGeom>
+            </p:spPr>
+            <p:style>
+              <a:lnRef idx="2">
+                <a:schemeClr val="accent1"/>
+              </a:lnRef>
+              <a:fillRef idx="0">
+                <a:schemeClr val="accent1"/>
+              </a:fillRef>
+              <a:effectRef idx="1">
+                <a:schemeClr val="accent1"/>
+              </a:effectRef>
+              <a:fontRef idx="minor">
+                <a:schemeClr val="tx1"/>
+              </a:fontRef>
+            </p:style>
+          </p:cxnSp>
+          <p:cxnSp>
+            <p:nvCxnSpPr>
+              <p:cNvPr id="168" name="직선 연결선 167">
+                <a:extLst>
+                  <a:ext uri="{FF2B5EF4-FFF2-40B4-BE49-F238E27FC236}">
+                    <a16:creationId xmlns:a16="http://schemas.microsoft.com/office/drawing/2014/main" id="{AE60D902-A709-03FF-2F63-F18616EF2F31}"/>
+                  </a:ext>
+                </a:extLst>
+              </p:cNvPr>
+              <p:cNvCxnSpPr>
+                <a:cxnSpLocks/>
+              </p:cNvCxnSpPr>
+              <p:nvPr/>
+            </p:nvCxnSpPr>
+            <p:spPr>
+              <a:xfrm>
+                <a:off x="6070600" y="1149350"/>
+                <a:ext cx="0" cy="3149600"/>
+              </a:xfrm>
+              <a:prstGeom prst="line">
+                <a:avLst/>
+              </a:prstGeom>
+            </p:spPr>
+            <p:style>
+              <a:lnRef idx="2">
+                <a:schemeClr val="accent1"/>
+              </a:lnRef>
+              <a:fillRef idx="0">
+                <a:schemeClr val="accent1"/>
+              </a:fillRef>
+              <a:effectRef idx="1">
+                <a:schemeClr val="accent1"/>
+              </a:effectRef>
+              <a:fontRef idx="minor">
+                <a:schemeClr val="tx1"/>
+              </a:fontRef>
+            </p:style>
+          </p:cxnSp>
+          <p:cxnSp>
+            <p:nvCxnSpPr>
+              <p:cNvPr id="169" name="직선 연결선 168">
+                <a:extLst>
+                  <a:ext uri="{FF2B5EF4-FFF2-40B4-BE49-F238E27FC236}">
+                    <a16:creationId xmlns:a16="http://schemas.microsoft.com/office/drawing/2014/main" id="{B848AF67-5D73-04F2-7882-641745885B2D}"/>
+                  </a:ext>
+                </a:extLst>
+              </p:cNvPr>
+              <p:cNvCxnSpPr>
+                <a:cxnSpLocks/>
+              </p:cNvCxnSpPr>
+              <p:nvPr/>
+            </p:nvCxnSpPr>
+            <p:spPr>
+              <a:xfrm>
+                <a:off x="5930900" y="1149350"/>
+                <a:ext cx="0" cy="3149600"/>
+              </a:xfrm>
+              <a:prstGeom prst="line">
+                <a:avLst/>
+              </a:prstGeom>
+              <a:ln>
+                <a:solidFill>
+                  <a:srgbClr val="FF0000"/>
+                </a:solidFill>
+              </a:ln>
+            </p:spPr>
+            <p:style>
+              <a:lnRef idx="2">
+                <a:schemeClr val="accent1"/>
+              </a:lnRef>
+              <a:fillRef idx="0">
+                <a:schemeClr val="accent1"/>
+              </a:fillRef>
+              <a:effectRef idx="1">
+                <a:schemeClr val="accent1"/>
+              </a:effectRef>
+              <a:fontRef idx="minor">
+                <a:schemeClr val="tx1"/>
+              </a:fontRef>
+            </p:style>
+          </p:cxnSp>
+          <p:sp>
+            <p:nvSpPr>
+              <p:cNvPr id="170" name="TextBox 169">
+                <a:extLst>
+                  <a:ext uri="{FF2B5EF4-FFF2-40B4-BE49-F238E27FC236}">
+                    <a16:creationId xmlns:a16="http://schemas.microsoft.com/office/drawing/2014/main" id="{6EEA435D-4DC4-B975-88F6-8B0503E3BD39}"/>
+                  </a:ext>
+                </a:extLst>
+              </p:cNvPr>
+              <p:cNvSpPr txBox="1"/>
+              <p:nvPr/>
+            </p:nvSpPr>
+            <p:spPr>
+              <a:xfrm>
+                <a:off x="3530599" y="3536472"/>
+                <a:ext cx="2070102" cy="850909"/>
+              </a:xfrm>
+              <a:prstGeom prst="rect">
+                <a:avLst/>
+              </a:prstGeom>
+              <a:noFill/>
+            </p:spPr>
+            <p:txBody>
+              <a:bodyPr wrap="square" rtlCol="0">
+                <a:spAutoFit/>
+              </a:bodyPr>
+              <a:lstStyle/>
+              <a:p>
+                <a:pPr algn="ctr"/>
+                <a:r>
+                  <a:rPr lang="en-US" altLang="ko-KR" sz="1000" b="1" dirty="0"/>
+                  <a:t>gap margin (memory window)</a:t>
+                </a:r>
+              </a:p>
+              <a:p>
+                <a:pPr algn="ctr"/>
+                <a:r>
+                  <a:rPr lang="en-US" altLang="ko-KR" sz="1000" b="1" dirty="0"/>
+                  <a:t>degradation</a:t>
+                </a:r>
+                <a:endParaRPr lang="ko-KR" altLang="en-US" sz="1000" b="1" dirty="0"/>
+              </a:p>
+            </p:txBody>
+          </p:sp>
+          <p:sp>
+            <p:nvSpPr>
+              <p:cNvPr id="171" name="TextBox 170">
+                <a:extLst>
+                  <a:ext uri="{FF2B5EF4-FFF2-40B4-BE49-F238E27FC236}">
+                    <a16:creationId xmlns:a16="http://schemas.microsoft.com/office/drawing/2014/main" id="{C3683DDD-CC93-E94D-E648-41227EFF5EE6}"/>
+                  </a:ext>
+                </a:extLst>
+              </p:cNvPr>
+              <p:cNvSpPr txBox="1"/>
+              <p:nvPr/>
+            </p:nvSpPr>
+            <p:spPr>
+              <a:xfrm>
+                <a:off x="2155825" y="487631"/>
+                <a:ext cx="4165600" cy="916362"/>
+              </a:xfrm>
+              <a:prstGeom prst="rect">
+                <a:avLst/>
+              </a:prstGeom>
+              <a:noFill/>
+            </p:spPr>
+            <p:txBody>
+              <a:bodyPr wrap="square" rtlCol="0">
+                <a:spAutoFit/>
+              </a:bodyPr>
+              <a:lstStyle/>
+              <a:p>
+                <a:pPr algn="ctr"/>
+                <a:r>
+                  <a:rPr lang="en-US" altLang="ko-KR" sz="1100" dirty="0"/>
+                  <a:t>Electron </a:t>
+                </a:r>
+                <a:r>
+                  <a:rPr lang="en-US" altLang="ko-KR" sz="1100" dirty="0" err="1"/>
+                  <a:t>detrapping</a:t>
+                </a:r>
+                <a:r>
+                  <a:rPr lang="en-US" altLang="ko-KR" sz="1100" dirty="0"/>
+                  <a:t> effect</a:t>
+                </a:r>
+                <a:br>
+                  <a:rPr lang="en-US" altLang="ko-KR" sz="1100" dirty="0"/>
+                </a:br>
+                <a:r>
+                  <a:rPr lang="en-US" altLang="ko-KR" sz="1100" dirty="0"/>
+                  <a:t>in </a:t>
+                </a:r>
+                <a:r>
+                  <a:rPr lang="en-US" altLang="ko-KR" sz="1100" dirty="0" err="1"/>
+                  <a:t>Δ</a:t>
+                </a:r>
+                <a:r>
+                  <a:rPr lang="en-US" altLang="ko-KR" sz="1100" i="1" dirty="0" err="1"/>
+                  <a:t>V</a:t>
+                </a:r>
+                <a:r>
+                  <a:rPr lang="en-US" altLang="ko-KR" sz="1100" baseline="-25000" dirty="0" err="1"/>
+                  <a:t>th</a:t>
+                </a:r>
+                <a:r>
+                  <a:rPr lang="en-US" altLang="ko-KR" sz="1100" dirty="0"/>
+                  <a:t> distribution</a:t>
+                </a:r>
+                <a:endParaRPr lang="ko-KR" altLang="en-US" sz="1100" dirty="0"/>
+              </a:p>
+            </p:txBody>
+          </p:sp>
+          <p:cxnSp>
+            <p:nvCxnSpPr>
+              <p:cNvPr id="172" name="직선 화살표 연결선 171">
+                <a:extLst>
+                  <a:ext uri="{FF2B5EF4-FFF2-40B4-BE49-F238E27FC236}">
+                    <a16:creationId xmlns:a16="http://schemas.microsoft.com/office/drawing/2014/main" id="{920D2F45-EF14-6E31-8C66-12CDFEE9CD87}"/>
+                  </a:ext>
+                </a:extLst>
+              </p:cNvPr>
+              <p:cNvCxnSpPr>
+                <a:cxnSpLocks/>
+                <a:stCxn id="170" idx="1"/>
+              </p:cNvCxnSpPr>
+              <p:nvPr/>
+            </p:nvCxnSpPr>
+            <p:spPr>
+              <a:xfrm flipH="1">
+                <a:off x="3200400" y="3961926"/>
+                <a:ext cx="330199" cy="0"/>
+              </a:xfrm>
+              <a:prstGeom prst="straightConnector1">
+                <a:avLst/>
+              </a:prstGeom>
+              <a:ln>
+                <a:tailEnd type="triangle"/>
+              </a:ln>
+            </p:spPr>
+            <p:style>
+              <a:lnRef idx="2">
+                <a:schemeClr val="accent1"/>
+              </a:lnRef>
+              <a:fillRef idx="0">
+                <a:schemeClr val="accent1"/>
+              </a:fillRef>
+              <a:effectRef idx="1">
+                <a:schemeClr val="accent1"/>
+              </a:effectRef>
+              <a:fontRef idx="minor">
+                <a:schemeClr val="tx1"/>
+              </a:fontRef>
+            </p:style>
+          </p:cxnSp>
+          <p:cxnSp>
+            <p:nvCxnSpPr>
+              <p:cNvPr id="173" name="직선 화살표 연결선 172">
+                <a:extLst>
+                  <a:ext uri="{FF2B5EF4-FFF2-40B4-BE49-F238E27FC236}">
+                    <a16:creationId xmlns:a16="http://schemas.microsoft.com/office/drawing/2014/main" id="{92343334-B602-B8FE-1745-A2679552EA1E}"/>
+                  </a:ext>
+                </a:extLst>
+              </p:cNvPr>
+              <p:cNvCxnSpPr>
+                <a:cxnSpLocks/>
+                <a:stCxn id="170" idx="3"/>
+              </p:cNvCxnSpPr>
+              <p:nvPr/>
+            </p:nvCxnSpPr>
+            <p:spPr>
+              <a:xfrm flipV="1">
+                <a:off x="5600701" y="3961924"/>
+                <a:ext cx="495298" cy="2"/>
+              </a:xfrm>
+              <a:prstGeom prst="straightConnector1">
+                <a:avLst/>
+              </a:prstGeom>
+              <a:ln>
+                <a:tailEnd type="triangle"/>
+              </a:ln>
+            </p:spPr>
+            <p:style>
+              <a:lnRef idx="2">
+                <a:schemeClr val="accent1"/>
+              </a:lnRef>
+              <a:fillRef idx="0">
+                <a:schemeClr val="accent1"/>
+              </a:fillRef>
+              <a:effectRef idx="1">
+                <a:schemeClr val="accent1"/>
+              </a:effectRef>
+              <a:fontRef idx="minor">
+                <a:schemeClr val="tx1"/>
+              </a:fontRef>
+            </p:style>
+          </p:cxnSp>
+          <p:sp>
+            <p:nvSpPr>
+              <p:cNvPr id="174" name="화살표: 왼쪽 173">
+                <a:extLst>
+                  <a:ext uri="{FF2B5EF4-FFF2-40B4-BE49-F238E27FC236}">
+                    <a16:creationId xmlns:a16="http://schemas.microsoft.com/office/drawing/2014/main" id="{FB6EE1B7-3A58-8A48-4686-21CA2BECC0DF}"/>
+                  </a:ext>
+                </a:extLst>
+              </p:cNvPr>
+              <p:cNvSpPr/>
+              <p:nvPr/>
+            </p:nvSpPr>
+            <p:spPr>
+              <a:xfrm>
+                <a:off x="5761036" y="4305908"/>
+                <a:ext cx="339725" cy="196333"/>
+              </a:xfrm>
+              <a:prstGeom prst="leftArrow">
+                <a:avLst/>
+              </a:prstGeom>
+              <a:solidFill>
+                <a:srgbClr val="FF0000"/>
+              </a:solidFill>
+            </p:spPr>
+            <p:style>
+              <a:lnRef idx="2">
+                <a:schemeClr val="accent1">
+                  <a:shade val="15000"/>
+                </a:schemeClr>
+              </a:lnRef>
+              <a:fillRef idx="1">
+                <a:schemeClr val="accent1"/>
+              </a:fillRef>
+              <a:effectRef idx="0">
+                <a:schemeClr val="accent1"/>
+              </a:effectRef>
+              <a:fontRef idx="minor">
+                <a:schemeClr val="lt1"/>
+              </a:fontRef>
+            </p:style>
+            <p:txBody>
+              <a:bodyPr rtlCol="0" anchor="ctr"/>
+              <a:lstStyle/>
+              <a:p>
+                <a:pPr algn="ctr"/>
+                <a:endParaRPr lang="ko-KR" altLang="en-US"/>
+              </a:p>
+            </p:txBody>
+          </p:sp>
+          <p:sp>
+            <p:nvSpPr>
+              <p:cNvPr id="175" name="TextBox 174">
+                <a:extLst>
+                  <a:ext uri="{FF2B5EF4-FFF2-40B4-BE49-F238E27FC236}">
+                    <a16:creationId xmlns:a16="http://schemas.microsoft.com/office/drawing/2014/main" id="{7BD4B787-04B0-AF8F-E7B7-D8F91B15E10D}"/>
+                  </a:ext>
+                </a:extLst>
+              </p:cNvPr>
+              <p:cNvSpPr txBox="1"/>
+              <p:nvPr/>
+            </p:nvSpPr>
+            <p:spPr>
+              <a:xfrm>
+                <a:off x="2343147" y="2444392"/>
+                <a:ext cx="692154" cy="461666"/>
+              </a:xfrm>
+              <a:prstGeom prst="rect">
+                <a:avLst/>
+              </a:prstGeom>
+              <a:noFill/>
+            </p:spPr>
+            <p:txBody>
+              <a:bodyPr wrap="square" rtlCol="0">
+                <a:spAutoFit/>
+              </a:bodyPr>
+              <a:lstStyle/>
+              <a:p>
+                <a:pPr algn="ctr"/>
+                <a:r>
+                  <a:rPr lang="en-US" altLang="ko-KR" sz="1200"/>
+                  <a:t>Erased</a:t>
+                </a:r>
+                <a:br>
+                  <a:rPr lang="en-US" altLang="ko-KR" sz="1200"/>
+                </a:br>
+                <a:r>
+                  <a:rPr lang="en-US" altLang="ko-KR" sz="1200"/>
+                  <a:t>Cells</a:t>
+                </a:r>
+                <a:endParaRPr lang="ko-KR" altLang="en-US" sz="1200"/>
+              </a:p>
+            </p:txBody>
+          </p:sp>
+          <p:sp>
+            <p:nvSpPr>
+              <p:cNvPr id="176" name="TextBox 175">
+                <a:extLst>
+                  <a:ext uri="{FF2B5EF4-FFF2-40B4-BE49-F238E27FC236}">
+                    <a16:creationId xmlns:a16="http://schemas.microsoft.com/office/drawing/2014/main" id="{3325EE47-927C-FB7F-148A-DC551F6A78B2}"/>
+                  </a:ext>
+                </a:extLst>
+              </p:cNvPr>
+              <p:cNvSpPr txBox="1"/>
+              <p:nvPr/>
+            </p:nvSpPr>
+            <p:spPr>
+              <a:xfrm>
+                <a:off x="4889500" y="1123338"/>
+                <a:ext cx="1219198" cy="425455"/>
+              </a:xfrm>
+              <a:prstGeom prst="rect">
+                <a:avLst/>
+              </a:prstGeom>
+              <a:noFill/>
+            </p:spPr>
+            <p:txBody>
+              <a:bodyPr wrap="square" rtlCol="0">
+                <a:spAutoFit/>
+              </a:bodyPr>
+              <a:lstStyle/>
+              <a:p>
+                <a:pPr algn="ctr"/>
+                <a:r>
+                  <a:rPr lang="en-US" altLang="ko-KR" sz="700"/>
+                  <a:t>Programmed Cells</a:t>
+                </a:r>
+                <a:endParaRPr lang="ko-KR" altLang="en-US" sz="700"/>
+              </a:p>
+            </p:txBody>
+          </p:sp>
+        </p:grpSp>
+        <p:sp>
+          <p:nvSpPr>
+            <p:cNvPr id="150" name="TextBox 149">
+              <a:extLst>
+                <a:ext uri="{FF2B5EF4-FFF2-40B4-BE49-F238E27FC236}">
+                  <a16:creationId xmlns:a16="http://schemas.microsoft.com/office/drawing/2014/main" id="{E6C0B1DE-346E-2662-CCAB-44C8BD8D23C3}"/>
+                </a:ext>
+              </a:extLst>
+            </p:cNvPr>
+            <p:cNvSpPr txBox="1"/>
+            <p:nvPr/>
+          </p:nvSpPr>
+          <p:spPr>
+            <a:xfrm>
+              <a:off x="3328113" y="7425866"/>
+              <a:ext cx="377347" cy="369332"/>
+            </a:xfrm>
+            <a:prstGeom prst="rect">
+              <a:avLst/>
+            </a:prstGeom>
+            <a:noFill/>
+          </p:spPr>
+          <p:txBody>
+            <a:bodyPr wrap="square" rtlCol="0">
+              <a:spAutoFit/>
+            </a:bodyPr>
+            <a:lstStyle/>
+            <a:p>
+              <a:r>
+                <a:rPr lang="en-US" altLang="ko-KR"/>
+                <a:t>…</a:t>
+              </a:r>
+              <a:endParaRPr lang="ko-KR" altLang="en-US"/>
+            </a:p>
+          </p:txBody>
+        </p:sp>
+      </p:grpSp>
+      <p:sp>
+        <p:nvSpPr>
+          <p:cNvPr id="308" name="TextBox 307">
+            <a:extLst>
+              <a:ext uri="{FF2B5EF4-FFF2-40B4-BE49-F238E27FC236}">
+                <a16:creationId xmlns:a16="http://schemas.microsoft.com/office/drawing/2014/main" id="{ED6AAE71-58AD-D1BB-55DE-F3B54D84314F}"/>
+              </a:ext>
+            </a:extLst>
+          </p:cNvPr>
+          <p:cNvSpPr txBox="1"/>
+          <p:nvPr/>
+        </p:nvSpPr>
+        <p:spPr>
+          <a:xfrm>
+            <a:off x="3043010" y="4507845"/>
+            <a:ext cx="5303017" cy="1015663"/>
+          </a:xfrm>
+          <a:prstGeom prst="rect">
+            <a:avLst/>
+          </a:prstGeom>
+          <a:noFill/>
+        </p:spPr>
+        <p:txBody>
+          <a:bodyPr wrap="square" rtlCol="0">
+            <a:spAutoFit/>
+          </a:bodyPr>
+          <a:lstStyle/>
+          <a:p>
+            <a:r>
+              <a:rPr lang="en-US" altLang="ko-KR" sz="2000" dirty="0">
+                <a:ln w="9525">
+                  <a:solidFill>
+                    <a:schemeClr val="tx1">
+                      <a:alpha val="29000"/>
+                    </a:schemeClr>
+                  </a:solidFill>
+                </a:ln>
+                <a:latin typeface="Times New Roman"/>
+                <a:ea typeface="맑은 고딕"/>
+                <a:cs typeface="Times New Roman"/>
+              </a:rPr>
+              <a:t>3-D NAND flash memory</a:t>
+            </a:r>
+            <a:r>
+              <a:rPr lang="ko-KR" altLang="en-US" sz="2000" dirty="0">
+                <a:ln w="9525">
+                  <a:solidFill>
+                    <a:schemeClr val="tx1">
+                      <a:alpha val="29000"/>
+                    </a:schemeClr>
+                  </a:solidFill>
+                </a:ln>
+                <a:latin typeface="Times New Roman"/>
+                <a:ea typeface="맑은 고딕"/>
+                <a:cs typeface="Times New Roman"/>
+              </a:rPr>
+              <a:t>의 </a:t>
+            </a:r>
+            <a:r>
+              <a:rPr lang="en-US" altLang="ko-KR" sz="2000" dirty="0">
+                <a:ln w="9525">
+                  <a:solidFill>
+                    <a:schemeClr val="tx1">
+                      <a:alpha val="29000"/>
+                    </a:schemeClr>
+                  </a:solidFill>
+                </a:ln>
+                <a:latin typeface="Times New Roman"/>
+                <a:ea typeface="맑은 고딕"/>
+                <a:cs typeface="Times New Roman"/>
+              </a:rPr>
+              <a:t>cylindrical </a:t>
+            </a:r>
+            <a:r>
+              <a:rPr lang="ko-KR" altLang="en-US" sz="2000" dirty="0">
+                <a:ln w="9525">
+                  <a:solidFill>
+                    <a:schemeClr val="tx1">
+                      <a:alpha val="29000"/>
+                    </a:schemeClr>
+                  </a:solidFill>
+                </a:ln>
+                <a:latin typeface="Times New Roman"/>
+                <a:ea typeface="맑은 고딕"/>
+                <a:cs typeface="Times New Roman"/>
+              </a:rPr>
+              <a:t>구조에서의 </a:t>
+            </a:r>
+            <a:r>
+              <a:rPr lang="en-US" altLang="ko-KR" sz="2000" dirty="0">
+                <a:ln w="9525">
+                  <a:solidFill>
+                    <a:schemeClr val="tx1">
+                      <a:alpha val="29000"/>
+                    </a:schemeClr>
+                  </a:solidFill>
+                </a:ln>
+                <a:latin typeface="Times New Roman"/>
+                <a:ea typeface="맑은 고딕"/>
+                <a:cs typeface="Times New Roman"/>
+              </a:rPr>
+              <a:t>BETOX</a:t>
+            </a:r>
+            <a:r>
+              <a:rPr lang="ko-KR" altLang="en-US" sz="2000" dirty="0">
+                <a:ln w="9525">
+                  <a:solidFill>
+                    <a:schemeClr val="tx1">
+                      <a:alpha val="29000"/>
+                    </a:schemeClr>
+                  </a:solidFill>
+                </a:ln>
+                <a:latin typeface="Times New Roman"/>
+                <a:ea typeface="맑은 고딕"/>
+                <a:cs typeface="Times New Roman"/>
+              </a:rPr>
+              <a:t>에서 </a:t>
+            </a:r>
+            <a:r>
+              <a:rPr lang="en-US" altLang="ko-KR" sz="2000" dirty="0">
+                <a:ln w="9525">
+                  <a:solidFill>
+                    <a:schemeClr val="tx1">
+                      <a:alpha val="29000"/>
+                    </a:schemeClr>
+                  </a:solidFill>
+                </a:ln>
+                <a:latin typeface="Times New Roman"/>
+                <a:ea typeface="맑은 고딕"/>
+                <a:cs typeface="Times New Roman"/>
+              </a:rPr>
+              <a:t>channel</a:t>
+            </a:r>
+            <a:r>
+              <a:rPr lang="ko-KR" altLang="en-US" sz="2000" dirty="0">
+                <a:ln w="9525">
+                  <a:solidFill>
+                    <a:schemeClr val="tx1">
+                      <a:alpha val="29000"/>
+                    </a:schemeClr>
+                  </a:solidFill>
+                </a:ln>
+                <a:latin typeface="Times New Roman"/>
+                <a:ea typeface="맑은 고딕"/>
+                <a:cs typeface="Times New Roman"/>
+              </a:rPr>
+              <a:t>으로 </a:t>
+            </a:r>
+            <a:r>
+              <a:rPr lang="en-US" altLang="ko-KR" sz="2000" dirty="0" err="1">
+                <a:ln w="9525">
+                  <a:solidFill>
+                    <a:schemeClr val="tx1">
+                      <a:alpha val="29000"/>
+                    </a:schemeClr>
+                  </a:solidFill>
+                </a:ln>
+                <a:latin typeface="Times New Roman"/>
+                <a:ea typeface="맑은 고딕"/>
+                <a:cs typeface="Times New Roman"/>
+              </a:rPr>
+              <a:t>detrapping</a:t>
+            </a:r>
+            <a:r>
+              <a:rPr lang="ko-KR" altLang="en-US" sz="2000" dirty="0">
+                <a:ln w="9525">
+                  <a:solidFill>
+                    <a:schemeClr val="tx1">
+                      <a:alpha val="29000"/>
+                    </a:schemeClr>
+                  </a:solidFill>
+                </a:ln>
+                <a:latin typeface="Times New Roman"/>
+                <a:ea typeface="맑은 고딕"/>
+                <a:cs typeface="Times New Roman"/>
+              </a:rPr>
+              <a:t>이 일어나는 현상에 대한 </a:t>
+            </a:r>
+            <a:r>
+              <a:rPr lang="en-US" altLang="ko-KR" sz="2000" dirty="0">
+                <a:ln w="9525">
+                  <a:solidFill>
+                    <a:schemeClr val="tx1">
+                      <a:alpha val="29000"/>
+                    </a:schemeClr>
+                  </a:solidFill>
+                </a:ln>
+                <a:latin typeface="Times New Roman"/>
+                <a:ea typeface="맑은 고딕"/>
+                <a:cs typeface="Times New Roman"/>
+              </a:rPr>
+              <a:t>modeling </a:t>
+            </a:r>
+            <a:r>
+              <a:rPr lang="ko-KR" altLang="en-US" sz="2000" dirty="0">
+                <a:ln w="9525">
+                  <a:solidFill>
+                    <a:schemeClr val="tx1">
+                      <a:alpha val="29000"/>
+                    </a:schemeClr>
+                  </a:solidFill>
+                </a:ln>
+                <a:latin typeface="Times New Roman"/>
+                <a:ea typeface="맑은 고딕"/>
+                <a:cs typeface="Times New Roman"/>
+              </a:rPr>
+              <a:t>진행</a:t>
+            </a:r>
+          </a:p>
+        </p:txBody>
+      </p:sp>
+      <p:grpSp>
+        <p:nvGrpSpPr>
+          <p:cNvPr id="313" name="그룹 312">
+            <a:extLst>
+              <a:ext uri="{FF2B5EF4-FFF2-40B4-BE49-F238E27FC236}">
+                <a16:creationId xmlns:a16="http://schemas.microsoft.com/office/drawing/2014/main" id="{D0446B26-840C-27E8-FB3A-0DE6929F6DC4}"/>
+              </a:ext>
+            </a:extLst>
+          </p:cNvPr>
+          <p:cNvGrpSpPr/>
+          <p:nvPr/>
+        </p:nvGrpSpPr>
+        <p:grpSpPr>
+          <a:xfrm>
+            <a:off x="625316" y="2525454"/>
+            <a:ext cx="2302341" cy="3689196"/>
+            <a:chOff x="6447475" y="1975285"/>
+            <a:chExt cx="2302341" cy="3689196"/>
+          </a:xfrm>
+        </p:grpSpPr>
+        <p:grpSp>
+          <p:nvGrpSpPr>
+            <p:cNvPr id="210" name="그룹 209">
+              <a:extLst>
+                <a:ext uri="{FF2B5EF4-FFF2-40B4-BE49-F238E27FC236}">
+                  <a16:creationId xmlns:a16="http://schemas.microsoft.com/office/drawing/2014/main" id="{E968EE5A-E974-223C-1B5E-BC43E64550DF}"/>
+                </a:ext>
+              </a:extLst>
+            </p:cNvPr>
+            <p:cNvGrpSpPr/>
+            <p:nvPr/>
+          </p:nvGrpSpPr>
+          <p:grpSpPr>
+            <a:xfrm>
+              <a:off x="6447475" y="2690188"/>
+              <a:ext cx="2064544" cy="2974293"/>
+              <a:chOff x="1409700" y="6504387"/>
+              <a:chExt cx="2064544" cy="2974293"/>
+            </a:xfrm>
+          </p:grpSpPr>
+          <p:pic>
+            <p:nvPicPr>
+              <p:cNvPr id="211" name="그림 210" descr="로고, 그래픽, 디자인이(가) 표시된 사진&#10;&#10;자동 생성된 설명">
+                <a:extLst>
+                  <a:ext uri="{FF2B5EF4-FFF2-40B4-BE49-F238E27FC236}">
+                    <a16:creationId xmlns:a16="http://schemas.microsoft.com/office/drawing/2014/main" id="{20E526E3-9043-CED4-08E9-9DE1295ECBD0}"/>
+                  </a:ext>
+                </a:extLst>
+              </p:cNvPr>
+              <p:cNvPicPr>
+                <a:picLocks noChangeAspect="1"/>
+              </p:cNvPicPr>
+              <p:nvPr/>
+            </p:nvPicPr>
+            <p:blipFill>
+              <a:blip r:embed="rId2" cstate="print">
+                <a:extLst>
+                  <a:ext uri="{28A0092B-C50C-407E-A947-70E740481C1C}">
+                    <a14:useLocalDpi xmlns:a14="http://schemas.microsoft.com/office/drawing/2010/main" val="0"/>
+                  </a:ext>
+                </a:extLst>
+              </a:blip>
+              <a:srcRect l="48303" t="12315" r="12187"/>
+              <a:stretch/>
+            </p:blipFill>
+            <p:spPr>
+              <a:xfrm>
+                <a:off x="1409700" y="6582571"/>
+                <a:ext cx="2064544" cy="2577269"/>
+              </a:xfrm>
+              <a:prstGeom prst="rect">
+                <a:avLst/>
+              </a:prstGeom>
+            </p:spPr>
+          </p:pic>
+          <p:cxnSp>
+            <p:nvCxnSpPr>
+              <p:cNvPr id="213" name="직선 화살표 연결선 212">
+                <a:extLst>
+                  <a:ext uri="{FF2B5EF4-FFF2-40B4-BE49-F238E27FC236}">
+                    <a16:creationId xmlns:a16="http://schemas.microsoft.com/office/drawing/2014/main" id="{3CF29235-04EA-DFF1-4DC5-2B71DA818BBB}"/>
+                  </a:ext>
+                </a:extLst>
+              </p:cNvPr>
+              <p:cNvCxnSpPr/>
+              <p:nvPr/>
+            </p:nvCxnSpPr>
+            <p:spPr>
+              <a:xfrm flipH="1" flipV="1">
+                <a:off x="2070438" y="8436786"/>
+                <a:ext cx="126668" cy="38384"/>
+              </a:xfrm>
+              <a:prstGeom prst="straightConnector1">
+                <a:avLst/>
+              </a:prstGeom>
+              <a:ln>
+                <a:solidFill>
+                  <a:srgbClr val="FFFF00"/>
+                </a:solidFill>
+                <a:tailEnd type="triangle"/>
+              </a:ln>
+            </p:spPr>
+            <p:style>
+              <a:lnRef idx="2">
+                <a:schemeClr val="accent1"/>
+              </a:lnRef>
+              <a:fillRef idx="0">
+                <a:schemeClr val="accent1"/>
+              </a:fillRef>
+              <a:effectRef idx="1">
+                <a:schemeClr val="accent1"/>
+              </a:effectRef>
+              <a:fontRef idx="minor">
+                <a:schemeClr val="tx1"/>
+              </a:fontRef>
+            </p:style>
+          </p:cxnSp>
+          <p:cxnSp>
+            <p:nvCxnSpPr>
+              <p:cNvPr id="214" name="직선 화살표 연결선 213">
+                <a:extLst>
+                  <a:ext uri="{FF2B5EF4-FFF2-40B4-BE49-F238E27FC236}">
+                    <a16:creationId xmlns:a16="http://schemas.microsoft.com/office/drawing/2014/main" id="{3430449A-CECF-CFFC-A6D0-12DCD6B595DB}"/>
+                  </a:ext>
+                </a:extLst>
+              </p:cNvPr>
+              <p:cNvCxnSpPr/>
+              <p:nvPr/>
+            </p:nvCxnSpPr>
+            <p:spPr>
+              <a:xfrm flipH="1" flipV="1">
+                <a:off x="2070438" y="8354633"/>
+                <a:ext cx="126668" cy="38384"/>
+              </a:xfrm>
+              <a:prstGeom prst="straightConnector1">
+                <a:avLst/>
+              </a:prstGeom>
+              <a:ln>
+                <a:solidFill>
+                  <a:srgbClr val="FFFF00"/>
+                </a:solidFill>
+                <a:tailEnd type="triangle"/>
+              </a:ln>
+            </p:spPr>
+            <p:style>
+              <a:lnRef idx="2">
+                <a:schemeClr val="accent1"/>
+              </a:lnRef>
+              <a:fillRef idx="0">
+                <a:schemeClr val="accent1"/>
+              </a:fillRef>
+              <a:effectRef idx="1">
+                <a:schemeClr val="accent1"/>
+              </a:effectRef>
+              <a:fontRef idx="minor">
+                <a:schemeClr val="tx1"/>
+              </a:fontRef>
+            </p:style>
+          </p:cxnSp>
+          <p:cxnSp>
+            <p:nvCxnSpPr>
+              <p:cNvPr id="215" name="직선 화살표 연결선 214">
+                <a:extLst>
+                  <a:ext uri="{FF2B5EF4-FFF2-40B4-BE49-F238E27FC236}">
+                    <a16:creationId xmlns:a16="http://schemas.microsoft.com/office/drawing/2014/main" id="{E5F401F1-330F-2488-C588-F2E64E0DC815}"/>
+                  </a:ext>
+                </a:extLst>
+              </p:cNvPr>
+              <p:cNvCxnSpPr/>
+              <p:nvPr/>
+            </p:nvCxnSpPr>
+            <p:spPr>
+              <a:xfrm flipH="1" flipV="1">
+                <a:off x="2070438" y="8272480"/>
+                <a:ext cx="126668" cy="38384"/>
+              </a:xfrm>
+              <a:prstGeom prst="straightConnector1">
+                <a:avLst/>
+              </a:prstGeom>
+              <a:ln>
+                <a:solidFill>
+                  <a:srgbClr val="FFFF00"/>
+                </a:solidFill>
+                <a:tailEnd type="triangle"/>
+              </a:ln>
+            </p:spPr>
+            <p:style>
+              <a:lnRef idx="2">
+                <a:schemeClr val="accent1"/>
+              </a:lnRef>
+              <a:fillRef idx="0">
+                <a:schemeClr val="accent1"/>
+              </a:fillRef>
+              <a:effectRef idx="1">
+                <a:schemeClr val="accent1"/>
+              </a:effectRef>
+              <a:fontRef idx="minor">
+                <a:schemeClr val="tx1"/>
+              </a:fontRef>
+            </p:style>
+          </p:cxnSp>
+          <p:cxnSp>
+            <p:nvCxnSpPr>
+              <p:cNvPr id="216" name="직선 화살표 연결선 215">
+                <a:extLst>
+                  <a:ext uri="{FF2B5EF4-FFF2-40B4-BE49-F238E27FC236}">
+                    <a16:creationId xmlns:a16="http://schemas.microsoft.com/office/drawing/2014/main" id="{6CCF3B4A-4634-26C2-CD34-9838DC3D8927}"/>
+                  </a:ext>
+                </a:extLst>
+              </p:cNvPr>
+              <p:cNvCxnSpPr/>
+              <p:nvPr/>
+            </p:nvCxnSpPr>
+            <p:spPr>
+              <a:xfrm flipH="1" flipV="1">
+                <a:off x="2070438" y="8190327"/>
+                <a:ext cx="126668" cy="38384"/>
+              </a:xfrm>
+              <a:prstGeom prst="straightConnector1">
+                <a:avLst/>
+              </a:prstGeom>
+              <a:ln>
+                <a:solidFill>
+                  <a:srgbClr val="FFFF00"/>
+                </a:solidFill>
+                <a:tailEnd type="triangle"/>
+              </a:ln>
+            </p:spPr>
+            <p:style>
+              <a:lnRef idx="2">
+                <a:schemeClr val="accent1"/>
+              </a:lnRef>
+              <a:fillRef idx="0">
+                <a:schemeClr val="accent1"/>
+              </a:fillRef>
+              <a:effectRef idx="1">
+                <a:schemeClr val="accent1"/>
+              </a:effectRef>
+              <a:fontRef idx="minor">
+                <a:schemeClr val="tx1"/>
+              </a:fontRef>
+            </p:style>
+          </p:cxnSp>
+          <p:cxnSp>
+            <p:nvCxnSpPr>
+              <p:cNvPr id="217" name="직선 화살표 연결선 216">
+                <a:extLst>
+                  <a:ext uri="{FF2B5EF4-FFF2-40B4-BE49-F238E27FC236}">
+                    <a16:creationId xmlns:a16="http://schemas.microsoft.com/office/drawing/2014/main" id="{2209007B-BA7A-FF41-83B9-506CFD576704}"/>
+                  </a:ext>
+                </a:extLst>
+              </p:cNvPr>
+              <p:cNvCxnSpPr/>
+              <p:nvPr/>
+            </p:nvCxnSpPr>
+            <p:spPr>
+              <a:xfrm flipH="1" flipV="1">
+                <a:off x="2070438" y="8108174"/>
+                <a:ext cx="126668" cy="38384"/>
+              </a:xfrm>
+              <a:prstGeom prst="straightConnector1">
+                <a:avLst/>
+              </a:prstGeom>
+              <a:ln>
+                <a:solidFill>
+                  <a:srgbClr val="FFFF00"/>
+                </a:solidFill>
+                <a:tailEnd type="triangle"/>
+              </a:ln>
+            </p:spPr>
+            <p:style>
+              <a:lnRef idx="2">
+                <a:schemeClr val="accent1"/>
+              </a:lnRef>
+              <a:fillRef idx="0">
+                <a:schemeClr val="accent1"/>
+              </a:fillRef>
+              <a:effectRef idx="1">
+                <a:schemeClr val="accent1"/>
+              </a:effectRef>
+              <a:fontRef idx="minor">
+                <a:schemeClr val="tx1"/>
+              </a:fontRef>
+            </p:style>
+          </p:cxnSp>
+          <p:cxnSp>
+            <p:nvCxnSpPr>
+              <p:cNvPr id="218" name="직선 화살표 연결선 217">
+                <a:extLst>
+                  <a:ext uri="{FF2B5EF4-FFF2-40B4-BE49-F238E27FC236}">
+                    <a16:creationId xmlns:a16="http://schemas.microsoft.com/office/drawing/2014/main" id="{9AB57C62-5F37-38CA-5081-DC26682CFF60}"/>
+                  </a:ext>
+                </a:extLst>
+              </p:cNvPr>
+              <p:cNvCxnSpPr/>
+              <p:nvPr/>
+            </p:nvCxnSpPr>
+            <p:spPr>
+              <a:xfrm flipH="1" flipV="1">
+                <a:off x="2070438" y="8020317"/>
+                <a:ext cx="126668" cy="38384"/>
+              </a:xfrm>
+              <a:prstGeom prst="straightConnector1">
+                <a:avLst/>
+              </a:prstGeom>
+              <a:ln>
+                <a:solidFill>
+                  <a:srgbClr val="FFFF00"/>
+                </a:solidFill>
+                <a:tailEnd type="triangle"/>
+              </a:ln>
+            </p:spPr>
+            <p:style>
+              <a:lnRef idx="2">
+                <a:schemeClr val="accent1"/>
+              </a:lnRef>
+              <a:fillRef idx="0">
+                <a:schemeClr val="accent1"/>
+              </a:fillRef>
+              <a:effectRef idx="1">
+                <a:schemeClr val="accent1"/>
+              </a:effectRef>
+              <a:fontRef idx="minor">
+                <a:schemeClr val="tx1"/>
+              </a:fontRef>
+            </p:style>
+          </p:cxnSp>
+          <p:cxnSp>
+            <p:nvCxnSpPr>
+              <p:cNvPr id="219" name="직선 화살표 연결선 218">
+                <a:extLst>
+                  <a:ext uri="{FF2B5EF4-FFF2-40B4-BE49-F238E27FC236}">
+                    <a16:creationId xmlns:a16="http://schemas.microsoft.com/office/drawing/2014/main" id="{20C2A38B-06D2-204B-F031-6E2381CAB2F4}"/>
+                  </a:ext>
+                </a:extLst>
+              </p:cNvPr>
+              <p:cNvCxnSpPr/>
+              <p:nvPr/>
+            </p:nvCxnSpPr>
+            <p:spPr>
+              <a:xfrm flipH="1" flipV="1">
+                <a:off x="2070438" y="7944935"/>
+                <a:ext cx="126668" cy="38384"/>
+              </a:xfrm>
+              <a:prstGeom prst="straightConnector1">
+                <a:avLst/>
+              </a:prstGeom>
+              <a:ln>
+                <a:solidFill>
+                  <a:srgbClr val="FFFF00"/>
+                </a:solidFill>
+                <a:tailEnd type="triangle"/>
+              </a:ln>
+            </p:spPr>
+            <p:style>
+              <a:lnRef idx="2">
+                <a:schemeClr val="accent1"/>
+              </a:lnRef>
+              <a:fillRef idx="0">
+                <a:schemeClr val="accent1"/>
+              </a:fillRef>
+              <a:effectRef idx="1">
+                <a:schemeClr val="accent1"/>
+              </a:effectRef>
+              <a:fontRef idx="minor">
+                <a:schemeClr val="tx1"/>
+              </a:fontRef>
+            </p:style>
+          </p:cxnSp>
+          <p:cxnSp>
+            <p:nvCxnSpPr>
+              <p:cNvPr id="220" name="직선 화살표 연결선 219">
+                <a:extLst>
+                  <a:ext uri="{FF2B5EF4-FFF2-40B4-BE49-F238E27FC236}">
+                    <a16:creationId xmlns:a16="http://schemas.microsoft.com/office/drawing/2014/main" id="{0CD37C3F-80FA-9B63-4296-594233C78DD2}"/>
+                  </a:ext>
+                </a:extLst>
+              </p:cNvPr>
+              <p:cNvCxnSpPr/>
+              <p:nvPr/>
+            </p:nvCxnSpPr>
+            <p:spPr>
+              <a:xfrm flipH="1" flipV="1">
+                <a:off x="2070438" y="7871206"/>
+                <a:ext cx="126668" cy="38384"/>
+              </a:xfrm>
+              <a:prstGeom prst="straightConnector1">
+                <a:avLst/>
+              </a:prstGeom>
+              <a:ln>
+                <a:solidFill>
+                  <a:srgbClr val="FFFF00"/>
+                </a:solidFill>
+                <a:tailEnd type="triangle"/>
+              </a:ln>
+            </p:spPr>
+            <p:style>
+              <a:lnRef idx="2">
+                <a:schemeClr val="accent1"/>
+              </a:lnRef>
+              <a:fillRef idx="0">
+                <a:schemeClr val="accent1"/>
+              </a:fillRef>
+              <a:effectRef idx="1">
+                <a:schemeClr val="accent1"/>
+              </a:effectRef>
+              <a:fontRef idx="minor">
+                <a:schemeClr val="tx1"/>
+              </a:fontRef>
+            </p:style>
+          </p:cxnSp>
+          <p:sp>
+            <p:nvSpPr>
+              <p:cNvPr id="221" name="TextBox 220">
+                <a:extLst>
+                  <a:ext uri="{FF2B5EF4-FFF2-40B4-BE49-F238E27FC236}">
+                    <a16:creationId xmlns:a16="http://schemas.microsoft.com/office/drawing/2014/main" id="{D6E6291A-5098-30EC-CE55-4904DD2AD286}"/>
+                  </a:ext>
+                </a:extLst>
+              </p:cNvPr>
+              <p:cNvSpPr txBox="1"/>
+              <p:nvPr/>
+            </p:nvSpPr>
+            <p:spPr>
+              <a:xfrm>
+                <a:off x="1487537" y="9170903"/>
+                <a:ext cx="1687414" cy="307777"/>
+              </a:xfrm>
+              <a:prstGeom prst="rect">
+                <a:avLst/>
+              </a:prstGeom>
+              <a:noFill/>
+            </p:spPr>
+            <p:txBody>
+              <a:bodyPr wrap="square" rtlCol="0">
+                <a:spAutoFit/>
+              </a:bodyPr>
+              <a:lstStyle/>
+              <a:p>
+                <a:pPr algn="ctr"/>
+                <a:r>
+                  <a:rPr lang="en-US" altLang="ko-KR" sz="1400" dirty="0"/>
+                  <a:t>Trapped</a:t>
+                </a:r>
+                <a:r>
+                  <a:rPr lang="ko-KR" altLang="en-US" sz="1400" dirty="0"/>
+                  <a:t> </a:t>
+                </a:r>
+                <a:r>
+                  <a:rPr lang="en-US" altLang="ko-KR" sz="1400" dirty="0"/>
+                  <a:t>Electrons</a:t>
+                </a:r>
+                <a:endParaRPr lang="ko-KR" altLang="en-US" sz="1400" dirty="0"/>
+              </a:p>
+            </p:txBody>
+          </p:sp>
+          <p:cxnSp>
+            <p:nvCxnSpPr>
+              <p:cNvPr id="222" name="직선 연결선 221">
+                <a:extLst>
+                  <a:ext uri="{FF2B5EF4-FFF2-40B4-BE49-F238E27FC236}">
+                    <a16:creationId xmlns:a16="http://schemas.microsoft.com/office/drawing/2014/main" id="{384FD8E0-8B22-B661-A154-AEAD7A52D28C}"/>
+                  </a:ext>
+                </a:extLst>
+              </p:cNvPr>
+              <p:cNvCxnSpPr>
+                <a:cxnSpLocks/>
+                <a:endCxn id="221" idx="0"/>
+              </p:cNvCxnSpPr>
+              <p:nvPr/>
+            </p:nvCxnSpPr>
+            <p:spPr>
+              <a:xfrm>
+                <a:off x="2224088" y="8504599"/>
+                <a:ext cx="107156" cy="666304"/>
+              </a:xfrm>
+              <a:prstGeom prst="line">
+                <a:avLst/>
+              </a:prstGeom>
+              <a:ln>
+                <a:solidFill>
+                  <a:schemeClr val="tx1"/>
+                </a:solidFill>
+              </a:ln>
+            </p:spPr>
+            <p:style>
+              <a:lnRef idx="2">
+                <a:schemeClr val="accent1"/>
+              </a:lnRef>
+              <a:fillRef idx="0">
+                <a:schemeClr val="accent1"/>
+              </a:fillRef>
+              <a:effectRef idx="1">
+                <a:schemeClr val="accent1"/>
+              </a:effectRef>
+              <a:fontRef idx="minor">
+                <a:schemeClr val="tx1"/>
+              </a:fontRef>
+            </p:style>
+          </p:cxnSp>
+          <p:cxnSp>
+            <p:nvCxnSpPr>
+              <p:cNvPr id="223" name="직선 연결선 222">
+                <a:extLst>
+                  <a:ext uri="{FF2B5EF4-FFF2-40B4-BE49-F238E27FC236}">
+                    <a16:creationId xmlns:a16="http://schemas.microsoft.com/office/drawing/2014/main" id="{D3D91B11-9F4C-7339-FB02-8BD8F41E62AF}"/>
+                  </a:ext>
+                </a:extLst>
+              </p:cNvPr>
+              <p:cNvCxnSpPr>
+                <a:cxnSpLocks/>
+                <a:endCxn id="221" idx="0"/>
+              </p:cNvCxnSpPr>
+              <p:nvPr/>
+            </p:nvCxnSpPr>
+            <p:spPr>
+              <a:xfrm flipH="1">
+                <a:off x="2331244" y="8514666"/>
+                <a:ext cx="39287" cy="656237"/>
+              </a:xfrm>
+              <a:prstGeom prst="line">
+                <a:avLst/>
+              </a:prstGeom>
+              <a:ln>
+                <a:solidFill>
+                  <a:schemeClr val="tx1"/>
+                </a:solidFill>
+              </a:ln>
+            </p:spPr>
+            <p:style>
+              <a:lnRef idx="2">
+                <a:schemeClr val="accent1"/>
+              </a:lnRef>
+              <a:fillRef idx="0">
+                <a:schemeClr val="accent1"/>
+              </a:fillRef>
+              <a:effectRef idx="1">
+                <a:schemeClr val="accent1"/>
+              </a:effectRef>
+              <a:fontRef idx="minor">
+                <a:schemeClr val="tx1"/>
+              </a:fontRef>
+            </p:style>
+          </p:cxnSp>
+          <p:cxnSp>
+            <p:nvCxnSpPr>
+              <p:cNvPr id="224" name="직선 연결선 223">
+                <a:extLst>
+                  <a:ext uri="{FF2B5EF4-FFF2-40B4-BE49-F238E27FC236}">
+                    <a16:creationId xmlns:a16="http://schemas.microsoft.com/office/drawing/2014/main" id="{514A09F0-556C-F0DA-D395-2E3A51E11DC2}"/>
+                  </a:ext>
+                </a:extLst>
+              </p:cNvPr>
+              <p:cNvCxnSpPr>
+                <a:cxnSpLocks/>
+              </p:cNvCxnSpPr>
+              <p:nvPr/>
+            </p:nvCxnSpPr>
+            <p:spPr>
+              <a:xfrm>
+                <a:off x="1534716" y="6504387"/>
+                <a:ext cx="0" cy="2333364"/>
+              </a:xfrm>
+              <a:prstGeom prst="line">
+                <a:avLst/>
+              </a:prstGeom>
+              <a:ln w="12700">
+                <a:solidFill>
+                  <a:schemeClr val="tx1"/>
+                </a:solidFill>
+                <a:prstDash val="dash"/>
+              </a:ln>
+            </p:spPr>
+            <p:style>
+              <a:lnRef idx="2">
+                <a:schemeClr val="accent1"/>
+              </a:lnRef>
+              <a:fillRef idx="0">
+                <a:schemeClr val="accent1"/>
+              </a:fillRef>
+              <a:effectRef idx="1">
+                <a:schemeClr val="accent1"/>
+              </a:effectRef>
+              <a:fontRef idx="minor">
+                <a:schemeClr val="tx1"/>
+              </a:fontRef>
+            </p:style>
+          </p:cxnSp>
+          <p:cxnSp>
+            <p:nvCxnSpPr>
+              <p:cNvPr id="225" name="직선 연결선 224">
+                <a:extLst>
+                  <a:ext uri="{FF2B5EF4-FFF2-40B4-BE49-F238E27FC236}">
+                    <a16:creationId xmlns:a16="http://schemas.microsoft.com/office/drawing/2014/main" id="{E971E9B3-EEB0-045E-77D1-9A95134D755F}"/>
+                  </a:ext>
+                </a:extLst>
+              </p:cNvPr>
+              <p:cNvCxnSpPr>
+                <a:cxnSpLocks/>
+              </p:cNvCxnSpPr>
+              <p:nvPr/>
+            </p:nvCxnSpPr>
+            <p:spPr>
+              <a:xfrm>
+                <a:off x="2145827" y="6549299"/>
+                <a:ext cx="0" cy="433682"/>
+              </a:xfrm>
+              <a:prstGeom prst="line">
+                <a:avLst/>
+              </a:prstGeom>
+              <a:ln w="12700">
+                <a:solidFill>
+                  <a:schemeClr val="tx1"/>
+                </a:solidFill>
+                <a:prstDash val="dash"/>
+              </a:ln>
+            </p:spPr>
+            <p:style>
+              <a:lnRef idx="2">
+                <a:schemeClr val="accent1"/>
+              </a:lnRef>
+              <a:fillRef idx="0">
+                <a:schemeClr val="accent1"/>
+              </a:fillRef>
+              <a:effectRef idx="1">
+                <a:schemeClr val="accent1"/>
+              </a:effectRef>
+              <a:fontRef idx="minor">
+                <a:schemeClr val="tx1"/>
+              </a:fontRef>
+            </p:style>
+          </p:cxnSp>
+          <p:cxnSp>
+            <p:nvCxnSpPr>
+              <p:cNvPr id="226" name="직선 연결선 225">
+                <a:extLst>
+                  <a:ext uri="{FF2B5EF4-FFF2-40B4-BE49-F238E27FC236}">
+                    <a16:creationId xmlns:a16="http://schemas.microsoft.com/office/drawing/2014/main" id="{A9FDE615-9E6E-C667-8CEB-EE0C2EDC663E}"/>
+                  </a:ext>
+                </a:extLst>
+              </p:cNvPr>
+              <p:cNvCxnSpPr>
+                <a:cxnSpLocks/>
+              </p:cNvCxnSpPr>
+              <p:nvPr/>
+            </p:nvCxnSpPr>
+            <p:spPr>
+              <a:xfrm>
+                <a:off x="2385589" y="6549299"/>
+                <a:ext cx="0" cy="460470"/>
+              </a:xfrm>
+              <a:prstGeom prst="line">
+                <a:avLst/>
+              </a:prstGeom>
+              <a:ln w="12700">
+                <a:solidFill>
+                  <a:schemeClr val="tx1"/>
+                </a:solidFill>
+                <a:prstDash val="dash"/>
+              </a:ln>
+            </p:spPr>
+            <p:style>
+              <a:lnRef idx="2">
+                <a:schemeClr val="accent1"/>
+              </a:lnRef>
+              <a:fillRef idx="0">
+                <a:schemeClr val="accent1"/>
+              </a:fillRef>
+              <a:effectRef idx="1">
+                <a:schemeClr val="accent1"/>
+              </a:effectRef>
+              <a:fontRef idx="minor">
+                <a:schemeClr val="tx1"/>
+              </a:fontRef>
+            </p:style>
+          </p:cxnSp>
+          <p:cxnSp>
+            <p:nvCxnSpPr>
+              <p:cNvPr id="227" name="직선 연결선 226">
+                <a:extLst>
+                  <a:ext uri="{FF2B5EF4-FFF2-40B4-BE49-F238E27FC236}">
+                    <a16:creationId xmlns:a16="http://schemas.microsoft.com/office/drawing/2014/main" id="{DA19623C-9C73-8BA2-4C99-310E32D02858}"/>
+                  </a:ext>
+                </a:extLst>
+              </p:cNvPr>
+              <p:cNvCxnSpPr>
+                <a:cxnSpLocks/>
+              </p:cNvCxnSpPr>
+              <p:nvPr/>
+            </p:nvCxnSpPr>
+            <p:spPr>
+              <a:xfrm>
+                <a:off x="2963020" y="6549299"/>
+                <a:ext cx="0" cy="590397"/>
+              </a:xfrm>
+              <a:prstGeom prst="line">
+                <a:avLst/>
+              </a:prstGeom>
+              <a:ln w="12700">
+                <a:solidFill>
+                  <a:schemeClr val="tx1"/>
+                </a:solidFill>
+                <a:prstDash val="dash"/>
+              </a:ln>
+            </p:spPr>
+            <p:style>
+              <a:lnRef idx="2">
+                <a:schemeClr val="accent1"/>
+              </a:lnRef>
+              <a:fillRef idx="0">
+                <a:schemeClr val="accent1"/>
+              </a:fillRef>
+              <a:effectRef idx="1">
+                <a:schemeClr val="accent1"/>
+              </a:effectRef>
+              <a:fontRef idx="minor">
+                <a:schemeClr val="tx1"/>
+              </a:fontRef>
+            </p:style>
+          </p:cxnSp>
+          <p:cxnSp>
+            <p:nvCxnSpPr>
+              <p:cNvPr id="235" name="직선 연결선 234">
+                <a:extLst>
+                  <a:ext uri="{FF2B5EF4-FFF2-40B4-BE49-F238E27FC236}">
+                    <a16:creationId xmlns:a16="http://schemas.microsoft.com/office/drawing/2014/main" id="{A79E245E-07EE-543F-65EA-417903A97819}"/>
+                  </a:ext>
+                </a:extLst>
+              </p:cNvPr>
+              <p:cNvCxnSpPr>
+                <a:cxnSpLocks/>
+              </p:cNvCxnSpPr>
+              <p:nvPr/>
+            </p:nvCxnSpPr>
+            <p:spPr>
+              <a:xfrm>
+                <a:off x="2535608" y="6549299"/>
+                <a:ext cx="0" cy="553117"/>
+              </a:xfrm>
+              <a:prstGeom prst="line">
+                <a:avLst/>
+              </a:prstGeom>
+              <a:ln w="12700">
+                <a:solidFill>
+                  <a:schemeClr val="tx1"/>
+                </a:solidFill>
+                <a:prstDash val="dash"/>
+              </a:ln>
+            </p:spPr>
+            <p:style>
+              <a:lnRef idx="2">
+                <a:schemeClr val="accent1"/>
+              </a:lnRef>
+              <a:fillRef idx="0">
+                <a:schemeClr val="accent1"/>
+              </a:fillRef>
+              <a:effectRef idx="1">
+                <a:schemeClr val="accent1"/>
+              </a:effectRef>
+              <a:fontRef idx="minor">
+                <a:schemeClr val="tx1"/>
+              </a:fontRef>
+            </p:style>
+          </p:cxnSp>
+          <p:cxnSp>
+            <p:nvCxnSpPr>
+              <p:cNvPr id="237" name="직선 연결선 236">
+                <a:extLst>
+                  <a:ext uri="{FF2B5EF4-FFF2-40B4-BE49-F238E27FC236}">
+                    <a16:creationId xmlns:a16="http://schemas.microsoft.com/office/drawing/2014/main" id="{EA6ED4FB-439C-BD3B-3B49-2107F5462E36}"/>
+                  </a:ext>
+                </a:extLst>
+              </p:cNvPr>
+              <p:cNvCxnSpPr>
+                <a:cxnSpLocks/>
+              </p:cNvCxnSpPr>
+              <p:nvPr/>
+            </p:nvCxnSpPr>
+            <p:spPr>
+              <a:xfrm>
+                <a:off x="2716583" y="6549299"/>
+                <a:ext cx="0" cy="572167"/>
+              </a:xfrm>
+              <a:prstGeom prst="line">
+                <a:avLst/>
+              </a:prstGeom>
+              <a:ln w="12700">
+                <a:solidFill>
+                  <a:schemeClr val="tx1"/>
+                </a:solidFill>
+                <a:prstDash val="dash"/>
+              </a:ln>
+            </p:spPr>
+            <p:style>
+              <a:lnRef idx="2">
+                <a:schemeClr val="accent1"/>
+              </a:lnRef>
+              <a:fillRef idx="0">
+                <a:schemeClr val="accent1"/>
+              </a:fillRef>
+              <a:effectRef idx="1">
+                <a:schemeClr val="accent1"/>
+              </a:effectRef>
+              <a:fontRef idx="minor">
+                <a:schemeClr val="tx1"/>
+              </a:fontRef>
+            </p:style>
+          </p:cxnSp>
+        </p:grpSp>
+        <p:sp>
+          <p:nvSpPr>
+            <p:cNvPr id="279" name="TextBox 278">
+              <a:extLst>
+                <a:ext uri="{FF2B5EF4-FFF2-40B4-BE49-F238E27FC236}">
+                  <a16:creationId xmlns:a16="http://schemas.microsoft.com/office/drawing/2014/main" id="{F2597E20-58D8-FA05-FCB6-80DCF10EE5B5}"/>
+                </a:ext>
+              </a:extLst>
+            </p:cNvPr>
+            <p:cNvSpPr txBox="1"/>
+            <p:nvPr/>
+          </p:nvSpPr>
+          <p:spPr>
+            <a:xfrm>
+              <a:off x="6650944" y="2985058"/>
+              <a:ext cx="416576" cy="246221"/>
+            </a:xfrm>
+            <a:prstGeom prst="rect">
+              <a:avLst/>
+            </a:prstGeom>
+            <a:noFill/>
+          </p:spPr>
+          <p:txBody>
+            <a:bodyPr wrap="square" rtlCol="0">
+              <a:spAutoFit/>
+            </a:bodyPr>
+            <a:lstStyle/>
+            <a:p>
+              <a:r>
+                <a:rPr lang="en-US" altLang="ko-KR" sz="1000" dirty="0">
+                  <a:ln w="9525">
+                    <a:solidFill>
+                      <a:schemeClr val="tx1">
+                        <a:alpha val="29000"/>
+                      </a:schemeClr>
+                    </a:solidFill>
+                  </a:ln>
+                  <a:latin typeface="Arial" panose="020B0604020202020204" pitchFamily="34" charset="0"/>
+                  <a:ea typeface="맑은 고딕"/>
+                  <a:cs typeface="Arial" panose="020B0604020202020204" pitchFamily="34" charset="0"/>
+                </a:rPr>
+                <a:t>filler</a:t>
+              </a:r>
+              <a:endParaRPr lang="ko-KR" altLang="en-US" sz="1000" dirty="0">
+                <a:ln w="9525">
+                  <a:solidFill>
+                    <a:schemeClr val="tx1">
+                      <a:alpha val="29000"/>
+                    </a:schemeClr>
+                  </a:solidFill>
+                </a:ln>
+                <a:latin typeface="Arial" panose="020B0604020202020204" pitchFamily="34" charset="0"/>
+                <a:ea typeface="맑은 고딕"/>
+                <a:cs typeface="Arial" panose="020B0604020202020204" pitchFamily="34" charset="0"/>
+              </a:endParaRPr>
+            </a:p>
+          </p:txBody>
+        </p:sp>
+        <p:sp>
+          <p:nvSpPr>
+            <p:cNvPr id="280" name="TextBox 279">
+              <a:extLst>
+                <a:ext uri="{FF2B5EF4-FFF2-40B4-BE49-F238E27FC236}">
+                  <a16:creationId xmlns:a16="http://schemas.microsoft.com/office/drawing/2014/main" id="{BF043AFA-66B6-668E-E15F-51DCBE267CA7}"/>
+                </a:ext>
+              </a:extLst>
+            </p:cNvPr>
+            <p:cNvSpPr txBox="1"/>
+            <p:nvPr/>
+          </p:nvSpPr>
+          <p:spPr>
+            <a:xfrm>
+              <a:off x="7065733" y="1975285"/>
+              <a:ext cx="628538" cy="246221"/>
+            </a:xfrm>
+            <a:prstGeom prst="rect">
+              <a:avLst/>
+            </a:prstGeom>
+            <a:noFill/>
+          </p:spPr>
+          <p:txBody>
+            <a:bodyPr wrap="square" rtlCol="0">
+              <a:spAutoFit/>
+            </a:bodyPr>
+            <a:lstStyle/>
+            <a:p>
+              <a:r>
+                <a:rPr lang="en-US" altLang="ko-KR" sz="1000" dirty="0">
+                  <a:ln w="9525">
+                    <a:solidFill>
+                      <a:schemeClr val="tx1">
+                        <a:alpha val="29000"/>
+                      </a:schemeClr>
+                    </a:solidFill>
+                  </a:ln>
+                  <a:latin typeface="Arial" panose="020B0604020202020204" pitchFamily="34" charset="0"/>
+                  <a:ea typeface="맑은 고딕"/>
+                  <a:cs typeface="Arial" panose="020B0604020202020204" pitchFamily="34" charset="0"/>
+                </a:rPr>
+                <a:t>channel</a:t>
+              </a:r>
+              <a:endParaRPr lang="ko-KR" altLang="en-US" sz="1000" dirty="0">
+                <a:ln w="9525">
+                  <a:solidFill>
+                    <a:schemeClr val="tx1">
+                      <a:alpha val="29000"/>
+                    </a:schemeClr>
+                  </a:solidFill>
+                </a:ln>
+                <a:latin typeface="Arial" panose="020B0604020202020204" pitchFamily="34" charset="0"/>
+                <a:ea typeface="맑은 고딕"/>
+                <a:cs typeface="Arial" panose="020B0604020202020204" pitchFamily="34" charset="0"/>
+              </a:endParaRPr>
+            </a:p>
+          </p:txBody>
+        </p:sp>
+        <p:sp>
+          <p:nvSpPr>
+            <p:cNvPr id="282" name="TextBox 281">
+              <a:extLst>
+                <a:ext uri="{FF2B5EF4-FFF2-40B4-BE49-F238E27FC236}">
+                  <a16:creationId xmlns:a16="http://schemas.microsoft.com/office/drawing/2014/main" id="{5F3AAB7A-8D0D-43E6-9770-7BADED14D656}"/>
+                </a:ext>
+              </a:extLst>
+            </p:cNvPr>
+            <p:cNvSpPr txBox="1"/>
+            <p:nvPr/>
+          </p:nvSpPr>
+          <p:spPr>
+            <a:xfrm>
+              <a:off x="7584188" y="2158600"/>
+              <a:ext cx="628538" cy="246221"/>
+            </a:xfrm>
+            <a:prstGeom prst="rect">
+              <a:avLst/>
+            </a:prstGeom>
+            <a:noFill/>
+          </p:spPr>
+          <p:txBody>
+            <a:bodyPr wrap="square" rtlCol="0">
+              <a:spAutoFit/>
+            </a:bodyPr>
+            <a:lstStyle/>
+            <a:p>
+              <a:r>
+                <a:rPr lang="en-US" altLang="ko-KR" sz="1000" dirty="0">
+                  <a:ln w="9525">
+                    <a:solidFill>
+                      <a:schemeClr val="tx1">
+                        <a:alpha val="29000"/>
+                      </a:schemeClr>
+                    </a:solidFill>
+                  </a:ln>
+                  <a:latin typeface="Arial" panose="020B0604020202020204" pitchFamily="34" charset="0"/>
+                  <a:ea typeface="맑은 고딕"/>
+                  <a:cs typeface="Arial" panose="020B0604020202020204" pitchFamily="34" charset="0"/>
+                </a:rPr>
+                <a:t>BETOX</a:t>
+              </a:r>
+              <a:endParaRPr lang="ko-KR" altLang="en-US" sz="1000" dirty="0">
+                <a:ln w="9525">
+                  <a:solidFill>
+                    <a:schemeClr val="tx1">
+                      <a:alpha val="29000"/>
+                    </a:schemeClr>
+                  </a:solidFill>
+                </a:ln>
+                <a:latin typeface="Arial" panose="020B0604020202020204" pitchFamily="34" charset="0"/>
+                <a:ea typeface="맑은 고딕"/>
+                <a:cs typeface="Arial" panose="020B0604020202020204" pitchFamily="34" charset="0"/>
+              </a:endParaRPr>
+            </a:p>
+          </p:txBody>
+        </p:sp>
+        <p:sp>
+          <p:nvSpPr>
+            <p:cNvPr id="283" name="TextBox 282">
+              <a:extLst>
+                <a:ext uri="{FF2B5EF4-FFF2-40B4-BE49-F238E27FC236}">
+                  <a16:creationId xmlns:a16="http://schemas.microsoft.com/office/drawing/2014/main" id="{FC025F4E-C1FF-CCA5-9550-AFD410C81D93}"/>
+                </a:ext>
+              </a:extLst>
+            </p:cNvPr>
+            <p:cNvSpPr txBox="1"/>
+            <p:nvPr/>
+          </p:nvSpPr>
+          <p:spPr>
+            <a:xfrm>
+              <a:off x="7777640" y="2333655"/>
+              <a:ext cx="628538" cy="246221"/>
+            </a:xfrm>
+            <a:prstGeom prst="rect">
+              <a:avLst/>
+            </a:prstGeom>
+            <a:noFill/>
+          </p:spPr>
+          <p:txBody>
+            <a:bodyPr wrap="square" rtlCol="0">
+              <a:spAutoFit/>
+            </a:bodyPr>
+            <a:lstStyle/>
+            <a:p>
+              <a:r>
+                <a:rPr lang="en-US" altLang="ko-KR" sz="1000" dirty="0">
+                  <a:ln w="9525">
+                    <a:solidFill>
+                      <a:schemeClr val="tx1">
+                        <a:alpha val="29000"/>
+                      </a:schemeClr>
+                    </a:solidFill>
+                  </a:ln>
+                  <a:latin typeface="Arial" panose="020B0604020202020204" pitchFamily="34" charset="0"/>
+                  <a:ea typeface="맑은 고딕"/>
+                  <a:cs typeface="Arial" panose="020B0604020202020204" pitchFamily="34" charset="0"/>
+                </a:rPr>
+                <a:t>CTN</a:t>
+              </a:r>
+              <a:endParaRPr lang="ko-KR" altLang="en-US" sz="1000" dirty="0">
+                <a:ln w="9525">
+                  <a:solidFill>
+                    <a:schemeClr val="tx1">
+                      <a:alpha val="29000"/>
+                    </a:schemeClr>
+                  </a:solidFill>
+                </a:ln>
+                <a:latin typeface="Arial" panose="020B0604020202020204" pitchFamily="34" charset="0"/>
+                <a:ea typeface="맑은 고딕"/>
+                <a:cs typeface="Arial" panose="020B0604020202020204" pitchFamily="34" charset="0"/>
+              </a:endParaRPr>
+            </a:p>
+          </p:txBody>
+        </p:sp>
+        <p:sp>
+          <p:nvSpPr>
+            <p:cNvPr id="284" name="TextBox 283">
+              <a:extLst>
+                <a:ext uri="{FF2B5EF4-FFF2-40B4-BE49-F238E27FC236}">
+                  <a16:creationId xmlns:a16="http://schemas.microsoft.com/office/drawing/2014/main" id="{504F71FC-466C-DDEF-2C91-25CC717B1DCB}"/>
+                </a:ext>
+              </a:extLst>
+            </p:cNvPr>
+            <p:cNvSpPr txBox="1"/>
+            <p:nvPr/>
+          </p:nvSpPr>
+          <p:spPr>
+            <a:xfrm>
+              <a:off x="8121278" y="2529312"/>
+              <a:ext cx="628538" cy="246221"/>
+            </a:xfrm>
+            <a:prstGeom prst="rect">
+              <a:avLst/>
+            </a:prstGeom>
+            <a:noFill/>
+          </p:spPr>
+          <p:txBody>
+            <a:bodyPr wrap="square" rtlCol="0">
+              <a:spAutoFit/>
+            </a:bodyPr>
+            <a:lstStyle/>
+            <a:p>
+              <a:r>
+                <a:rPr lang="en-US" altLang="ko-KR" sz="1000" dirty="0">
+                  <a:ln w="9525">
+                    <a:solidFill>
+                      <a:schemeClr val="tx1">
+                        <a:alpha val="29000"/>
+                      </a:schemeClr>
+                    </a:solidFill>
+                  </a:ln>
+                  <a:latin typeface="Arial" panose="020B0604020202020204" pitchFamily="34" charset="0"/>
+                  <a:ea typeface="맑은 고딕"/>
+                  <a:cs typeface="Arial" panose="020B0604020202020204" pitchFamily="34" charset="0"/>
+                </a:rPr>
+                <a:t>BOX</a:t>
+              </a:r>
+              <a:endParaRPr lang="ko-KR" altLang="en-US" sz="1000" dirty="0">
+                <a:ln w="9525">
+                  <a:solidFill>
+                    <a:schemeClr val="tx1">
+                      <a:alpha val="29000"/>
+                    </a:schemeClr>
+                  </a:solidFill>
+                </a:ln>
+                <a:latin typeface="Arial" panose="020B0604020202020204" pitchFamily="34" charset="0"/>
+                <a:ea typeface="맑은 고딕"/>
+                <a:cs typeface="Arial" panose="020B0604020202020204" pitchFamily="34" charset="0"/>
+              </a:endParaRPr>
+            </a:p>
+          </p:txBody>
+        </p:sp>
+        <p:cxnSp>
+          <p:nvCxnSpPr>
+            <p:cNvPr id="287" name="직선 화살표 연결선 286">
+              <a:extLst>
+                <a:ext uri="{FF2B5EF4-FFF2-40B4-BE49-F238E27FC236}">
+                  <a16:creationId xmlns:a16="http://schemas.microsoft.com/office/drawing/2014/main" id="{15B0EF47-B033-D9C7-CCD8-5F91DF32369E}"/>
+                </a:ext>
+              </a:extLst>
+            </p:cNvPr>
+            <p:cNvCxnSpPr>
+              <a:cxnSpLocks/>
+            </p:cNvCxnSpPr>
+            <p:nvPr/>
+          </p:nvCxnSpPr>
+          <p:spPr>
+            <a:xfrm>
+              <a:off x="7501274" y="2283993"/>
+              <a:ext cx="158893" cy="0"/>
+            </a:xfrm>
+            <a:prstGeom prst="straightConnector1">
+              <a:avLst/>
+            </a:prstGeom>
+            <a:ln w="9525">
+              <a:solidFill>
+                <a:schemeClr val="tx1"/>
+              </a:solidFill>
+              <a:headEnd type="none" w="med" len="med"/>
+              <a:tailEnd type="triangle" w="med" len="med"/>
+            </a:ln>
+          </p:spPr>
+          <p:style>
+            <a:lnRef idx="2">
+              <a:schemeClr val="accent1"/>
+            </a:lnRef>
+            <a:fillRef idx="0">
+              <a:schemeClr val="accent1"/>
+            </a:fillRef>
+            <a:effectRef idx="1">
+              <a:schemeClr val="accent1"/>
+            </a:effectRef>
+            <a:fontRef idx="minor">
+              <a:schemeClr val="tx1"/>
+            </a:fontRef>
+          </p:style>
+        </p:cxnSp>
+        <p:cxnSp>
+          <p:nvCxnSpPr>
+            <p:cNvPr id="289" name="직선 화살표 연결선 288">
+              <a:extLst>
+                <a:ext uri="{FF2B5EF4-FFF2-40B4-BE49-F238E27FC236}">
+                  <a16:creationId xmlns:a16="http://schemas.microsoft.com/office/drawing/2014/main" id="{7D685740-6A5A-5851-E175-12DEDAFCB5D2}"/>
+                </a:ext>
+              </a:extLst>
+            </p:cNvPr>
+            <p:cNvCxnSpPr>
+              <a:cxnSpLocks/>
+            </p:cNvCxnSpPr>
+            <p:nvPr/>
+          </p:nvCxnSpPr>
+          <p:spPr>
+            <a:xfrm>
+              <a:off x="7677150" y="2460206"/>
+              <a:ext cx="171551" cy="0"/>
+            </a:xfrm>
+            <a:prstGeom prst="straightConnector1">
+              <a:avLst/>
+            </a:prstGeom>
+            <a:ln w="9525">
+              <a:solidFill>
+                <a:schemeClr val="tx1"/>
+              </a:solidFill>
+              <a:headEnd type="none" w="med" len="med"/>
+              <a:tailEnd type="triangle" w="med" len="med"/>
+            </a:ln>
+          </p:spPr>
+          <p:style>
+            <a:lnRef idx="2">
+              <a:schemeClr val="accent1"/>
+            </a:lnRef>
+            <a:fillRef idx="0">
+              <a:schemeClr val="accent1"/>
+            </a:fillRef>
+            <a:effectRef idx="1">
+              <a:schemeClr val="accent1"/>
+            </a:effectRef>
+            <a:fontRef idx="minor">
+              <a:schemeClr val="tx1"/>
+            </a:fontRef>
+          </p:style>
+        </p:cxnSp>
+        <p:cxnSp>
+          <p:nvCxnSpPr>
+            <p:cNvPr id="290" name="직선 화살표 연결선 289">
+              <a:extLst>
+                <a:ext uri="{FF2B5EF4-FFF2-40B4-BE49-F238E27FC236}">
+                  <a16:creationId xmlns:a16="http://schemas.microsoft.com/office/drawing/2014/main" id="{2AE7640F-F59B-4118-1378-2C2CAE547F4C}"/>
+                </a:ext>
+              </a:extLst>
+            </p:cNvPr>
+            <p:cNvCxnSpPr>
+              <a:cxnSpLocks/>
+            </p:cNvCxnSpPr>
+            <p:nvPr/>
+          </p:nvCxnSpPr>
+          <p:spPr>
+            <a:xfrm>
+              <a:off x="7911944" y="2652423"/>
+              <a:ext cx="282726" cy="0"/>
+            </a:xfrm>
+            <a:prstGeom prst="straightConnector1">
+              <a:avLst/>
+            </a:prstGeom>
+            <a:ln w="9525">
+              <a:solidFill>
+                <a:schemeClr val="tx1"/>
+              </a:solidFill>
+              <a:headEnd type="none" w="med" len="med"/>
+              <a:tailEnd type="triangle" w="med" len="med"/>
+            </a:ln>
+          </p:spPr>
+          <p:style>
+            <a:lnRef idx="2">
+              <a:schemeClr val="accent1"/>
+            </a:lnRef>
+            <a:fillRef idx="0">
+              <a:schemeClr val="accent1"/>
+            </a:fillRef>
+            <a:effectRef idx="1">
+              <a:schemeClr val="accent1"/>
+            </a:effectRef>
+            <a:fontRef idx="minor">
+              <a:schemeClr val="tx1"/>
+            </a:fontRef>
+          </p:style>
+        </p:cxnSp>
+        <p:cxnSp>
+          <p:nvCxnSpPr>
+            <p:cNvPr id="297" name="직선 화살표 연결선 296">
+              <a:extLst>
+                <a:ext uri="{FF2B5EF4-FFF2-40B4-BE49-F238E27FC236}">
+                  <a16:creationId xmlns:a16="http://schemas.microsoft.com/office/drawing/2014/main" id="{89538A71-88D9-E8B1-41CC-8D112A2B401C}"/>
+                </a:ext>
+              </a:extLst>
+            </p:cNvPr>
+            <p:cNvCxnSpPr>
+              <a:cxnSpLocks/>
+            </p:cNvCxnSpPr>
+            <p:nvPr/>
+          </p:nvCxnSpPr>
+          <p:spPr>
+            <a:xfrm flipV="1">
+              <a:off x="7289572" y="2221506"/>
+              <a:ext cx="0" cy="513594"/>
+            </a:xfrm>
+            <a:prstGeom prst="straightConnector1">
+              <a:avLst/>
+            </a:prstGeom>
+            <a:ln w="9525">
+              <a:solidFill>
+                <a:schemeClr val="tx1"/>
+              </a:solidFill>
+              <a:headEnd type="none" w="med" len="med"/>
+              <a:tailEnd type="triangle" w="med" len="med"/>
+            </a:ln>
+          </p:spPr>
+          <p:style>
+            <a:lnRef idx="2">
+              <a:schemeClr val="accent1"/>
+            </a:lnRef>
+            <a:fillRef idx="0">
+              <a:schemeClr val="accent1"/>
+            </a:fillRef>
+            <a:effectRef idx="1">
+              <a:schemeClr val="accent1"/>
+            </a:effectRef>
+            <a:fontRef idx="minor">
+              <a:schemeClr val="tx1"/>
+            </a:fontRef>
+          </p:style>
+        </p:cxnSp>
+        <p:cxnSp>
+          <p:nvCxnSpPr>
+            <p:cNvPr id="299" name="직선 화살표 연결선 298">
+              <a:extLst>
+                <a:ext uri="{FF2B5EF4-FFF2-40B4-BE49-F238E27FC236}">
+                  <a16:creationId xmlns:a16="http://schemas.microsoft.com/office/drawing/2014/main" id="{6597BB9F-2C9D-14B4-9A0D-D354B58578AC}"/>
+                </a:ext>
+              </a:extLst>
+            </p:cNvPr>
+            <p:cNvCxnSpPr>
+              <a:cxnSpLocks/>
+            </p:cNvCxnSpPr>
+            <p:nvPr/>
+          </p:nvCxnSpPr>
+          <p:spPr>
+            <a:xfrm flipV="1">
+              <a:off x="7501746" y="2283155"/>
+              <a:ext cx="0" cy="492378"/>
+            </a:xfrm>
+            <a:prstGeom prst="straightConnector1">
+              <a:avLst/>
+            </a:prstGeom>
+            <a:ln w="9525">
+              <a:solidFill>
+                <a:schemeClr val="tx1"/>
+              </a:solidFill>
+              <a:headEnd type="none" w="med" len="med"/>
+              <a:tailEnd type="none" w="med" len="med"/>
+            </a:ln>
+          </p:spPr>
+          <p:style>
+            <a:lnRef idx="2">
+              <a:schemeClr val="accent1"/>
+            </a:lnRef>
+            <a:fillRef idx="0">
+              <a:schemeClr val="accent1"/>
+            </a:fillRef>
+            <a:effectRef idx="1">
+              <a:schemeClr val="accent1"/>
+            </a:effectRef>
+            <a:fontRef idx="minor">
+              <a:schemeClr val="tx1"/>
+            </a:fontRef>
+          </p:style>
+        </p:cxnSp>
+        <p:cxnSp>
+          <p:nvCxnSpPr>
+            <p:cNvPr id="301" name="직선 화살표 연결선 300">
+              <a:extLst>
+                <a:ext uri="{FF2B5EF4-FFF2-40B4-BE49-F238E27FC236}">
+                  <a16:creationId xmlns:a16="http://schemas.microsoft.com/office/drawing/2014/main" id="{9E32A56A-F006-A54A-CBCA-D338A04B5FF6}"/>
+                </a:ext>
+              </a:extLst>
+            </p:cNvPr>
+            <p:cNvCxnSpPr>
+              <a:cxnSpLocks/>
+            </p:cNvCxnSpPr>
+            <p:nvPr/>
+          </p:nvCxnSpPr>
+          <p:spPr>
+            <a:xfrm flipV="1">
+              <a:off x="7671726" y="2456765"/>
+              <a:ext cx="0" cy="375607"/>
+            </a:xfrm>
+            <a:prstGeom prst="straightConnector1">
+              <a:avLst/>
+            </a:prstGeom>
+            <a:ln w="9525">
+              <a:solidFill>
+                <a:schemeClr val="tx1"/>
+              </a:solidFill>
+              <a:headEnd type="none" w="med" len="med"/>
+              <a:tailEnd type="none" w="med" len="med"/>
+            </a:ln>
+          </p:spPr>
+          <p:style>
+            <a:lnRef idx="2">
+              <a:schemeClr val="accent1"/>
+            </a:lnRef>
+            <a:fillRef idx="0">
+              <a:schemeClr val="accent1"/>
+            </a:fillRef>
+            <a:effectRef idx="1">
+              <a:schemeClr val="accent1"/>
+            </a:effectRef>
+            <a:fontRef idx="minor">
+              <a:schemeClr val="tx1"/>
+            </a:fontRef>
+          </p:style>
+        </p:cxnSp>
+        <p:cxnSp>
+          <p:nvCxnSpPr>
+            <p:cNvPr id="303" name="직선 화살표 연결선 302">
+              <a:extLst>
+                <a:ext uri="{FF2B5EF4-FFF2-40B4-BE49-F238E27FC236}">
+                  <a16:creationId xmlns:a16="http://schemas.microsoft.com/office/drawing/2014/main" id="{4A274FDA-4DA0-4DC6-5765-6922987E4235}"/>
+                </a:ext>
+              </a:extLst>
+            </p:cNvPr>
+            <p:cNvCxnSpPr>
+              <a:cxnSpLocks/>
+            </p:cNvCxnSpPr>
+            <p:nvPr/>
+          </p:nvCxnSpPr>
+          <p:spPr>
+            <a:xfrm flipV="1">
+              <a:off x="7911944" y="2652422"/>
+              <a:ext cx="0" cy="269723"/>
+            </a:xfrm>
+            <a:prstGeom prst="straightConnector1">
+              <a:avLst/>
+            </a:prstGeom>
+            <a:ln w="9525">
+              <a:solidFill>
+                <a:schemeClr val="tx1"/>
+              </a:solidFill>
+              <a:headEnd type="none" w="med" len="med"/>
+              <a:tailEnd type="none" w="med" len="med"/>
+            </a:ln>
+          </p:spPr>
+          <p:style>
+            <a:lnRef idx="2">
+              <a:schemeClr val="accent1"/>
+            </a:lnRef>
+            <a:fillRef idx="0">
+              <a:schemeClr val="accent1"/>
+            </a:fillRef>
+            <a:effectRef idx="1">
+              <a:schemeClr val="accent1"/>
+            </a:effectRef>
+            <a:fontRef idx="minor">
+              <a:schemeClr val="tx1"/>
+            </a:fontRef>
+          </p:style>
+        </p:cxnSp>
+        <p:sp>
+          <p:nvSpPr>
+            <p:cNvPr id="311" name="TextBox 310">
+              <a:extLst>
+                <a:ext uri="{FF2B5EF4-FFF2-40B4-BE49-F238E27FC236}">
+                  <a16:creationId xmlns:a16="http://schemas.microsoft.com/office/drawing/2014/main" id="{8FD311D3-9D28-3880-7D83-BBA441596096}"/>
+                </a:ext>
+              </a:extLst>
+            </p:cNvPr>
+            <p:cNvSpPr txBox="1"/>
+            <p:nvPr/>
+          </p:nvSpPr>
+          <p:spPr>
+            <a:xfrm>
+              <a:off x="7935359" y="3972691"/>
+              <a:ext cx="628538" cy="246221"/>
+            </a:xfrm>
+            <a:prstGeom prst="rect">
+              <a:avLst/>
+            </a:prstGeom>
+            <a:noFill/>
+          </p:spPr>
+          <p:txBody>
+            <a:bodyPr wrap="square" rtlCol="0">
+              <a:spAutoFit/>
+            </a:bodyPr>
+            <a:lstStyle/>
+            <a:p>
+              <a:r>
+                <a:rPr lang="en-US" altLang="ko-KR" sz="1000" dirty="0">
+                  <a:ln w="9525">
+                    <a:solidFill>
+                      <a:schemeClr val="tx1">
+                        <a:alpha val="29000"/>
+                      </a:schemeClr>
+                    </a:solidFill>
+                  </a:ln>
+                  <a:latin typeface="Arial" panose="020B0604020202020204" pitchFamily="34" charset="0"/>
+                  <a:ea typeface="맑은 고딕"/>
+                  <a:cs typeface="Arial" panose="020B0604020202020204" pitchFamily="34" charset="0"/>
+                </a:rPr>
+                <a:t>WL</a:t>
+              </a:r>
+              <a:endParaRPr lang="ko-KR" altLang="en-US" sz="1000" dirty="0">
+                <a:ln w="9525">
+                  <a:solidFill>
+                    <a:schemeClr val="tx1">
+                      <a:alpha val="29000"/>
+                    </a:schemeClr>
+                  </a:solidFill>
+                </a:ln>
+                <a:latin typeface="Arial" panose="020B0604020202020204" pitchFamily="34" charset="0"/>
+                <a:ea typeface="맑은 고딕"/>
+                <a:cs typeface="Arial" panose="020B0604020202020204" pitchFamily="34" charset="0"/>
+              </a:endParaRPr>
+            </a:p>
+          </p:txBody>
+        </p:sp>
+      </p:grpSp>
+      <p:sp>
+        <p:nvSpPr>
+          <p:cNvPr id="312" name="TextBox 311">
+            <a:extLst>
+              <a:ext uri="{FF2B5EF4-FFF2-40B4-BE49-F238E27FC236}">
+                <a16:creationId xmlns:a16="http://schemas.microsoft.com/office/drawing/2014/main" id="{2D96CCE7-A280-B373-6CB7-767DEE18E9E2}"/>
+              </a:ext>
+            </a:extLst>
+          </p:cNvPr>
+          <p:cNvSpPr txBox="1"/>
+          <p:nvPr/>
+        </p:nvSpPr>
+        <p:spPr>
+          <a:xfrm>
+            <a:off x="7777640" y="6205303"/>
+            <a:ext cx="1366360" cy="261610"/>
+          </a:xfrm>
+          <a:prstGeom prst="rect">
+            <a:avLst/>
+          </a:prstGeom>
+          <a:noFill/>
+        </p:spPr>
+        <p:txBody>
+          <a:bodyPr wrap="square" rtlCol="0">
+            <a:spAutoFit/>
+          </a:bodyPr>
+          <a:lstStyle/>
+          <a:p>
+            <a:pPr algn="r"/>
+            <a:r>
+              <a:rPr lang="en-US" altLang="ko-KR" sz="1050" b="1" i="1" dirty="0">
+                <a:ln w="9525">
+                  <a:solidFill>
+                    <a:schemeClr val="tx1">
+                      <a:alpha val="29000"/>
+                    </a:schemeClr>
+                  </a:solidFill>
+                </a:ln>
+                <a:solidFill>
+                  <a:schemeClr val="bg1">
+                    <a:lumMod val="65000"/>
+                  </a:schemeClr>
+                </a:solidFill>
+                <a:latin typeface="Times New Roman"/>
+                <a:ea typeface="맑은 고딕"/>
+                <a:cs typeface="Times New Roman"/>
+              </a:rPr>
+              <a:t>[1] Jin, TED (2025)</a:t>
+            </a:r>
+            <a:endParaRPr lang="ko-KR" altLang="en-US" sz="1050" b="1" i="1" dirty="0">
               <a:ln w="9525">
                 <a:solidFill>
                   <a:schemeClr val="tx1">
@@ -11220,6 +14333,11 @@
                   </a:schemeClr>
                 </a:solidFill>
               </a:ln>
+              <a:solidFill>
+                <a:schemeClr val="bg1">
+                  <a:lumMod val="65000"/>
+                </a:schemeClr>
+              </a:solidFill>
               <a:latin typeface="Times New Roman"/>
               <a:ea typeface="맑은 고딕"/>
               <a:cs typeface="Times New Roman"/>
@@ -11296,12 +14414,1455 @@
           </a:p>
         </p:txBody>
       </p:sp>
+      <p:grpSp>
+        <p:nvGrpSpPr>
+          <p:cNvPr id="177" name="그룹 176">
+            <a:extLst>
+              <a:ext uri="{FF2B5EF4-FFF2-40B4-BE49-F238E27FC236}">
+                <a16:creationId xmlns:a16="http://schemas.microsoft.com/office/drawing/2014/main" id="{8F022FD0-ACA4-98C9-1A38-7C6A3D14B528}"/>
+              </a:ext>
+            </a:extLst>
+          </p:cNvPr>
+          <p:cNvGrpSpPr/>
+          <p:nvPr/>
+        </p:nvGrpSpPr>
+        <p:grpSpPr>
+          <a:xfrm>
+            <a:off x="6677510" y="3178100"/>
+            <a:ext cx="2200260" cy="3288813"/>
+            <a:chOff x="4155873" y="5829539"/>
+            <a:chExt cx="2200260" cy="3288813"/>
+          </a:xfrm>
+        </p:grpSpPr>
+        <p:grpSp>
+          <p:nvGrpSpPr>
+            <p:cNvPr id="178" name="그룹 177">
+              <a:extLst>
+                <a:ext uri="{FF2B5EF4-FFF2-40B4-BE49-F238E27FC236}">
+                  <a16:creationId xmlns:a16="http://schemas.microsoft.com/office/drawing/2014/main" id="{B0CC0EDB-2980-8DDE-4097-192140646C78}"/>
+                </a:ext>
+              </a:extLst>
+            </p:cNvPr>
+            <p:cNvGrpSpPr/>
+            <p:nvPr/>
+          </p:nvGrpSpPr>
+          <p:grpSpPr>
+            <a:xfrm>
+              <a:off x="4155873" y="5829539"/>
+              <a:ext cx="2200260" cy="3288813"/>
+              <a:chOff x="4155873" y="5829539"/>
+              <a:chExt cx="2200260" cy="3288813"/>
+            </a:xfrm>
+          </p:grpSpPr>
+          <p:pic>
+            <p:nvPicPr>
+              <p:cNvPr id="182" name="그림 181" descr="스크린샷, 디자인, 예술이(가) 표시된 사진&#10;&#10;자동 생성된 설명">
+                <a:extLst>
+                  <a:ext uri="{FF2B5EF4-FFF2-40B4-BE49-F238E27FC236}">
+                    <a16:creationId xmlns:a16="http://schemas.microsoft.com/office/drawing/2014/main" id="{1B150861-9878-20FE-6E22-72F9ADF82442}"/>
+                  </a:ext>
+                </a:extLst>
+              </p:cNvPr>
+              <p:cNvPicPr>
+                <a:picLocks noChangeAspect="1"/>
+              </p:cNvPicPr>
+              <p:nvPr/>
+            </p:nvPicPr>
+            <p:blipFill>
+              <a:blip r:embed="rId2" cstate="print">
+                <a:extLst>
+                  <a:ext uri="{28A0092B-C50C-407E-A947-70E740481C1C}">
+                    <a14:useLocalDpi xmlns:a14="http://schemas.microsoft.com/office/drawing/2010/main" val="0"/>
+                  </a:ext>
+                </a:extLst>
+              </a:blip>
+              <a:srcRect l="29856" t="4775" r="29017"/>
+              <a:stretch/>
+            </p:blipFill>
+            <p:spPr>
+              <a:xfrm>
+                <a:off x="4155873" y="6233981"/>
+                <a:ext cx="1987554" cy="2588633"/>
+              </a:xfrm>
+              <a:prstGeom prst="rect">
+                <a:avLst/>
+              </a:prstGeom>
+            </p:spPr>
+          </p:pic>
+          <p:sp>
+            <p:nvSpPr>
+              <p:cNvPr id="183" name="화살표: 아래쪽 182">
+                <a:extLst>
+                  <a:ext uri="{FF2B5EF4-FFF2-40B4-BE49-F238E27FC236}">
+                    <a16:creationId xmlns:a16="http://schemas.microsoft.com/office/drawing/2014/main" id="{1C64350A-9879-73C9-D1DE-E01148706FE9}"/>
+                  </a:ext>
+                </a:extLst>
+              </p:cNvPr>
+              <p:cNvSpPr/>
+              <p:nvPr/>
+            </p:nvSpPr>
+            <p:spPr>
+              <a:xfrm rot="5400000">
+                <a:off x="4689525" y="8049405"/>
+                <a:ext cx="152205" cy="398904"/>
+              </a:xfrm>
+              <a:prstGeom prst="downArrow">
+                <a:avLst/>
+              </a:prstGeom>
+              <a:solidFill>
+                <a:srgbClr val="FFFF00"/>
+              </a:solidFill>
+            </p:spPr>
+            <p:style>
+              <a:lnRef idx="2">
+                <a:schemeClr val="accent1">
+                  <a:shade val="15000"/>
+                </a:schemeClr>
+              </a:lnRef>
+              <a:fillRef idx="1">
+                <a:schemeClr val="accent1"/>
+              </a:fillRef>
+              <a:effectRef idx="0">
+                <a:schemeClr val="accent1"/>
+              </a:effectRef>
+              <a:fontRef idx="minor">
+                <a:schemeClr val="lt1"/>
+              </a:fontRef>
+            </p:style>
+            <p:txBody>
+              <a:bodyPr rtlCol="0" anchor="ctr"/>
+              <a:lstStyle/>
+              <a:p>
+                <a:pPr algn="ctr"/>
+                <a:endParaRPr lang="ko-KR" altLang="en-US" sz="1013"/>
+              </a:p>
+            </p:txBody>
+          </p:sp>
+          <p:sp>
+            <p:nvSpPr>
+              <p:cNvPr id="184" name="화살표: 아래쪽 183">
+                <a:extLst>
+                  <a:ext uri="{FF2B5EF4-FFF2-40B4-BE49-F238E27FC236}">
+                    <a16:creationId xmlns:a16="http://schemas.microsoft.com/office/drawing/2014/main" id="{95479DC5-511F-5FE9-835F-62BFF680BF45}"/>
+                  </a:ext>
+                </a:extLst>
+              </p:cNvPr>
+              <p:cNvSpPr/>
+              <p:nvPr/>
+            </p:nvSpPr>
+            <p:spPr>
+              <a:xfrm rot="5400000">
+                <a:off x="4592224" y="7919520"/>
+                <a:ext cx="152205" cy="398904"/>
+              </a:xfrm>
+              <a:prstGeom prst="downArrow">
+                <a:avLst/>
+              </a:prstGeom>
+              <a:solidFill>
+                <a:srgbClr val="FFFF00"/>
+              </a:solidFill>
+            </p:spPr>
+            <p:style>
+              <a:lnRef idx="2">
+                <a:schemeClr val="accent1">
+                  <a:shade val="15000"/>
+                </a:schemeClr>
+              </a:lnRef>
+              <a:fillRef idx="1">
+                <a:schemeClr val="accent1"/>
+              </a:fillRef>
+              <a:effectRef idx="0">
+                <a:schemeClr val="accent1"/>
+              </a:effectRef>
+              <a:fontRef idx="minor">
+                <a:schemeClr val="lt1"/>
+              </a:fontRef>
+            </p:style>
+            <p:txBody>
+              <a:bodyPr rtlCol="0" anchor="ctr"/>
+              <a:lstStyle/>
+              <a:p>
+                <a:pPr algn="ctr"/>
+                <a:endParaRPr lang="ko-KR" altLang="en-US" sz="1013"/>
+              </a:p>
+            </p:txBody>
+          </p:sp>
+          <p:sp>
+            <p:nvSpPr>
+              <p:cNvPr id="185" name="화살표: 아래쪽 184">
+                <a:extLst>
+                  <a:ext uri="{FF2B5EF4-FFF2-40B4-BE49-F238E27FC236}">
+                    <a16:creationId xmlns:a16="http://schemas.microsoft.com/office/drawing/2014/main" id="{791B09F6-6D15-6365-BCD3-051BED19B053}"/>
+                  </a:ext>
+                </a:extLst>
+              </p:cNvPr>
+              <p:cNvSpPr/>
+              <p:nvPr/>
+            </p:nvSpPr>
+            <p:spPr>
+              <a:xfrm rot="5400000">
+                <a:off x="4490073" y="7798983"/>
+                <a:ext cx="152205" cy="398904"/>
+              </a:xfrm>
+              <a:prstGeom prst="downArrow">
+                <a:avLst/>
+              </a:prstGeom>
+              <a:solidFill>
+                <a:srgbClr val="FFFF00"/>
+              </a:solidFill>
+            </p:spPr>
+            <p:style>
+              <a:lnRef idx="2">
+                <a:schemeClr val="accent1">
+                  <a:shade val="15000"/>
+                </a:schemeClr>
+              </a:lnRef>
+              <a:fillRef idx="1">
+                <a:schemeClr val="accent1"/>
+              </a:fillRef>
+              <a:effectRef idx="0">
+                <a:schemeClr val="accent1"/>
+              </a:effectRef>
+              <a:fontRef idx="minor">
+                <a:schemeClr val="lt1"/>
+              </a:fontRef>
+            </p:style>
+            <p:txBody>
+              <a:bodyPr rtlCol="0" anchor="ctr"/>
+              <a:lstStyle/>
+              <a:p>
+                <a:pPr algn="ctr"/>
+                <a:endParaRPr lang="ko-KR" altLang="en-US" sz="1013"/>
+              </a:p>
+            </p:txBody>
+          </p:sp>
+          <p:cxnSp>
+            <p:nvCxnSpPr>
+              <p:cNvPr id="186" name="직선 연결선 185">
+                <a:extLst>
+                  <a:ext uri="{FF2B5EF4-FFF2-40B4-BE49-F238E27FC236}">
+                    <a16:creationId xmlns:a16="http://schemas.microsoft.com/office/drawing/2014/main" id="{016D00E6-C014-12C5-9B34-7FCB132CCDA0}"/>
+                  </a:ext>
+                </a:extLst>
+              </p:cNvPr>
+              <p:cNvCxnSpPr>
+                <a:cxnSpLocks/>
+              </p:cNvCxnSpPr>
+              <p:nvPr/>
+            </p:nvCxnSpPr>
+            <p:spPr>
+              <a:xfrm>
+                <a:off x="4426725" y="5896691"/>
+                <a:ext cx="0" cy="1535906"/>
+              </a:xfrm>
+              <a:prstGeom prst="line">
+                <a:avLst/>
+              </a:prstGeom>
+              <a:ln w="9525">
+                <a:solidFill>
+                  <a:schemeClr val="tx1"/>
+                </a:solidFill>
+                <a:prstDash val="dash"/>
+              </a:ln>
+            </p:spPr>
+            <p:style>
+              <a:lnRef idx="2">
+                <a:schemeClr val="accent1"/>
+              </a:lnRef>
+              <a:fillRef idx="0">
+                <a:schemeClr val="accent1"/>
+              </a:fillRef>
+              <a:effectRef idx="1">
+                <a:schemeClr val="accent1"/>
+              </a:effectRef>
+              <a:fontRef idx="minor">
+                <a:schemeClr val="tx1"/>
+              </a:fontRef>
+            </p:style>
+          </p:cxnSp>
+          <p:cxnSp>
+            <p:nvCxnSpPr>
+              <p:cNvPr id="187" name="직선 연결선 186">
+                <a:extLst>
+                  <a:ext uri="{FF2B5EF4-FFF2-40B4-BE49-F238E27FC236}">
+                    <a16:creationId xmlns:a16="http://schemas.microsoft.com/office/drawing/2014/main" id="{DCC3EFDD-CB48-0F57-28AB-86599E6DC5BA}"/>
+                  </a:ext>
+                </a:extLst>
+              </p:cNvPr>
+              <p:cNvCxnSpPr>
+                <a:cxnSpLocks/>
+              </p:cNvCxnSpPr>
+              <p:nvPr/>
+            </p:nvCxnSpPr>
+            <p:spPr>
+              <a:xfrm>
+                <a:off x="5725459" y="5896691"/>
+                <a:ext cx="0" cy="361474"/>
+              </a:xfrm>
+              <a:prstGeom prst="line">
+                <a:avLst/>
+              </a:prstGeom>
+              <a:ln w="9525">
+                <a:solidFill>
+                  <a:schemeClr val="tx1"/>
+                </a:solidFill>
+                <a:prstDash val="dash"/>
+              </a:ln>
+            </p:spPr>
+            <p:style>
+              <a:lnRef idx="2">
+                <a:schemeClr val="accent1"/>
+              </a:lnRef>
+              <a:fillRef idx="0">
+                <a:schemeClr val="accent1"/>
+              </a:fillRef>
+              <a:effectRef idx="1">
+                <a:schemeClr val="accent1"/>
+              </a:effectRef>
+              <a:fontRef idx="minor">
+                <a:schemeClr val="tx1"/>
+              </a:fontRef>
+            </p:style>
+          </p:cxnSp>
+          <p:sp>
+            <p:nvSpPr>
+              <p:cNvPr id="188" name="TextBox 187">
+                <a:extLst>
+                  <a:ext uri="{FF2B5EF4-FFF2-40B4-BE49-F238E27FC236}">
+                    <a16:creationId xmlns:a16="http://schemas.microsoft.com/office/drawing/2014/main" id="{0AF5BF1A-3EB7-8CBC-2AE9-CD40DB4EBCC4}"/>
+                  </a:ext>
+                </a:extLst>
+              </p:cNvPr>
+              <p:cNvSpPr txBox="1"/>
+              <p:nvPr/>
+            </p:nvSpPr>
+            <p:spPr>
+              <a:xfrm>
+                <a:off x="4566176" y="5829539"/>
+                <a:ext cx="1043735" cy="404085"/>
+              </a:xfrm>
+              <a:prstGeom prst="rect">
+                <a:avLst/>
+              </a:prstGeom>
+              <a:noFill/>
+            </p:spPr>
+            <p:txBody>
+              <a:bodyPr wrap="square" rtlCol="0">
+                <a:spAutoFit/>
+              </a:bodyPr>
+              <a:lstStyle/>
+              <a:p>
+                <a:pPr algn="ctr"/>
+                <a:r>
+                  <a:rPr lang="en-US" altLang="ko-KR" sz="1013"/>
+                  <a:t>BETOX Region</a:t>
+                </a:r>
+              </a:p>
+              <a:p>
+                <a:pPr algn="ctr"/>
+                <a:r>
+                  <a:rPr lang="en-US" altLang="ko-KR" sz="1013"/>
+                  <a:t>(ONO)</a:t>
+                </a:r>
+              </a:p>
+            </p:txBody>
+          </p:sp>
+          <p:grpSp>
+            <p:nvGrpSpPr>
+              <p:cNvPr id="189" name="그룹 188">
+                <a:extLst>
+                  <a:ext uri="{FF2B5EF4-FFF2-40B4-BE49-F238E27FC236}">
+                    <a16:creationId xmlns:a16="http://schemas.microsoft.com/office/drawing/2014/main" id="{118F26CA-DA88-FE1C-1AC6-9A8103B90415}"/>
+                  </a:ext>
+                </a:extLst>
+              </p:cNvPr>
+              <p:cNvGrpSpPr/>
+              <p:nvPr/>
+            </p:nvGrpSpPr>
+            <p:grpSpPr>
+              <a:xfrm>
+                <a:off x="4409675" y="6265426"/>
+                <a:ext cx="1427217" cy="2124973"/>
+                <a:chOff x="4409675" y="6458070"/>
+                <a:chExt cx="1427217" cy="2124973"/>
+              </a:xfrm>
+            </p:grpSpPr>
+            <p:cxnSp>
+              <p:nvCxnSpPr>
+                <p:cNvPr id="200" name="직선 연결선 199">
+                  <a:extLst>
+                    <a:ext uri="{FF2B5EF4-FFF2-40B4-BE49-F238E27FC236}">
+                      <a16:creationId xmlns:a16="http://schemas.microsoft.com/office/drawing/2014/main" id="{6CA1E149-AE62-AEA9-4EDD-780E246109DB}"/>
+                    </a:ext>
+                  </a:extLst>
+                </p:cNvPr>
+                <p:cNvCxnSpPr>
+                  <a:cxnSpLocks/>
+                </p:cNvCxnSpPr>
+                <p:nvPr/>
+              </p:nvCxnSpPr>
+              <p:spPr>
+                <a:xfrm>
+                  <a:off x="4409675" y="7575550"/>
+                  <a:ext cx="59199" cy="1007493"/>
+                </a:xfrm>
+                <a:prstGeom prst="line">
+                  <a:avLst/>
+                </a:prstGeom>
+                <a:ln>
+                  <a:solidFill>
+                    <a:srgbClr val="FFFF00">
+                      <a:alpha val="69804"/>
+                    </a:srgbClr>
+                  </a:solidFill>
+                  <a:prstDash val="sysDash"/>
+                </a:ln>
+              </p:spPr>
+              <p:style>
+                <a:lnRef idx="2">
+                  <a:schemeClr val="accent1"/>
+                </a:lnRef>
+                <a:fillRef idx="0">
+                  <a:schemeClr val="accent1"/>
+                </a:fillRef>
+                <a:effectRef idx="1">
+                  <a:schemeClr val="accent1"/>
+                </a:effectRef>
+                <a:fontRef idx="minor">
+                  <a:schemeClr val="tx1"/>
+                </a:fontRef>
+              </p:style>
+            </p:cxnSp>
+            <p:cxnSp>
+              <p:nvCxnSpPr>
+                <p:cNvPr id="201" name="직선 연결선 200">
+                  <a:extLst>
+                    <a:ext uri="{FF2B5EF4-FFF2-40B4-BE49-F238E27FC236}">
+                      <a16:creationId xmlns:a16="http://schemas.microsoft.com/office/drawing/2014/main" id="{CCE48783-E6F8-F856-1E5F-E3D4BC4C2FC6}"/>
+                    </a:ext>
+                  </a:extLst>
+                </p:cNvPr>
+                <p:cNvCxnSpPr>
+                  <a:cxnSpLocks/>
+                </p:cNvCxnSpPr>
+                <p:nvPr/>
+              </p:nvCxnSpPr>
+              <p:spPr>
+                <a:xfrm flipH="1">
+                  <a:off x="4418201" y="7009769"/>
+                  <a:ext cx="401449" cy="565781"/>
+                </a:xfrm>
+                <a:prstGeom prst="line">
+                  <a:avLst/>
+                </a:prstGeom>
+                <a:ln>
+                  <a:solidFill>
+                    <a:srgbClr val="FFFF00">
+                      <a:alpha val="69804"/>
+                    </a:srgbClr>
+                  </a:solidFill>
+                  <a:prstDash val="sysDash"/>
+                </a:ln>
+              </p:spPr>
+              <p:style>
+                <a:lnRef idx="2">
+                  <a:schemeClr val="accent1"/>
+                </a:lnRef>
+                <a:fillRef idx="0">
+                  <a:schemeClr val="accent1"/>
+                </a:fillRef>
+                <a:effectRef idx="1">
+                  <a:schemeClr val="accent1"/>
+                </a:effectRef>
+                <a:fontRef idx="minor">
+                  <a:schemeClr val="tx1"/>
+                </a:fontRef>
+              </p:style>
+            </p:cxnSp>
+            <p:cxnSp>
+              <p:nvCxnSpPr>
+                <p:cNvPr id="202" name="직선 연결선 201">
+                  <a:extLst>
+                    <a:ext uri="{FF2B5EF4-FFF2-40B4-BE49-F238E27FC236}">
+                      <a16:creationId xmlns:a16="http://schemas.microsoft.com/office/drawing/2014/main" id="{385DC8FC-E4B8-F28F-58EF-8338CA71886A}"/>
+                    </a:ext>
+                  </a:extLst>
+                </p:cNvPr>
+                <p:cNvCxnSpPr>
+                  <a:cxnSpLocks/>
+                </p:cNvCxnSpPr>
+                <p:nvPr/>
+              </p:nvCxnSpPr>
+              <p:spPr>
+                <a:xfrm>
+                  <a:off x="4836700" y="7009769"/>
+                  <a:ext cx="30143" cy="1009044"/>
+                </a:xfrm>
+                <a:prstGeom prst="line">
+                  <a:avLst/>
+                </a:prstGeom>
+                <a:ln>
+                  <a:solidFill>
+                    <a:srgbClr val="FFFF00">
+                      <a:alpha val="20000"/>
+                    </a:srgbClr>
+                  </a:solidFill>
+                  <a:prstDash val="sysDash"/>
+                </a:ln>
+              </p:spPr>
+              <p:style>
+                <a:lnRef idx="2">
+                  <a:schemeClr val="accent1"/>
+                </a:lnRef>
+                <a:fillRef idx="0">
+                  <a:schemeClr val="accent1"/>
+                </a:fillRef>
+                <a:effectRef idx="1">
+                  <a:schemeClr val="accent1"/>
+                </a:effectRef>
+                <a:fontRef idx="minor">
+                  <a:schemeClr val="tx1"/>
+                </a:fontRef>
+              </p:style>
+            </p:cxnSp>
+            <p:cxnSp>
+              <p:nvCxnSpPr>
+                <p:cNvPr id="203" name="직선 연결선 202">
+                  <a:extLst>
+                    <a:ext uri="{FF2B5EF4-FFF2-40B4-BE49-F238E27FC236}">
+                      <a16:creationId xmlns:a16="http://schemas.microsoft.com/office/drawing/2014/main" id="{75B69C6A-0495-04BC-9B14-50A372382333}"/>
+                    </a:ext>
+                  </a:extLst>
+                </p:cNvPr>
+                <p:cNvCxnSpPr>
+                  <a:cxnSpLocks/>
+                </p:cNvCxnSpPr>
+                <p:nvPr/>
+              </p:nvCxnSpPr>
+              <p:spPr>
+                <a:xfrm flipH="1">
+                  <a:off x="4883893" y="7924249"/>
+                  <a:ext cx="157410" cy="94564"/>
+                </a:xfrm>
+                <a:prstGeom prst="line">
+                  <a:avLst/>
+                </a:prstGeom>
+                <a:ln>
+                  <a:solidFill>
+                    <a:srgbClr val="FFFF00">
+                      <a:alpha val="20000"/>
+                    </a:srgbClr>
+                  </a:solidFill>
+                  <a:prstDash val="sysDash"/>
+                </a:ln>
+              </p:spPr>
+              <p:style>
+                <a:lnRef idx="2">
+                  <a:schemeClr val="accent1"/>
+                </a:lnRef>
+                <a:fillRef idx="0">
+                  <a:schemeClr val="accent1"/>
+                </a:fillRef>
+                <a:effectRef idx="1">
+                  <a:schemeClr val="accent1"/>
+                </a:effectRef>
+                <a:fontRef idx="minor">
+                  <a:schemeClr val="tx1"/>
+                </a:fontRef>
+              </p:style>
+            </p:cxnSp>
+            <p:cxnSp>
+              <p:nvCxnSpPr>
+                <p:cNvPr id="204" name="직선 연결선 203">
+                  <a:extLst>
+                    <a:ext uri="{FF2B5EF4-FFF2-40B4-BE49-F238E27FC236}">
+                      <a16:creationId xmlns:a16="http://schemas.microsoft.com/office/drawing/2014/main" id="{BDEA1707-83EF-6FE2-B75D-2A1BA8354ADB}"/>
+                    </a:ext>
+                  </a:extLst>
+                </p:cNvPr>
+                <p:cNvCxnSpPr>
+                  <a:cxnSpLocks/>
+                </p:cNvCxnSpPr>
+                <p:nvPr/>
+              </p:nvCxnSpPr>
+              <p:spPr>
+                <a:xfrm>
+                  <a:off x="5396775" y="6680200"/>
+                  <a:ext cx="0" cy="1040384"/>
+                </a:xfrm>
+                <a:prstGeom prst="line">
+                  <a:avLst/>
+                </a:prstGeom>
+                <a:ln>
+                  <a:solidFill>
+                    <a:srgbClr val="FFFF00">
+                      <a:alpha val="69804"/>
+                    </a:srgbClr>
+                  </a:solidFill>
+                  <a:prstDash val="sysDash"/>
+                </a:ln>
+              </p:spPr>
+              <p:style>
+                <a:lnRef idx="2">
+                  <a:schemeClr val="accent1"/>
+                </a:lnRef>
+                <a:fillRef idx="0">
+                  <a:schemeClr val="accent1"/>
+                </a:fillRef>
+                <a:effectRef idx="1">
+                  <a:schemeClr val="accent1"/>
+                </a:effectRef>
+                <a:fontRef idx="minor">
+                  <a:schemeClr val="tx1"/>
+                </a:fontRef>
+              </p:style>
+            </p:cxnSp>
+            <p:cxnSp>
+              <p:nvCxnSpPr>
+                <p:cNvPr id="205" name="직선 연결선 204">
+                  <a:extLst>
+                    <a:ext uri="{FF2B5EF4-FFF2-40B4-BE49-F238E27FC236}">
+                      <a16:creationId xmlns:a16="http://schemas.microsoft.com/office/drawing/2014/main" id="{3196023A-72CE-2505-AA69-304117AC80C5}"/>
+                    </a:ext>
+                  </a:extLst>
+                </p:cNvPr>
+                <p:cNvCxnSpPr>
+                  <a:cxnSpLocks/>
+                </p:cNvCxnSpPr>
+                <p:nvPr/>
+              </p:nvCxnSpPr>
+              <p:spPr>
+                <a:xfrm flipH="1">
+                  <a:off x="5396775" y="6458070"/>
+                  <a:ext cx="328684" cy="222130"/>
+                </a:xfrm>
+                <a:prstGeom prst="line">
+                  <a:avLst/>
+                </a:prstGeom>
+                <a:ln>
+                  <a:solidFill>
+                    <a:srgbClr val="FFFF00">
+                      <a:alpha val="69804"/>
+                    </a:srgbClr>
+                  </a:solidFill>
+                  <a:prstDash val="sysDash"/>
+                </a:ln>
+              </p:spPr>
+              <p:style>
+                <a:lnRef idx="2">
+                  <a:schemeClr val="accent1"/>
+                </a:lnRef>
+                <a:fillRef idx="0">
+                  <a:schemeClr val="accent1"/>
+                </a:fillRef>
+                <a:effectRef idx="1">
+                  <a:schemeClr val="accent1"/>
+                </a:effectRef>
+                <a:fontRef idx="minor">
+                  <a:schemeClr val="tx1"/>
+                </a:fontRef>
+              </p:style>
+            </p:cxnSp>
+            <p:cxnSp>
+              <p:nvCxnSpPr>
+                <p:cNvPr id="206" name="직선 연결선 205">
+                  <a:extLst>
+                    <a:ext uri="{FF2B5EF4-FFF2-40B4-BE49-F238E27FC236}">
+                      <a16:creationId xmlns:a16="http://schemas.microsoft.com/office/drawing/2014/main" id="{E2C2599A-F5E0-5598-B565-837DF590061A}"/>
+                    </a:ext>
+                  </a:extLst>
+                </p:cNvPr>
+                <p:cNvCxnSpPr>
+                  <a:cxnSpLocks/>
+                </p:cNvCxnSpPr>
+                <p:nvPr/>
+              </p:nvCxnSpPr>
+              <p:spPr>
+                <a:xfrm flipH="1">
+                  <a:off x="5609911" y="6482254"/>
+                  <a:ext cx="115548" cy="1501065"/>
+                </a:xfrm>
+                <a:prstGeom prst="line">
+                  <a:avLst/>
+                </a:prstGeom>
+                <a:ln>
+                  <a:solidFill>
+                    <a:srgbClr val="FFFF00">
+                      <a:alpha val="20000"/>
+                    </a:srgbClr>
+                  </a:solidFill>
+                  <a:prstDash val="sysDash"/>
+                </a:ln>
+              </p:spPr>
+              <p:style>
+                <a:lnRef idx="2">
+                  <a:schemeClr val="accent1"/>
+                </a:lnRef>
+                <a:fillRef idx="0">
+                  <a:schemeClr val="accent1"/>
+                </a:fillRef>
+                <a:effectRef idx="1">
+                  <a:schemeClr val="accent1"/>
+                </a:effectRef>
+                <a:fontRef idx="minor">
+                  <a:schemeClr val="tx1"/>
+                </a:fontRef>
+              </p:style>
+            </p:cxnSp>
+            <p:cxnSp>
+              <p:nvCxnSpPr>
+                <p:cNvPr id="207" name="직선 연결선 206">
+                  <a:extLst>
+                    <a:ext uri="{FF2B5EF4-FFF2-40B4-BE49-F238E27FC236}">
+                      <a16:creationId xmlns:a16="http://schemas.microsoft.com/office/drawing/2014/main" id="{A314CE9F-7296-2D91-7ABC-7F93C48CA7A7}"/>
+                    </a:ext>
+                  </a:extLst>
+                </p:cNvPr>
+                <p:cNvCxnSpPr>
+                  <a:cxnSpLocks/>
+                </p:cNvCxnSpPr>
+                <p:nvPr/>
+              </p:nvCxnSpPr>
+              <p:spPr>
+                <a:xfrm flipH="1">
+                  <a:off x="5626962" y="7909590"/>
+                  <a:ext cx="209930" cy="73729"/>
+                </a:xfrm>
+                <a:prstGeom prst="line">
+                  <a:avLst/>
+                </a:prstGeom>
+                <a:ln>
+                  <a:solidFill>
+                    <a:srgbClr val="FFFF00">
+                      <a:alpha val="20000"/>
+                    </a:srgbClr>
+                  </a:solidFill>
+                  <a:prstDash val="sysDash"/>
+                </a:ln>
+              </p:spPr>
+              <p:style>
+                <a:lnRef idx="2">
+                  <a:schemeClr val="accent1"/>
+                </a:lnRef>
+                <a:fillRef idx="0">
+                  <a:schemeClr val="accent1"/>
+                </a:fillRef>
+                <a:effectRef idx="1">
+                  <a:schemeClr val="accent1"/>
+                </a:effectRef>
+                <a:fontRef idx="minor">
+                  <a:schemeClr val="tx1"/>
+                </a:fontRef>
+              </p:style>
+            </p:cxnSp>
+            <p:cxnSp>
+              <p:nvCxnSpPr>
+                <p:cNvPr id="208" name="직선 연결선 207">
+                  <a:extLst>
+                    <a:ext uri="{FF2B5EF4-FFF2-40B4-BE49-F238E27FC236}">
+                      <a16:creationId xmlns:a16="http://schemas.microsoft.com/office/drawing/2014/main" id="{1A430988-E3F7-73C3-C5B2-C66EE68EE48A}"/>
+                    </a:ext>
+                  </a:extLst>
+                </p:cNvPr>
+                <p:cNvCxnSpPr>
+                  <a:cxnSpLocks/>
+                </p:cNvCxnSpPr>
+                <p:nvPr/>
+              </p:nvCxnSpPr>
+              <p:spPr>
+                <a:xfrm flipH="1">
+                  <a:off x="5049061" y="7718808"/>
+                  <a:ext cx="341973" cy="205441"/>
+                </a:xfrm>
+                <a:prstGeom prst="line">
+                  <a:avLst/>
+                </a:prstGeom>
+                <a:ln>
+                  <a:solidFill>
+                    <a:srgbClr val="FFFF00">
+                      <a:alpha val="69804"/>
+                    </a:srgbClr>
+                  </a:solidFill>
+                  <a:prstDash val="sysDash"/>
+                </a:ln>
+              </p:spPr>
+              <p:style>
+                <a:lnRef idx="2">
+                  <a:schemeClr val="accent1"/>
+                </a:lnRef>
+                <a:fillRef idx="0">
+                  <a:schemeClr val="accent1"/>
+                </a:fillRef>
+                <a:effectRef idx="1">
+                  <a:schemeClr val="accent1"/>
+                </a:effectRef>
+                <a:fontRef idx="minor">
+                  <a:schemeClr val="tx1"/>
+                </a:fontRef>
+              </p:style>
+            </p:cxnSp>
+          </p:grpSp>
+          <p:sp>
+            <p:nvSpPr>
+              <p:cNvPr id="190" name="화살표: 아래쪽 189">
+                <a:extLst>
+                  <a:ext uri="{FF2B5EF4-FFF2-40B4-BE49-F238E27FC236}">
+                    <a16:creationId xmlns:a16="http://schemas.microsoft.com/office/drawing/2014/main" id="{30F43438-227F-C99A-BE24-8BF92C956B59}"/>
+                  </a:ext>
+                </a:extLst>
+              </p:cNvPr>
+              <p:cNvSpPr/>
+              <p:nvPr/>
+            </p:nvSpPr>
+            <p:spPr>
+              <a:xfrm rot="19925906" flipH="1">
+                <a:off x="5224310" y="7576453"/>
+                <a:ext cx="188671" cy="279256"/>
+              </a:xfrm>
+              <a:prstGeom prst="downArrow">
+                <a:avLst/>
+              </a:prstGeom>
+              <a:solidFill>
+                <a:srgbClr val="00B0F0"/>
+              </a:solidFill>
+              <a:scene3d>
+                <a:camera prst="orthographicFront">
+                  <a:rot lat="2762498" lon="1771219" rev="1330561"/>
+                </a:camera>
+                <a:lightRig rig="threePt" dir="t"/>
+              </a:scene3d>
+            </p:spPr>
+            <p:style>
+              <a:lnRef idx="2">
+                <a:schemeClr val="accent1">
+                  <a:shade val="15000"/>
+                </a:schemeClr>
+              </a:lnRef>
+              <a:fillRef idx="1">
+                <a:schemeClr val="accent1"/>
+              </a:fillRef>
+              <a:effectRef idx="0">
+                <a:schemeClr val="accent1"/>
+              </a:effectRef>
+              <a:fontRef idx="minor">
+                <a:schemeClr val="lt1"/>
+              </a:fontRef>
+            </p:style>
+            <p:txBody>
+              <a:bodyPr rtlCol="0" anchor="ctr"/>
+              <a:lstStyle/>
+              <a:p>
+                <a:pPr algn="ctr"/>
+                <a:endParaRPr lang="ko-KR" altLang="en-US" sz="1013"/>
+              </a:p>
+            </p:txBody>
+          </p:sp>
+          <p:cxnSp>
+            <p:nvCxnSpPr>
+              <p:cNvPr id="191" name="직선 연결선 190">
+                <a:extLst>
+                  <a:ext uri="{FF2B5EF4-FFF2-40B4-BE49-F238E27FC236}">
+                    <a16:creationId xmlns:a16="http://schemas.microsoft.com/office/drawing/2014/main" id="{E8C01DC7-791B-4A74-43F2-CB9DDC35CBD6}"/>
+                  </a:ext>
+                </a:extLst>
+              </p:cNvPr>
+              <p:cNvCxnSpPr>
+                <a:cxnSpLocks/>
+              </p:cNvCxnSpPr>
+              <p:nvPr/>
+            </p:nvCxnSpPr>
+            <p:spPr>
+              <a:xfrm>
+                <a:off x="4765627" y="8304239"/>
+                <a:ext cx="118266" cy="464881"/>
+              </a:xfrm>
+              <a:prstGeom prst="line">
+                <a:avLst/>
+              </a:prstGeom>
+              <a:ln>
+                <a:solidFill>
+                  <a:schemeClr val="tx1"/>
+                </a:solidFill>
+              </a:ln>
+            </p:spPr>
+            <p:style>
+              <a:lnRef idx="2">
+                <a:schemeClr val="accent1"/>
+              </a:lnRef>
+              <a:fillRef idx="0">
+                <a:schemeClr val="accent1"/>
+              </a:fillRef>
+              <a:effectRef idx="1">
+                <a:schemeClr val="accent1"/>
+              </a:effectRef>
+              <a:fontRef idx="minor">
+                <a:schemeClr val="tx1"/>
+              </a:fontRef>
+            </p:style>
+          </p:cxnSp>
+          <p:sp>
+            <p:nvSpPr>
+              <p:cNvPr id="192" name="TextBox 191">
+                <a:extLst>
+                  <a:ext uri="{FF2B5EF4-FFF2-40B4-BE49-F238E27FC236}">
+                    <a16:creationId xmlns:a16="http://schemas.microsoft.com/office/drawing/2014/main" id="{2529AD0C-C28F-02DB-5D61-2264039B3938}"/>
+                  </a:ext>
+                </a:extLst>
+              </p:cNvPr>
+              <p:cNvSpPr txBox="1"/>
+              <p:nvPr/>
+            </p:nvSpPr>
+            <p:spPr>
+              <a:xfrm>
+                <a:off x="4362450" y="8783517"/>
+                <a:ext cx="1085850" cy="334835"/>
+              </a:xfrm>
+              <a:prstGeom prst="rect">
+                <a:avLst/>
+              </a:prstGeom>
+              <a:noFill/>
+            </p:spPr>
+            <p:txBody>
+              <a:bodyPr wrap="square" rtlCol="0">
+                <a:spAutoFit/>
+              </a:bodyPr>
+              <a:lstStyle/>
+              <a:p>
+                <a:pPr algn="ctr"/>
+                <a:r>
+                  <a:rPr lang="en-US" altLang="ko-KR" sz="788"/>
+                  <a:t>Trap-to-Band Tunneling Emission</a:t>
+                </a:r>
+                <a:endParaRPr lang="ko-KR" altLang="en-US" sz="788"/>
+              </a:p>
+            </p:txBody>
+          </p:sp>
+          <p:sp>
+            <p:nvSpPr>
+              <p:cNvPr id="194" name="화살표: 아래쪽 193">
+                <a:extLst>
+                  <a:ext uri="{FF2B5EF4-FFF2-40B4-BE49-F238E27FC236}">
+                    <a16:creationId xmlns:a16="http://schemas.microsoft.com/office/drawing/2014/main" id="{283CB6CC-4823-540D-528E-2243C2EDA567}"/>
+                  </a:ext>
+                </a:extLst>
+              </p:cNvPr>
+              <p:cNvSpPr/>
+              <p:nvPr/>
+            </p:nvSpPr>
+            <p:spPr>
+              <a:xfrm rot="8800769" flipH="1">
+                <a:off x="4945085" y="7362945"/>
+                <a:ext cx="188671" cy="279256"/>
+              </a:xfrm>
+              <a:prstGeom prst="downArrow">
+                <a:avLst/>
+              </a:prstGeom>
+              <a:solidFill>
+                <a:srgbClr val="00B0F0"/>
+              </a:solidFill>
+              <a:scene3d>
+                <a:camera prst="orthographicFront">
+                  <a:rot lat="2902812" lon="2358286" rev="1722722"/>
+                </a:camera>
+                <a:lightRig rig="threePt" dir="t"/>
+              </a:scene3d>
+            </p:spPr>
+            <p:style>
+              <a:lnRef idx="2">
+                <a:schemeClr val="accent1">
+                  <a:shade val="15000"/>
+                </a:schemeClr>
+              </a:lnRef>
+              <a:fillRef idx="1">
+                <a:schemeClr val="accent1"/>
+              </a:fillRef>
+              <a:effectRef idx="0">
+                <a:schemeClr val="accent1"/>
+              </a:effectRef>
+              <a:fontRef idx="minor">
+                <a:schemeClr val="lt1"/>
+              </a:fontRef>
+            </p:style>
+            <p:txBody>
+              <a:bodyPr rtlCol="0" anchor="ctr"/>
+              <a:lstStyle/>
+              <a:p>
+                <a:pPr algn="ctr"/>
+                <a:endParaRPr lang="ko-KR" altLang="en-US" sz="1013"/>
+              </a:p>
+            </p:txBody>
+          </p:sp>
+          <p:cxnSp>
+            <p:nvCxnSpPr>
+              <p:cNvPr id="195" name="직선 연결선 194">
+                <a:extLst>
+                  <a:ext uri="{FF2B5EF4-FFF2-40B4-BE49-F238E27FC236}">
+                    <a16:creationId xmlns:a16="http://schemas.microsoft.com/office/drawing/2014/main" id="{E1A415D3-4B26-4A0D-94BF-358842F5645E}"/>
+                  </a:ext>
+                </a:extLst>
+              </p:cNvPr>
+              <p:cNvCxnSpPr>
+                <a:cxnSpLocks/>
+              </p:cNvCxnSpPr>
+              <p:nvPr/>
+            </p:nvCxnSpPr>
+            <p:spPr>
+              <a:xfrm>
+                <a:off x="5725459" y="8217236"/>
+                <a:ext cx="0" cy="361474"/>
+              </a:xfrm>
+              <a:prstGeom prst="line">
+                <a:avLst/>
+              </a:prstGeom>
+              <a:ln w="9525">
+                <a:solidFill>
+                  <a:schemeClr val="tx1"/>
+                </a:solidFill>
+                <a:prstDash val="dash"/>
+              </a:ln>
+            </p:spPr>
+            <p:style>
+              <a:lnRef idx="2">
+                <a:schemeClr val="accent1"/>
+              </a:lnRef>
+              <a:fillRef idx="0">
+                <a:schemeClr val="accent1"/>
+              </a:fillRef>
+              <a:effectRef idx="1">
+                <a:schemeClr val="accent1"/>
+              </a:effectRef>
+              <a:fontRef idx="minor">
+                <a:schemeClr val="tx1"/>
+              </a:fontRef>
+            </p:style>
+          </p:cxnSp>
+          <p:sp>
+            <p:nvSpPr>
+              <p:cNvPr id="196" name="TextBox 195">
+                <a:extLst>
+                  <a:ext uri="{FF2B5EF4-FFF2-40B4-BE49-F238E27FC236}">
+                    <a16:creationId xmlns:a16="http://schemas.microsoft.com/office/drawing/2014/main" id="{BD2A5A98-ABFD-BEE5-3591-F7D93E6F5542}"/>
+                  </a:ext>
+                </a:extLst>
+              </p:cNvPr>
+              <p:cNvSpPr txBox="1"/>
+              <p:nvPr/>
+            </p:nvSpPr>
+            <p:spPr>
+              <a:xfrm>
+                <a:off x="5603199" y="8193932"/>
+                <a:ext cx="752934" cy="404085"/>
+              </a:xfrm>
+              <a:prstGeom prst="rect">
+                <a:avLst/>
+              </a:prstGeom>
+              <a:noFill/>
+            </p:spPr>
+            <p:txBody>
+              <a:bodyPr wrap="square" rtlCol="0">
+                <a:spAutoFit/>
+              </a:bodyPr>
+              <a:lstStyle/>
+              <a:p>
+                <a:pPr algn="ctr"/>
+                <a:r>
+                  <a:rPr lang="en-US" altLang="ko-KR" sz="1013"/>
+                  <a:t>CTN</a:t>
+                </a:r>
+              </a:p>
+              <a:p>
+                <a:pPr algn="ctr"/>
+                <a:r>
+                  <a:rPr lang="en-US" altLang="ko-KR" sz="1013"/>
+                  <a:t>Region</a:t>
+                </a:r>
+              </a:p>
+            </p:txBody>
+          </p:sp>
+          <p:sp>
+            <p:nvSpPr>
+              <p:cNvPr id="197" name="화살표: 아래쪽 196">
+                <a:extLst>
+                  <a:ext uri="{FF2B5EF4-FFF2-40B4-BE49-F238E27FC236}">
+                    <a16:creationId xmlns:a16="http://schemas.microsoft.com/office/drawing/2014/main" id="{F57EA6A0-48DA-F547-4FB5-7CD1D313A355}"/>
+                  </a:ext>
+                </a:extLst>
+              </p:cNvPr>
+              <p:cNvSpPr/>
+              <p:nvPr/>
+            </p:nvSpPr>
+            <p:spPr>
+              <a:xfrm rot="1499914" flipH="1">
+                <a:off x="4910895" y="7515700"/>
+                <a:ext cx="128448" cy="279256"/>
+              </a:xfrm>
+              <a:prstGeom prst="downArrow">
+                <a:avLst/>
+              </a:prstGeom>
+              <a:solidFill>
+                <a:srgbClr val="00B0F0"/>
+              </a:solidFill>
+              <a:scene3d>
+                <a:camera prst="orthographicFront">
+                  <a:rot lat="2762498" lon="1771219" rev="1330561"/>
+                </a:camera>
+                <a:lightRig rig="threePt" dir="t"/>
+              </a:scene3d>
+            </p:spPr>
+            <p:style>
+              <a:lnRef idx="2">
+                <a:schemeClr val="accent1">
+                  <a:shade val="15000"/>
+                </a:schemeClr>
+              </a:lnRef>
+              <a:fillRef idx="1">
+                <a:schemeClr val="accent1"/>
+              </a:fillRef>
+              <a:effectRef idx="0">
+                <a:schemeClr val="accent1"/>
+              </a:effectRef>
+              <a:fontRef idx="minor">
+                <a:schemeClr val="lt1"/>
+              </a:fontRef>
+            </p:style>
+            <p:txBody>
+              <a:bodyPr rtlCol="0" anchor="ctr"/>
+              <a:lstStyle/>
+              <a:p>
+                <a:pPr algn="ctr"/>
+                <a:endParaRPr lang="ko-KR" altLang="en-US" sz="1013"/>
+              </a:p>
+            </p:txBody>
+          </p:sp>
+          <p:sp>
+            <p:nvSpPr>
+              <p:cNvPr id="198" name="화살표: 아래쪽 197">
+                <a:extLst>
+                  <a:ext uri="{FF2B5EF4-FFF2-40B4-BE49-F238E27FC236}">
+                    <a16:creationId xmlns:a16="http://schemas.microsoft.com/office/drawing/2014/main" id="{6D269ADA-E1F8-F6C7-2123-AC08F6AD9EF3}"/>
+                  </a:ext>
+                </a:extLst>
+              </p:cNvPr>
+              <p:cNvSpPr/>
+              <p:nvPr/>
+            </p:nvSpPr>
+            <p:spPr>
+              <a:xfrm rot="1499914" flipH="1">
+                <a:off x="5348495" y="7790853"/>
+                <a:ext cx="128448" cy="279256"/>
+              </a:xfrm>
+              <a:prstGeom prst="downArrow">
+                <a:avLst/>
+              </a:prstGeom>
+              <a:solidFill>
+                <a:srgbClr val="00B0F0"/>
+              </a:solidFill>
+              <a:scene3d>
+                <a:camera prst="orthographicFront">
+                  <a:rot lat="2762498" lon="1771219" rev="1330561"/>
+                </a:camera>
+                <a:lightRig rig="threePt" dir="t"/>
+              </a:scene3d>
+            </p:spPr>
+            <p:style>
+              <a:lnRef idx="2">
+                <a:schemeClr val="accent1">
+                  <a:shade val="15000"/>
+                </a:schemeClr>
+              </a:lnRef>
+              <a:fillRef idx="1">
+                <a:schemeClr val="accent1"/>
+              </a:fillRef>
+              <a:effectRef idx="0">
+                <a:schemeClr val="accent1"/>
+              </a:effectRef>
+              <a:fontRef idx="minor">
+                <a:schemeClr val="lt1"/>
+              </a:fontRef>
+            </p:style>
+            <p:txBody>
+              <a:bodyPr rtlCol="0" anchor="ctr"/>
+              <a:lstStyle/>
+              <a:p>
+                <a:pPr algn="ctr"/>
+                <a:endParaRPr lang="ko-KR" altLang="en-US" sz="1013"/>
+              </a:p>
+            </p:txBody>
+          </p:sp>
+          <p:pic>
+            <p:nvPicPr>
+              <p:cNvPr id="199" name="그림 198">
+                <a:extLst>
+                  <a:ext uri="{FF2B5EF4-FFF2-40B4-BE49-F238E27FC236}">
+                    <a16:creationId xmlns:a16="http://schemas.microsoft.com/office/drawing/2014/main" id="{15FF8E80-68CC-58E2-A545-1FFFEC598225}"/>
+                  </a:ext>
+                </a:extLst>
+              </p:cNvPr>
+              <p:cNvPicPr>
+                <a:picLocks noChangeAspect="1"/>
+              </p:cNvPicPr>
+              <p:nvPr/>
+            </p:nvPicPr>
+            <p:blipFill>
+              <a:blip r:embed="rId3">
+                <a:alphaModFix amt="50000"/>
+              </a:blip>
+              <a:stretch>
+                <a:fillRect/>
+              </a:stretch>
+            </p:blipFill>
+            <p:spPr>
+              <a:xfrm>
+                <a:off x="4898933" y="7374919"/>
+                <a:ext cx="138613" cy="233739"/>
+              </a:xfrm>
+              <a:prstGeom prst="rect">
+                <a:avLst/>
+              </a:prstGeom>
+            </p:spPr>
+          </p:pic>
+        </p:grpSp>
+        <p:sp>
+          <p:nvSpPr>
+            <p:cNvPr id="179" name="자유형: 도형 178">
+              <a:extLst>
+                <a:ext uri="{FF2B5EF4-FFF2-40B4-BE49-F238E27FC236}">
+                  <a16:creationId xmlns:a16="http://schemas.microsoft.com/office/drawing/2014/main" id="{EF71FE24-2A38-E5EF-C1DC-1D2C5766FEF4}"/>
+                </a:ext>
+              </a:extLst>
+            </p:cNvPr>
+            <p:cNvSpPr/>
+            <p:nvPr/>
+          </p:nvSpPr>
+          <p:spPr>
+            <a:xfrm rot="10800000">
+              <a:off x="4188337" y="7548539"/>
+              <a:ext cx="939709" cy="111996"/>
+            </a:xfrm>
+            <a:custGeom>
+              <a:avLst/>
+              <a:gdLst>
+                <a:gd name="connsiteX0" fmla="*/ 0 w 1054100"/>
+                <a:gd name="connsiteY0" fmla="*/ 110186 h 199104"/>
+                <a:gd name="connsiteX1" fmla="*/ 127000 w 1054100"/>
+                <a:gd name="connsiteY1" fmla="*/ 2236 h 199104"/>
+                <a:gd name="connsiteX2" fmla="*/ 285750 w 1054100"/>
+                <a:gd name="connsiteY2" fmla="*/ 199086 h 199104"/>
+                <a:gd name="connsiteX3" fmla="*/ 463550 w 1054100"/>
+                <a:gd name="connsiteY3" fmla="*/ 14936 h 199104"/>
+                <a:gd name="connsiteX4" fmla="*/ 609600 w 1054100"/>
+                <a:gd name="connsiteY4" fmla="*/ 186386 h 199104"/>
+                <a:gd name="connsiteX5" fmla="*/ 768350 w 1054100"/>
+                <a:gd name="connsiteY5" fmla="*/ 33986 h 199104"/>
+                <a:gd name="connsiteX6" fmla="*/ 844550 w 1054100"/>
+                <a:gd name="connsiteY6" fmla="*/ 46686 h 199104"/>
+                <a:gd name="connsiteX7" fmla="*/ 920750 w 1054100"/>
+                <a:gd name="connsiteY7" fmla="*/ 116536 h 199104"/>
+                <a:gd name="connsiteX8" fmla="*/ 1054100 w 1054100"/>
+                <a:gd name="connsiteY8" fmla="*/ 122886 h 199104"/>
+              </a:gdLst>
+              <a:ahLst/>
+              <a:cxnLst>
+                <a:cxn ang="0">
+                  <a:pos x="connsiteX0" y="connsiteY0"/>
+                </a:cxn>
+                <a:cxn ang="0">
+                  <a:pos x="connsiteX1" y="connsiteY1"/>
+                </a:cxn>
+                <a:cxn ang="0">
+                  <a:pos x="connsiteX2" y="connsiteY2"/>
+                </a:cxn>
+                <a:cxn ang="0">
+                  <a:pos x="connsiteX3" y="connsiteY3"/>
+                </a:cxn>
+                <a:cxn ang="0">
+                  <a:pos x="connsiteX4" y="connsiteY4"/>
+                </a:cxn>
+                <a:cxn ang="0">
+                  <a:pos x="connsiteX5" y="connsiteY5"/>
+                </a:cxn>
+                <a:cxn ang="0">
+                  <a:pos x="connsiteX6" y="connsiteY6"/>
+                </a:cxn>
+                <a:cxn ang="0">
+                  <a:pos x="connsiteX7" y="connsiteY7"/>
+                </a:cxn>
+                <a:cxn ang="0">
+                  <a:pos x="connsiteX8" y="connsiteY8"/>
+                </a:cxn>
+              </a:cxnLst>
+              <a:rect l="l" t="t" r="r" b="b"/>
+              <a:pathLst>
+                <a:path w="1054100" h="199104">
+                  <a:moveTo>
+                    <a:pt x="0" y="110186"/>
+                  </a:moveTo>
+                  <a:cubicBezTo>
+                    <a:pt x="39687" y="48802"/>
+                    <a:pt x="79375" y="-12581"/>
+                    <a:pt x="127000" y="2236"/>
+                  </a:cubicBezTo>
+                  <a:cubicBezTo>
+                    <a:pt x="174625" y="17053"/>
+                    <a:pt x="229658" y="196969"/>
+                    <a:pt x="285750" y="199086"/>
+                  </a:cubicBezTo>
+                  <a:cubicBezTo>
+                    <a:pt x="341842" y="201203"/>
+                    <a:pt x="409575" y="17053"/>
+                    <a:pt x="463550" y="14936"/>
+                  </a:cubicBezTo>
+                  <a:cubicBezTo>
+                    <a:pt x="517525" y="12819"/>
+                    <a:pt x="558800" y="183211"/>
+                    <a:pt x="609600" y="186386"/>
+                  </a:cubicBezTo>
+                  <a:cubicBezTo>
+                    <a:pt x="660400" y="189561"/>
+                    <a:pt x="729192" y="57269"/>
+                    <a:pt x="768350" y="33986"/>
+                  </a:cubicBezTo>
+                  <a:cubicBezTo>
+                    <a:pt x="807508" y="10703"/>
+                    <a:pt x="819150" y="32928"/>
+                    <a:pt x="844550" y="46686"/>
+                  </a:cubicBezTo>
+                  <a:cubicBezTo>
+                    <a:pt x="869950" y="60444"/>
+                    <a:pt x="885825" y="103836"/>
+                    <a:pt x="920750" y="116536"/>
+                  </a:cubicBezTo>
+                  <a:cubicBezTo>
+                    <a:pt x="955675" y="129236"/>
+                    <a:pt x="1004887" y="126061"/>
+                    <a:pt x="1054100" y="122886"/>
+                  </a:cubicBezTo>
+                </a:path>
+              </a:pathLst>
+            </a:custGeom>
+            <a:noFill/>
+            <a:ln>
+              <a:solidFill>
+                <a:srgbClr val="002060"/>
+              </a:solidFill>
+              <a:prstDash val="dash"/>
+              <a:headEnd type="none" w="med" len="med"/>
+              <a:tailEnd type="arrow" w="med" len="med"/>
+            </a:ln>
+          </p:spPr>
+          <p:style>
+            <a:lnRef idx="2">
+              <a:schemeClr val="accent1">
+                <a:shade val="20000"/>
+              </a:schemeClr>
+            </a:lnRef>
+            <a:fillRef idx="1">
+              <a:schemeClr val="accent1"/>
+            </a:fillRef>
+            <a:effectRef idx="0">
+              <a:schemeClr val="accent1"/>
+            </a:effectRef>
+            <a:fontRef idx="minor">
+              <a:schemeClr val="lt1"/>
+            </a:fontRef>
+          </p:style>
+          <p:txBody>
+            <a:bodyPr rtlCol="0" anchor="ctr"/>
+            <a:lstStyle/>
+            <a:p>
+              <a:pPr algn="ctr"/>
+              <a:endParaRPr lang="ko-KR" altLang="en-US" sz="1013"/>
+            </a:p>
+          </p:txBody>
+        </p:sp>
+        <p:sp>
+          <p:nvSpPr>
+            <p:cNvPr id="180" name="곱하기 기호 179">
+              <a:extLst>
+                <a:ext uri="{FF2B5EF4-FFF2-40B4-BE49-F238E27FC236}">
+                  <a16:creationId xmlns:a16="http://schemas.microsoft.com/office/drawing/2014/main" id="{CBA223F7-B232-1A2D-94D2-5E76EF447290}"/>
+                </a:ext>
+              </a:extLst>
+            </p:cNvPr>
+            <p:cNvSpPr/>
+            <p:nvPr/>
+          </p:nvSpPr>
+          <p:spPr>
+            <a:xfrm>
+              <a:off x="4567024" y="7440944"/>
+              <a:ext cx="178638" cy="368545"/>
+            </a:xfrm>
+            <a:prstGeom prst="mathMultiply">
+              <a:avLst/>
+            </a:prstGeom>
+            <a:solidFill>
+              <a:srgbClr val="FF0000"/>
+            </a:solidFill>
+            <a:ln w="9525"/>
+          </p:spPr>
+          <p:style>
+            <a:lnRef idx="2">
+              <a:schemeClr val="accent1">
+                <a:shade val="15000"/>
+              </a:schemeClr>
+            </a:lnRef>
+            <a:fillRef idx="1">
+              <a:schemeClr val="accent1"/>
+            </a:fillRef>
+            <a:effectRef idx="0">
+              <a:schemeClr val="accent1"/>
+            </a:effectRef>
+            <a:fontRef idx="minor">
+              <a:schemeClr val="lt1"/>
+            </a:fontRef>
+          </p:style>
+          <p:txBody>
+            <a:bodyPr rtlCol="0" anchor="ctr"/>
+            <a:lstStyle/>
+            <a:p>
+              <a:pPr algn="ctr"/>
+              <a:endParaRPr lang="ko-KR" altLang="en-US"/>
+            </a:p>
+          </p:txBody>
+        </p:sp>
+        <p:pic>
+          <p:nvPicPr>
+            <p:cNvPr id="181" name="그림 180">
+              <a:extLst>
+                <a:ext uri="{FF2B5EF4-FFF2-40B4-BE49-F238E27FC236}">
+                  <a16:creationId xmlns:a16="http://schemas.microsoft.com/office/drawing/2014/main" id="{307CCB46-3ABB-127A-FAAF-8A3D9D4983C0}"/>
+                </a:ext>
+              </a:extLst>
+            </p:cNvPr>
+            <p:cNvPicPr>
+              <a:picLocks noChangeAspect="1"/>
+            </p:cNvPicPr>
+            <p:nvPr/>
+          </p:nvPicPr>
+          <p:blipFill>
+            <a:blip r:embed="rId4">
+              <a:alphaModFix amt="50000"/>
+            </a:blip>
+            <a:srcRect l="1" t="4762" r="-1" b="-1"/>
+            <a:stretch/>
+          </p:blipFill>
+          <p:spPr>
+            <a:xfrm>
+              <a:off x="4883892" y="7608658"/>
+              <a:ext cx="155343" cy="208866"/>
+            </a:xfrm>
+            <a:prstGeom prst="rect">
+              <a:avLst/>
+            </a:prstGeom>
+          </p:spPr>
+        </p:pic>
+      </p:grpSp>
       <p:sp>
         <p:nvSpPr>
-          <p:cNvPr id="3" name="TextBox 2">
+          <p:cNvPr id="209" name="TextBox 208">
             <a:extLst>
               <a:ext uri="{FF2B5EF4-FFF2-40B4-BE49-F238E27FC236}">
-                <a16:creationId xmlns:a16="http://schemas.microsoft.com/office/drawing/2014/main" id="{219885E9-F250-1C01-6F74-391F1674527A}"/>
+                <a16:creationId xmlns:a16="http://schemas.microsoft.com/office/drawing/2014/main" id="{5EDE3C4A-CC2B-49A2-258D-B74433D57C7D}"/>
               </a:ext>
             </a:extLst>
           </p:cNvPr>
@@ -11310,8 +15871,8 @@
         </p:nvSpPr>
         <p:spPr>
           <a:xfrm>
-            <a:off x="0" y="0"/>
-            <a:ext cx="580103" cy="276999"/>
+            <a:off x="827018" y="4028894"/>
+            <a:ext cx="5570875" cy="1323439"/>
           </a:xfrm>
           <a:prstGeom prst="rect">
             <a:avLst/>
@@ -11325,7 +15886,7 @@
           <a:lstStyle/>
           <a:p>
             <a:r>
-              <a:rPr lang="en-US" altLang="ko-KR" sz="1200" dirty="0">
+              <a:rPr lang="ko-KR" altLang="en-US" sz="2000" dirty="0">
                 <a:ln w="9525">
                   <a:solidFill>
                     <a:schemeClr val="tx1">
@@ -11337,9 +15898,2248 @@
                 <a:ea typeface="맑은 고딕"/>
                 <a:cs typeface="Times New Roman"/>
               </a:rPr>
-              <a:t>(TED) </a:t>
-            </a:r>
-            <a:endParaRPr lang="ko-KR" altLang="en-US" sz="1200" dirty="0">
+              <a:t>선행연구</a:t>
+            </a:r>
+            <a:r>
+              <a:rPr lang="en-US" altLang="ko-KR" sz="2000" dirty="0">
+                <a:ln w="9525">
+                  <a:solidFill>
+                    <a:schemeClr val="tx1">
+                      <a:alpha val="29000"/>
+                    </a:schemeClr>
+                  </a:solidFill>
+                </a:ln>
+                <a:latin typeface="Times New Roman"/>
+                <a:ea typeface="맑은 고딕"/>
+                <a:cs typeface="Times New Roman"/>
+              </a:rPr>
+              <a:t>[</a:t>
+            </a:r>
+            <a:r>
+              <a:rPr lang="ko-KR" altLang="en-US" sz="2000" dirty="0">
+                <a:ln w="9525">
+                  <a:solidFill>
+                    <a:schemeClr val="tx1">
+                      <a:alpha val="29000"/>
+                    </a:schemeClr>
+                  </a:solidFill>
+                </a:ln>
+                <a:latin typeface="Times New Roman"/>
+                <a:ea typeface="맑은 고딕"/>
+                <a:cs typeface="Times New Roman"/>
+              </a:rPr>
+              <a:t>조형준 </a:t>
+            </a:r>
+            <a:r>
+              <a:rPr lang="en-US" altLang="ko-KR" sz="2000" dirty="0">
+                <a:ln w="9525">
+                  <a:solidFill>
+                    <a:schemeClr val="tx1">
+                      <a:alpha val="29000"/>
+                    </a:schemeClr>
+                  </a:solidFill>
+                </a:ln>
+                <a:latin typeface="Times New Roman"/>
+                <a:ea typeface="맑은 고딕"/>
+                <a:cs typeface="Times New Roman"/>
+              </a:rPr>
+              <a:t>TTT trap </a:t>
+            </a:r>
+            <a:r>
+              <a:rPr lang="ko-KR" altLang="en-US" sz="2000" dirty="0">
+                <a:ln w="9525">
+                  <a:solidFill>
+                    <a:schemeClr val="tx1">
+                      <a:alpha val="29000"/>
+                    </a:schemeClr>
+                  </a:solidFill>
+                </a:ln>
+                <a:latin typeface="Times New Roman"/>
+                <a:ea typeface="맑은 고딕"/>
+                <a:cs typeface="Times New Roman"/>
+              </a:rPr>
+              <a:t>측정</a:t>
+            </a:r>
+            <a:r>
+              <a:rPr lang="en-US" altLang="ko-KR" sz="2000" dirty="0">
+                <a:ln w="9525">
+                  <a:solidFill>
+                    <a:schemeClr val="tx1">
+                      <a:alpha val="29000"/>
+                    </a:schemeClr>
+                  </a:solidFill>
+                </a:ln>
+                <a:latin typeface="Times New Roman"/>
+                <a:ea typeface="맑은 고딕"/>
+                <a:cs typeface="Times New Roman"/>
+              </a:rPr>
+              <a:t>]</a:t>
+            </a:r>
+            <a:r>
+              <a:rPr lang="ko-KR" altLang="en-US" sz="2000" dirty="0">
+                <a:ln w="9525">
+                  <a:solidFill>
+                    <a:schemeClr val="tx1">
+                      <a:alpha val="29000"/>
+                    </a:schemeClr>
+                  </a:solidFill>
+                </a:ln>
+                <a:latin typeface="Times New Roman"/>
+                <a:ea typeface="맑은 고딕"/>
+                <a:cs typeface="Times New Roman"/>
+              </a:rPr>
+              <a:t>를 기반으로</a:t>
+            </a:r>
+            <a:r>
+              <a:rPr lang="en-US" altLang="ko-KR" sz="2000" dirty="0">
+                <a:ln w="9525">
+                  <a:solidFill>
+                    <a:schemeClr val="tx1">
+                      <a:alpha val="29000"/>
+                    </a:schemeClr>
+                  </a:solidFill>
+                </a:ln>
+                <a:latin typeface="Times New Roman"/>
+                <a:ea typeface="맑은 고딕"/>
+                <a:cs typeface="Times New Roman"/>
+              </a:rPr>
+              <a:t> </a:t>
+            </a:r>
+            <a:r>
+              <a:rPr lang="ko-KR" altLang="en-US" sz="2000" dirty="0">
+                <a:ln w="9525">
+                  <a:solidFill>
+                    <a:schemeClr val="tx1">
+                      <a:alpha val="29000"/>
+                    </a:schemeClr>
+                  </a:solidFill>
+                </a:ln>
+                <a:latin typeface="Times New Roman"/>
+                <a:ea typeface="맑은 고딕"/>
+                <a:cs typeface="Times New Roman"/>
+              </a:rPr>
+              <a:t>보았을 때</a:t>
+            </a:r>
+            <a:r>
+              <a:rPr lang="en-US" altLang="ko-KR" sz="2000" dirty="0">
+                <a:ln w="9525">
+                  <a:solidFill>
+                    <a:schemeClr val="tx1">
+                      <a:alpha val="29000"/>
+                    </a:schemeClr>
+                  </a:solidFill>
+                </a:ln>
+                <a:latin typeface="Times New Roman"/>
+                <a:ea typeface="맑은 고딕"/>
+                <a:cs typeface="Times New Roman"/>
+              </a:rPr>
+              <a:t>, BETOX</a:t>
+            </a:r>
+            <a:r>
+              <a:rPr lang="ko-KR" altLang="en-US" sz="2000" dirty="0">
+                <a:ln w="9525">
+                  <a:solidFill>
+                    <a:schemeClr val="tx1">
+                      <a:alpha val="29000"/>
+                    </a:schemeClr>
+                  </a:solidFill>
+                </a:ln>
+                <a:latin typeface="Times New Roman"/>
+                <a:ea typeface="맑은 고딕"/>
+                <a:cs typeface="Times New Roman"/>
+              </a:rPr>
+              <a:t>내의 </a:t>
+            </a:r>
+            <a:r>
+              <a:rPr lang="en-US" altLang="ko-KR" sz="2000" dirty="0">
+                <a:ln w="9525">
+                  <a:solidFill>
+                    <a:schemeClr val="tx1">
+                      <a:alpha val="29000"/>
+                    </a:schemeClr>
+                  </a:solidFill>
+                </a:ln>
+                <a:latin typeface="Times New Roman"/>
+                <a:ea typeface="맑은 고딕"/>
+                <a:cs typeface="Times New Roman"/>
+              </a:rPr>
+              <a:t>trap profile </a:t>
+            </a:r>
+            <a:r>
+              <a:rPr lang="ko-KR" altLang="en-US" sz="2000" dirty="0">
+                <a:ln w="9525">
+                  <a:solidFill>
+                    <a:schemeClr val="tx1">
+                      <a:alpha val="29000"/>
+                    </a:schemeClr>
+                  </a:solidFill>
+                </a:ln>
+                <a:latin typeface="Times New Roman"/>
+                <a:ea typeface="맑은 고딕"/>
+                <a:cs typeface="Times New Roman"/>
+              </a:rPr>
+              <a:t>측정자료에 의하면 </a:t>
+            </a:r>
+            <a:r>
+              <a:rPr lang="en-US" altLang="ko-KR" sz="2000" dirty="0" err="1">
+                <a:ln w="9525">
+                  <a:solidFill>
+                    <a:schemeClr val="tx1">
+                      <a:alpha val="29000"/>
+                    </a:schemeClr>
+                  </a:solidFill>
+                </a:ln>
+                <a:latin typeface="Times New Roman"/>
+                <a:ea typeface="맑은 고딕"/>
+                <a:cs typeface="Times New Roman"/>
+              </a:rPr>
+              <a:t>detrapping</a:t>
+            </a:r>
+            <a:r>
+              <a:rPr lang="ko-KR" altLang="en-US" sz="2000" dirty="0">
+                <a:ln w="9525">
+                  <a:solidFill>
+                    <a:schemeClr val="tx1">
+                      <a:alpha val="29000"/>
+                    </a:schemeClr>
+                  </a:solidFill>
+                </a:ln>
+                <a:latin typeface="Times New Roman"/>
+                <a:ea typeface="맑은 고딕"/>
+                <a:cs typeface="Times New Roman"/>
+              </a:rPr>
+              <a:t>의 주요 </a:t>
+            </a:r>
+            <a:r>
+              <a:rPr lang="en-US" altLang="ko-KR" sz="2000" dirty="0">
+                <a:ln w="9525">
+                  <a:solidFill>
+                    <a:schemeClr val="tx1">
+                      <a:alpha val="29000"/>
+                    </a:schemeClr>
+                  </a:solidFill>
+                </a:ln>
+                <a:latin typeface="Times New Roman"/>
+                <a:ea typeface="맑은 고딕"/>
+                <a:cs typeface="Times New Roman"/>
+              </a:rPr>
+              <a:t>mechanism</a:t>
+            </a:r>
+            <a:r>
+              <a:rPr lang="ko-KR" altLang="en-US" sz="2000" dirty="0">
+                <a:ln w="9525">
+                  <a:solidFill>
+                    <a:schemeClr val="tx1">
+                      <a:alpha val="29000"/>
+                    </a:schemeClr>
+                  </a:solidFill>
+                </a:ln>
+                <a:latin typeface="Times New Roman"/>
+                <a:ea typeface="맑은 고딕"/>
+                <a:cs typeface="Times New Roman"/>
+              </a:rPr>
+              <a:t>은 </a:t>
+            </a:r>
+            <a:r>
+              <a:rPr lang="en-US" altLang="ko-KR" sz="2000" dirty="0">
+                <a:ln w="9525">
+                  <a:solidFill>
+                    <a:schemeClr val="tx1">
+                      <a:alpha val="29000"/>
+                    </a:schemeClr>
+                  </a:solidFill>
+                </a:ln>
+                <a:latin typeface="Times New Roman"/>
+                <a:ea typeface="맑은 고딕"/>
+                <a:cs typeface="Times New Roman"/>
+              </a:rPr>
+              <a:t>trap-to-band tunneling</a:t>
+            </a:r>
+            <a:r>
+              <a:rPr lang="ko-KR" altLang="en-US" sz="2000" dirty="0">
+                <a:ln w="9525">
+                  <a:solidFill>
+                    <a:schemeClr val="tx1">
+                      <a:alpha val="29000"/>
+                    </a:schemeClr>
+                  </a:solidFill>
+                </a:ln>
+                <a:latin typeface="Times New Roman"/>
+                <a:ea typeface="맑은 고딕"/>
+                <a:cs typeface="Times New Roman"/>
+              </a:rPr>
+              <a:t>임</a:t>
+            </a:r>
+          </a:p>
+        </p:txBody>
+      </p:sp>
+      <p:grpSp>
+        <p:nvGrpSpPr>
+          <p:cNvPr id="6" name="그룹 5">
+            <a:extLst>
+              <a:ext uri="{FF2B5EF4-FFF2-40B4-BE49-F238E27FC236}">
+                <a16:creationId xmlns:a16="http://schemas.microsoft.com/office/drawing/2014/main" id="{29EFAC80-0F22-C8E0-9FBF-FA3954430E3E}"/>
+              </a:ext>
+            </a:extLst>
+          </p:cNvPr>
+          <p:cNvGrpSpPr/>
+          <p:nvPr/>
+        </p:nvGrpSpPr>
+        <p:grpSpPr>
+          <a:xfrm>
+            <a:off x="890676" y="1107714"/>
+            <a:ext cx="1801255" cy="1749841"/>
+            <a:chOff x="1425895" y="5488309"/>
+            <a:chExt cx="1801255" cy="1749841"/>
+          </a:xfrm>
+        </p:grpSpPr>
+        <p:sp>
+          <p:nvSpPr>
+            <p:cNvPr id="7" name="TextBox 6">
+              <a:extLst>
+                <a:ext uri="{FF2B5EF4-FFF2-40B4-BE49-F238E27FC236}">
+                  <a16:creationId xmlns:a16="http://schemas.microsoft.com/office/drawing/2014/main" id="{FC049283-9338-CD6C-AEC7-D734628B2046}"/>
+                </a:ext>
+              </a:extLst>
+            </p:cNvPr>
+            <p:cNvSpPr txBox="1"/>
+            <p:nvPr/>
+          </p:nvSpPr>
+          <p:spPr>
+            <a:xfrm>
+              <a:off x="2573623" y="6804516"/>
+              <a:ext cx="402808" cy="215444"/>
+            </a:xfrm>
+            <a:prstGeom prst="rect">
+              <a:avLst/>
+            </a:prstGeom>
+            <a:noFill/>
+          </p:spPr>
+          <p:txBody>
+            <a:bodyPr wrap="square" rtlCol="0">
+              <a:spAutoFit/>
+            </a:bodyPr>
+            <a:lstStyle/>
+            <a:p>
+              <a:pPr algn="ctr"/>
+              <a:r>
+                <a:rPr lang="en-US" altLang="ko-KR" sz="800"/>
+                <a:t>n1</a:t>
+              </a:r>
+              <a:endParaRPr lang="ko-KR" altLang="en-US" sz="800"/>
+            </a:p>
+          </p:txBody>
+        </p:sp>
+        <p:sp>
+          <p:nvSpPr>
+            <p:cNvPr id="8" name="자유형: 도형 7">
+              <a:extLst>
+                <a:ext uri="{FF2B5EF4-FFF2-40B4-BE49-F238E27FC236}">
+                  <a16:creationId xmlns:a16="http://schemas.microsoft.com/office/drawing/2014/main" id="{86E0833D-D55B-9CD4-07AD-1E11DCDE3157}"/>
+                </a:ext>
+              </a:extLst>
+            </p:cNvPr>
+            <p:cNvSpPr/>
+            <p:nvPr/>
+          </p:nvSpPr>
+          <p:spPr>
+            <a:xfrm>
+              <a:off x="1692868" y="5930050"/>
+              <a:ext cx="1168400" cy="1308100"/>
+            </a:xfrm>
+            <a:custGeom>
+              <a:avLst/>
+              <a:gdLst>
+                <a:gd name="connsiteX0" fmla="*/ 0 w 1168400"/>
+                <a:gd name="connsiteY0" fmla="*/ 482600 h 1308100"/>
+                <a:gd name="connsiteX1" fmla="*/ 292100 w 1168400"/>
+                <a:gd name="connsiteY1" fmla="*/ 482600 h 1308100"/>
+                <a:gd name="connsiteX2" fmla="*/ 374650 w 1168400"/>
+                <a:gd name="connsiteY2" fmla="*/ 488950 h 1308100"/>
+                <a:gd name="connsiteX3" fmla="*/ 469900 w 1168400"/>
+                <a:gd name="connsiteY3" fmla="*/ 558800 h 1308100"/>
+                <a:gd name="connsiteX4" fmla="*/ 514350 w 1168400"/>
+                <a:gd name="connsiteY4" fmla="*/ 654050 h 1308100"/>
+                <a:gd name="connsiteX5" fmla="*/ 514350 w 1168400"/>
+                <a:gd name="connsiteY5" fmla="*/ 0 h 1308100"/>
+                <a:gd name="connsiteX6" fmla="*/ 908050 w 1168400"/>
+                <a:gd name="connsiteY6" fmla="*/ 825500 h 1308100"/>
+                <a:gd name="connsiteX7" fmla="*/ 908050 w 1168400"/>
+                <a:gd name="connsiteY7" fmla="*/ 1143000 h 1308100"/>
+                <a:gd name="connsiteX8" fmla="*/ 1168400 w 1168400"/>
+                <a:gd name="connsiteY8" fmla="*/ 1308100 h 1308100"/>
+              </a:gdLst>
+              <a:ahLst/>
+              <a:cxnLst>
+                <a:cxn ang="0">
+                  <a:pos x="connsiteX0" y="connsiteY0"/>
+                </a:cxn>
+                <a:cxn ang="0">
+                  <a:pos x="connsiteX1" y="connsiteY1"/>
+                </a:cxn>
+                <a:cxn ang="0">
+                  <a:pos x="connsiteX2" y="connsiteY2"/>
+                </a:cxn>
+                <a:cxn ang="0">
+                  <a:pos x="connsiteX3" y="connsiteY3"/>
+                </a:cxn>
+                <a:cxn ang="0">
+                  <a:pos x="connsiteX4" y="connsiteY4"/>
+                </a:cxn>
+                <a:cxn ang="0">
+                  <a:pos x="connsiteX5" y="connsiteY5"/>
+                </a:cxn>
+                <a:cxn ang="0">
+                  <a:pos x="connsiteX6" y="connsiteY6"/>
+                </a:cxn>
+                <a:cxn ang="0">
+                  <a:pos x="connsiteX7" y="connsiteY7"/>
+                </a:cxn>
+                <a:cxn ang="0">
+                  <a:pos x="connsiteX8" y="connsiteY8"/>
+                </a:cxn>
+              </a:cxnLst>
+              <a:rect l="l" t="t" r="r" b="b"/>
+              <a:pathLst>
+                <a:path w="1168400" h="1308100">
+                  <a:moveTo>
+                    <a:pt x="0" y="482600"/>
+                  </a:moveTo>
+                  <a:lnTo>
+                    <a:pt x="292100" y="482600"/>
+                  </a:lnTo>
+                  <a:lnTo>
+                    <a:pt x="374650" y="488950"/>
+                  </a:lnTo>
+                  <a:lnTo>
+                    <a:pt x="469900" y="558800"/>
+                  </a:lnTo>
+                  <a:lnTo>
+                    <a:pt x="514350" y="654050"/>
+                  </a:lnTo>
+                  <a:lnTo>
+                    <a:pt x="514350" y="0"/>
+                  </a:lnTo>
+                  <a:lnTo>
+                    <a:pt x="908050" y="825500"/>
+                  </a:lnTo>
+                  <a:lnTo>
+                    <a:pt x="908050" y="1143000"/>
+                  </a:lnTo>
+                  <a:lnTo>
+                    <a:pt x="1168400" y="1308100"/>
+                  </a:lnTo>
+                </a:path>
+              </a:pathLst>
+            </a:custGeom>
+            <a:noFill/>
+          </p:spPr>
+          <p:style>
+            <a:lnRef idx="2">
+              <a:schemeClr val="accent1">
+                <a:shade val="15000"/>
+              </a:schemeClr>
+            </a:lnRef>
+            <a:fillRef idx="1">
+              <a:schemeClr val="accent1"/>
+            </a:fillRef>
+            <a:effectRef idx="0">
+              <a:schemeClr val="accent1"/>
+            </a:effectRef>
+            <a:fontRef idx="minor">
+              <a:schemeClr val="lt1"/>
+            </a:fontRef>
+          </p:style>
+          <p:txBody>
+            <a:bodyPr rtlCol="0" anchor="ctr"/>
+            <a:lstStyle/>
+            <a:p>
+              <a:pPr algn="ctr"/>
+              <a:endParaRPr lang="ko-KR" altLang="en-US"/>
+            </a:p>
+          </p:txBody>
+        </p:sp>
+        <p:cxnSp>
+          <p:nvCxnSpPr>
+            <p:cNvPr id="9" name="직선 화살표 연결선 8">
+              <a:extLst>
+                <a:ext uri="{FF2B5EF4-FFF2-40B4-BE49-F238E27FC236}">
+                  <a16:creationId xmlns:a16="http://schemas.microsoft.com/office/drawing/2014/main" id="{6AA0B065-4873-01EB-4DB3-76E23F681695}"/>
+                </a:ext>
+              </a:extLst>
+            </p:cNvPr>
+            <p:cNvCxnSpPr>
+              <a:cxnSpLocks/>
+            </p:cNvCxnSpPr>
+            <p:nvPr/>
+          </p:nvCxnSpPr>
+          <p:spPr>
+            <a:xfrm>
+              <a:off x="2234157" y="6463303"/>
+              <a:ext cx="550930" cy="0"/>
+            </a:xfrm>
+            <a:prstGeom prst="straightConnector1">
+              <a:avLst/>
+            </a:prstGeom>
+            <a:ln w="28575">
+              <a:solidFill>
+                <a:srgbClr val="FF3505"/>
+              </a:solidFill>
+              <a:tailEnd type="triangle"/>
+            </a:ln>
+          </p:spPr>
+          <p:style>
+            <a:lnRef idx="1">
+              <a:schemeClr val="accent1"/>
+            </a:lnRef>
+            <a:fillRef idx="0">
+              <a:schemeClr val="accent1"/>
+            </a:fillRef>
+            <a:effectRef idx="0">
+              <a:schemeClr val="accent1"/>
+            </a:effectRef>
+            <a:fontRef idx="minor">
+              <a:schemeClr val="tx1"/>
+            </a:fontRef>
+          </p:style>
+        </p:cxnSp>
+        <p:cxnSp>
+          <p:nvCxnSpPr>
+            <p:cNvPr id="10" name="직선 연결선 9">
+              <a:extLst>
+                <a:ext uri="{FF2B5EF4-FFF2-40B4-BE49-F238E27FC236}">
+                  <a16:creationId xmlns:a16="http://schemas.microsoft.com/office/drawing/2014/main" id="{3F819483-4FA9-F9CF-3F7F-9B7CC7198C1F}"/>
+                </a:ext>
+              </a:extLst>
+            </p:cNvPr>
+            <p:cNvCxnSpPr>
+              <a:cxnSpLocks/>
+            </p:cNvCxnSpPr>
+            <p:nvPr/>
+          </p:nvCxnSpPr>
+          <p:spPr>
+            <a:xfrm flipH="1">
+              <a:off x="1891354" y="6437903"/>
+              <a:ext cx="412296" cy="0"/>
+            </a:xfrm>
+            <a:prstGeom prst="line">
+              <a:avLst/>
+            </a:prstGeom>
+            <a:ln>
+              <a:solidFill>
+                <a:schemeClr val="tx1"/>
+              </a:solidFill>
+              <a:prstDash val="dashDot"/>
+            </a:ln>
+          </p:spPr>
+          <p:style>
+            <a:lnRef idx="1">
+              <a:schemeClr val="accent1"/>
+            </a:lnRef>
+            <a:fillRef idx="0">
+              <a:schemeClr val="accent1"/>
+            </a:fillRef>
+            <a:effectRef idx="0">
+              <a:schemeClr val="accent1"/>
+            </a:effectRef>
+            <a:fontRef idx="minor">
+              <a:schemeClr val="tx1"/>
+            </a:fontRef>
+          </p:style>
+        </p:cxnSp>
+        <p:sp>
+          <p:nvSpPr>
+            <p:cNvPr id="11" name="TextBox 10">
+              <a:extLst>
+                <a:ext uri="{FF2B5EF4-FFF2-40B4-BE49-F238E27FC236}">
+                  <a16:creationId xmlns:a16="http://schemas.microsoft.com/office/drawing/2014/main" id="{632AE402-F62B-6336-8593-2FFDCA940A06}"/>
+                </a:ext>
+              </a:extLst>
+            </p:cNvPr>
+            <p:cNvSpPr txBox="1"/>
+            <p:nvPr/>
+          </p:nvSpPr>
+          <p:spPr>
+            <a:xfrm>
+              <a:off x="1527289" y="6189408"/>
+              <a:ext cx="697052" cy="215444"/>
+            </a:xfrm>
+            <a:prstGeom prst="rect">
+              <a:avLst/>
+            </a:prstGeom>
+            <a:noFill/>
+          </p:spPr>
+          <p:txBody>
+            <a:bodyPr wrap="square" rtlCol="0">
+              <a:spAutoFit/>
+            </a:bodyPr>
+            <a:lstStyle/>
+            <a:p>
+              <a:r>
+                <a:rPr lang="en-US" altLang="ko-KR" sz="800"/>
+                <a:t>Si-Channel</a:t>
+              </a:r>
+              <a:endParaRPr lang="ko-KR" altLang="en-US" sz="800"/>
+            </a:p>
+          </p:txBody>
+        </p:sp>
+        <p:sp>
+          <p:nvSpPr>
+            <p:cNvPr id="12" name="자유형: 도형 11">
+              <a:extLst>
+                <a:ext uri="{FF2B5EF4-FFF2-40B4-BE49-F238E27FC236}">
+                  <a16:creationId xmlns:a16="http://schemas.microsoft.com/office/drawing/2014/main" id="{C3A0B8FE-FAD4-8836-B9E8-C9B3C1BA4292}"/>
+                </a:ext>
+              </a:extLst>
+            </p:cNvPr>
+            <p:cNvSpPr/>
+            <p:nvPr/>
+          </p:nvSpPr>
+          <p:spPr>
+            <a:xfrm>
+              <a:off x="2118459" y="6438900"/>
+              <a:ext cx="78581" cy="123825"/>
+            </a:xfrm>
+            <a:custGeom>
+              <a:avLst/>
+              <a:gdLst>
+                <a:gd name="connsiteX0" fmla="*/ 0 w 78581"/>
+                <a:gd name="connsiteY0" fmla="*/ 4763 h 123825"/>
+                <a:gd name="connsiteX1" fmla="*/ 52388 w 78581"/>
+                <a:gd name="connsiteY1" fmla="*/ 45244 h 123825"/>
+                <a:gd name="connsiteX2" fmla="*/ 78581 w 78581"/>
+                <a:gd name="connsiteY2" fmla="*/ 123825 h 123825"/>
+                <a:gd name="connsiteX3" fmla="*/ 78581 w 78581"/>
+                <a:gd name="connsiteY3" fmla="*/ 0 h 123825"/>
+                <a:gd name="connsiteX4" fmla="*/ 0 w 78581"/>
+                <a:gd name="connsiteY4" fmla="*/ 4763 h 123825"/>
+              </a:gdLst>
+              <a:ahLst/>
+              <a:cxnLst>
+                <a:cxn ang="0">
+                  <a:pos x="connsiteX0" y="connsiteY0"/>
+                </a:cxn>
+                <a:cxn ang="0">
+                  <a:pos x="connsiteX1" y="connsiteY1"/>
+                </a:cxn>
+                <a:cxn ang="0">
+                  <a:pos x="connsiteX2" y="connsiteY2"/>
+                </a:cxn>
+                <a:cxn ang="0">
+                  <a:pos x="connsiteX3" y="connsiteY3"/>
+                </a:cxn>
+                <a:cxn ang="0">
+                  <a:pos x="connsiteX4" y="connsiteY4"/>
+                </a:cxn>
+              </a:cxnLst>
+              <a:rect l="l" t="t" r="r" b="b"/>
+              <a:pathLst>
+                <a:path w="78581" h="123825">
+                  <a:moveTo>
+                    <a:pt x="0" y="4763"/>
+                  </a:moveTo>
+                  <a:lnTo>
+                    <a:pt x="52388" y="45244"/>
+                  </a:lnTo>
+                  <a:lnTo>
+                    <a:pt x="78581" y="123825"/>
+                  </a:lnTo>
+                  <a:lnTo>
+                    <a:pt x="78581" y="0"/>
+                  </a:lnTo>
+                  <a:lnTo>
+                    <a:pt x="0" y="4763"/>
+                  </a:lnTo>
+                  <a:close/>
+                </a:path>
+              </a:pathLst>
+            </a:custGeom>
+            <a:solidFill>
+              <a:srgbClr val="FF2900"/>
+            </a:solidFill>
+            <a:ln>
+              <a:noFill/>
+            </a:ln>
+          </p:spPr>
+          <p:style>
+            <a:lnRef idx="2">
+              <a:schemeClr val="accent1">
+                <a:shade val="15000"/>
+              </a:schemeClr>
+            </a:lnRef>
+            <a:fillRef idx="1">
+              <a:schemeClr val="accent1"/>
+            </a:fillRef>
+            <a:effectRef idx="0">
+              <a:schemeClr val="accent1"/>
+            </a:effectRef>
+            <a:fontRef idx="minor">
+              <a:schemeClr val="lt1"/>
+            </a:fontRef>
+          </p:style>
+          <p:txBody>
+            <a:bodyPr rtlCol="0" anchor="ctr"/>
+            <a:lstStyle/>
+            <a:p>
+              <a:pPr algn="ctr"/>
+              <a:endParaRPr lang="ko-KR" altLang="en-US"/>
+            </a:p>
+          </p:txBody>
+        </p:sp>
+        <p:sp>
+          <p:nvSpPr>
+            <p:cNvPr id="13" name="TextBox 12">
+              <a:extLst>
+                <a:ext uri="{FF2B5EF4-FFF2-40B4-BE49-F238E27FC236}">
+                  <a16:creationId xmlns:a16="http://schemas.microsoft.com/office/drawing/2014/main" id="{FAB604A2-96F9-A17E-1BE2-E410E7D51089}"/>
+                </a:ext>
+              </a:extLst>
+            </p:cNvPr>
+            <p:cNvSpPr txBox="1"/>
+            <p:nvPr/>
+          </p:nvSpPr>
+          <p:spPr>
+            <a:xfrm>
+              <a:off x="2251906" y="5832380"/>
+              <a:ext cx="607806" cy="215444"/>
+            </a:xfrm>
+            <a:prstGeom prst="rect">
+              <a:avLst/>
+            </a:prstGeom>
+            <a:noFill/>
+          </p:spPr>
+          <p:txBody>
+            <a:bodyPr wrap="square" rtlCol="0">
+              <a:spAutoFit/>
+            </a:bodyPr>
+            <a:lstStyle/>
+            <a:p>
+              <a:pPr algn="ctr"/>
+              <a:r>
+                <a:rPr lang="en-US" altLang="ko-KR" sz="800"/>
+                <a:t>BETOX</a:t>
+              </a:r>
+              <a:endParaRPr lang="ko-KR" altLang="en-US" sz="800"/>
+            </a:p>
+          </p:txBody>
+        </p:sp>
+        <p:sp>
+          <p:nvSpPr>
+            <p:cNvPr id="14" name="TextBox 13">
+              <a:extLst>
+                <a:ext uri="{FF2B5EF4-FFF2-40B4-BE49-F238E27FC236}">
+                  <a16:creationId xmlns:a16="http://schemas.microsoft.com/office/drawing/2014/main" id="{5739C714-1434-DE0B-737C-B0328C917A24}"/>
+                </a:ext>
+              </a:extLst>
+            </p:cNvPr>
+            <p:cNvSpPr txBox="1"/>
+            <p:nvPr/>
+          </p:nvSpPr>
+          <p:spPr>
+            <a:xfrm>
+              <a:off x="2287746" y="6062283"/>
+              <a:ext cx="402808" cy="215444"/>
+            </a:xfrm>
+            <a:prstGeom prst="rect">
+              <a:avLst/>
+            </a:prstGeom>
+            <a:noFill/>
+          </p:spPr>
+          <p:txBody>
+            <a:bodyPr wrap="square" rtlCol="0">
+              <a:spAutoFit/>
+            </a:bodyPr>
+            <a:lstStyle/>
+            <a:p>
+              <a:pPr algn="ctr"/>
+              <a:r>
+                <a:rPr lang="en-US" altLang="ko-KR" sz="800"/>
+                <a:t>o1</a:t>
+              </a:r>
+              <a:endParaRPr lang="ko-KR" altLang="en-US" sz="800"/>
+            </a:p>
+          </p:txBody>
+        </p:sp>
+        <p:sp>
+          <p:nvSpPr>
+            <p:cNvPr id="15" name="TextBox 14">
+              <a:extLst>
+                <a:ext uri="{FF2B5EF4-FFF2-40B4-BE49-F238E27FC236}">
+                  <a16:creationId xmlns:a16="http://schemas.microsoft.com/office/drawing/2014/main" id="{8D80AB2B-6B31-3322-218B-2D3E770082B4}"/>
+                </a:ext>
+              </a:extLst>
+            </p:cNvPr>
+            <p:cNvSpPr txBox="1"/>
+            <p:nvPr/>
+          </p:nvSpPr>
+          <p:spPr>
+            <a:xfrm>
+              <a:off x="1695639" y="6384928"/>
+              <a:ext cx="439071" cy="261610"/>
+            </a:xfrm>
+            <a:prstGeom prst="rect">
+              <a:avLst/>
+            </a:prstGeom>
+            <a:noFill/>
+          </p:spPr>
+          <p:txBody>
+            <a:bodyPr wrap="square" rtlCol="0">
+              <a:spAutoFit/>
+            </a:bodyPr>
+            <a:lstStyle/>
+            <a:p>
+              <a:pPr algn="ctr"/>
+              <a:r>
+                <a:rPr lang="en-US" altLang="ko-KR" sz="1100" b="1">
+                  <a:latin typeface="Times New Roman" panose="02020603050405020304" pitchFamily="18" charset="0"/>
+                  <a:cs typeface="Times New Roman" panose="02020603050405020304" pitchFamily="18" charset="0"/>
+                </a:rPr>
+                <a:t>E</a:t>
+              </a:r>
+              <a:r>
+                <a:rPr lang="en-US" altLang="ko-KR" sz="1100" b="1" baseline="-25000">
+                  <a:latin typeface="Times New Roman" panose="02020603050405020304" pitchFamily="18" charset="0"/>
+                  <a:cs typeface="Times New Roman" panose="02020603050405020304" pitchFamily="18" charset="0"/>
+                </a:rPr>
+                <a:t>F</a:t>
+              </a:r>
+              <a:endParaRPr lang="ko-KR" altLang="en-US" sz="1100" b="1" baseline="-25000">
+                <a:latin typeface="Times New Roman" panose="02020603050405020304" pitchFamily="18" charset="0"/>
+                <a:cs typeface="Times New Roman" panose="02020603050405020304" pitchFamily="18" charset="0"/>
+              </a:endParaRPr>
+            </a:p>
+          </p:txBody>
+        </p:sp>
+        <p:sp>
+          <p:nvSpPr>
+            <p:cNvPr id="16" name="TextBox 15">
+              <a:extLst>
+                <a:ext uri="{FF2B5EF4-FFF2-40B4-BE49-F238E27FC236}">
+                  <a16:creationId xmlns:a16="http://schemas.microsoft.com/office/drawing/2014/main" id="{97D6F820-CBE3-E6F1-5ADE-5B2ADC88ABD8}"/>
+                </a:ext>
+              </a:extLst>
+            </p:cNvPr>
+            <p:cNvSpPr txBox="1"/>
+            <p:nvPr/>
+          </p:nvSpPr>
+          <p:spPr>
+            <a:xfrm>
+              <a:off x="1425895" y="5488309"/>
+              <a:ext cx="1671588" cy="261610"/>
+            </a:xfrm>
+            <a:prstGeom prst="rect">
+              <a:avLst/>
+            </a:prstGeom>
+            <a:noFill/>
+          </p:spPr>
+          <p:txBody>
+            <a:bodyPr wrap="square" rtlCol="0">
+              <a:spAutoFit/>
+            </a:bodyPr>
+            <a:lstStyle/>
+            <a:p>
+              <a:r>
+                <a:rPr lang="en-US" altLang="ko-KR" sz="1100" b="1">
+                  <a:latin typeface="Times New Roman" panose="02020603050405020304" pitchFamily="18" charset="0"/>
+                  <a:cs typeface="Times New Roman" panose="02020603050405020304" pitchFamily="18" charset="0"/>
+                </a:rPr>
+                <a:t>Program </a:t>
+              </a:r>
+              <a:r>
+                <a:rPr lang="en-US" altLang="ko-KR" sz="800">
+                  <a:latin typeface="Times New Roman" panose="02020603050405020304" pitchFamily="18" charset="0"/>
+                  <a:cs typeface="Times New Roman" panose="02020603050405020304" pitchFamily="18" charset="0"/>
+                </a:rPr>
+                <a:t>(V</a:t>
+              </a:r>
+              <a:r>
+                <a:rPr lang="en-US" altLang="ko-KR" sz="800" baseline="-25000">
+                  <a:latin typeface="Times New Roman" panose="02020603050405020304" pitchFamily="18" charset="0"/>
+                  <a:cs typeface="Times New Roman" panose="02020603050405020304" pitchFamily="18" charset="0"/>
+                </a:rPr>
+                <a:t>G</a:t>
+              </a:r>
+              <a:r>
+                <a:rPr lang="en-US" altLang="ko-KR" sz="800">
+                  <a:latin typeface="Times New Roman" panose="02020603050405020304" pitchFamily="18" charset="0"/>
+                  <a:cs typeface="Times New Roman" panose="02020603050405020304" pitchFamily="18" charset="0"/>
+                </a:rPr>
+                <a:t> = </a:t>
+              </a:r>
+              <a:r>
+                <a:rPr lang="en-US" altLang="ko-KR" sz="800" err="1">
+                  <a:latin typeface="Times New Roman" panose="02020603050405020304" pitchFamily="18" charset="0"/>
+                  <a:cs typeface="Times New Roman" panose="02020603050405020304" pitchFamily="18" charset="0"/>
+                </a:rPr>
+                <a:t>V</a:t>
+              </a:r>
+              <a:r>
+                <a:rPr lang="en-US" altLang="ko-KR" sz="800" baseline="-25000" err="1">
+                  <a:latin typeface="Times New Roman" panose="02020603050405020304" pitchFamily="18" charset="0"/>
+                  <a:cs typeface="Times New Roman" panose="02020603050405020304" pitchFamily="18" charset="0"/>
+                </a:rPr>
+                <a:t>pgm</a:t>
+              </a:r>
+              <a:r>
+                <a:rPr lang="en-US" altLang="ko-KR" sz="800">
+                  <a:latin typeface="Times New Roman" panose="02020603050405020304" pitchFamily="18" charset="0"/>
+                  <a:cs typeface="Times New Roman" panose="02020603050405020304" pitchFamily="18" charset="0"/>
+                </a:rPr>
+                <a:t>, </a:t>
+              </a:r>
+              <a:r>
+                <a:rPr lang="en-US" altLang="ko-KR" sz="800" err="1">
+                  <a:latin typeface="Times New Roman" panose="02020603050405020304" pitchFamily="18" charset="0"/>
+                  <a:cs typeface="Times New Roman" panose="02020603050405020304" pitchFamily="18" charset="0"/>
+                </a:rPr>
+                <a:t>V</a:t>
+              </a:r>
+              <a:r>
+                <a:rPr lang="en-US" altLang="ko-KR" sz="800" baseline="-25000" err="1">
+                  <a:latin typeface="Times New Roman" panose="02020603050405020304" pitchFamily="18" charset="0"/>
+                  <a:cs typeface="Times New Roman" panose="02020603050405020304" pitchFamily="18" charset="0"/>
+                </a:rPr>
+                <a:t>ch</a:t>
+              </a:r>
+              <a:r>
+                <a:rPr lang="en-US" altLang="ko-KR" sz="800">
+                  <a:latin typeface="Times New Roman" panose="02020603050405020304" pitchFamily="18" charset="0"/>
+                  <a:cs typeface="Times New Roman" panose="02020603050405020304" pitchFamily="18" charset="0"/>
+                </a:rPr>
+                <a:t> = 0 V)</a:t>
+              </a:r>
+              <a:endParaRPr lang="en-US" altLang="ko-KR" sz="1100">
+                <a:latin typeface="Times New Roman" panose="02020603050405020304" pitchFamily="18" charset="0"/>
+                <a:cs typeface="Times New Roman" panose="02020603050405020304" pitchFamily="18" charset="0"/>
+              </a:endParaRPr>
+            </a:p>
+          </p:txBody>
+        </p:sp>
+        <p:sp>
+          <p:nvSpPr>
+            <p:cNvPr id="17" name="TextBox 16">
+              <a:extLst>
+                <a:ext uri="{FF2B5EF4-FFF2-40B4-BE49-F238E27FC236}">
+                  <a16:creationId xmlns:a16="http://schemas.microsoft.com/office/drawing/2014/main" id="{D5B2441F-6E84-C899-8B50-DB8AC9ECB258}"/>
+                </a:ext>
+              </a:extLst>
+            </p:cNvPr>
+            <p:cNvSpPr txBox="1"/>
+            <p:nvPr/>
+          </p:nvSpPr>
+          <p:spPr>
+            <a:xfrm>
+              <a:off x="2737512" y="6308421"/>
+              <a:ext cx="489638" cy="261610"/>
+            </a:xfrm>
+            <a:prstGeom prst="rect">
+              <a:avLst/>
+            </a:prstGeom>
+            <a:noFill/>
+          </p:spPr>
+          <p:txBody>
+            <a:bodyPr wrap="square" rtlCol="0">
+              <a:spAutoFit/>
+            </a:bodyPr>
+            <a:lstStyle/>
+            <a:p>
+              <a:r>
+                <a:rPr lang="en-US" altLang="ko-KR" sz="1100">
+                  <a:latin typeface="Times New Roman" panose="02020603050405020304" pitchFamily="18" charset="0"/>
+                  <a:cs typeface="Times New Roman" panose="02020603050405020304" pitchFamily="18" charset="0"/>
+                </a:rPr>
+                <a:t>J</a:t>
+              </a:r>
+              <a:r>
+                <a:rPr lang="en-US" altLang="ko-KR" sz="1100" baseline="-25000">
+                  <a:latin typeface="Times New Roman" panose="02020603050405020304" pitchFamily="18" charset="0"/>
+                  <a:cs typeface="Times New Roman" panose="02020603050405020304" pitchFamily="18" charset="0"/>
+                </a:rPr>
+                <a:t>FN</a:t>
+              </a:r>
+              <a:endParaRPr lang="ko-KR" altLang="en-US" sz="1100" baseline="-25000">
+                <a:latin typeface="Times New Roman" panose="02020603050405020304" pitchFamily="18" charset="0"/>
+                <a:cs typeface="Times New Roman" panose="02020603050405020304" pitchFamily="18" charset="0"/>
+              </a:endParaRPr>
+            </a:p>
+          </p:txBody>
+        </p:sp>
+      </p:grpSp>
+      <p:grpSp>
+        <p:nvGrpSpPr>
+          <p:cNvPr id="20" name="그룹 19">
+            <a:extLst>
+              <a:ext uri="{FF2B5EF4-FFF2-40B4-BE49-F238E27FC236}">
+                <a16:creationId xmlns:a16="http://schemas.microsoft.com/office/drawing/2014/main" id="{57A49C27-FE39-BC58-EA02-A9AB05B7DF6F}"/>
+              </a:ext>
+            </a:extLst>
+          </p:cNvPr>
+          <p:cNvGrpSpPr/>
+          <p:nvPr/>
+        </p:nvGrpSpPr>
+        <p:grpSpPr>
+          <a:xfrm>
+            <a:off x="2778489" y="1107583"/>
+            <a:ext cx="1749215" cy="1737272"/>
+            <a:chOff x="3313708" y="5488178"/>
+            <a:chExt cx="1749215" cy="1737272"/>
+          </a:xfrm>
+        </p:grpSpPr>
+        <p:sp>
+          <p:nvSpPr>
+            <p:cNvPr id="21" name="TextBox 20">
+              <a:extLst>
+                <a:ext uri="{FF2B5EF4-FFF2-40B4-BE49-F238E27FC236}">
+                  <a16:creationId xmlns:a16="http://schemas.microsoft.com/office/drawing/2014/main" id="{56382260-C3EB-5660-76BE-341891F4245D}"/>
+                </a:ext>
+              </a:extLst>
+            </p:cNvPr>
+            <p:cNvSpPr txBox="1"/>
+            <p:nvPr/>
+          </p:nvSpPr>
+          <p:spPr>
+            <a:xfrm>
+              <a:off x="3320094" y="7009381"/>
+              <a:ext cx="688143" cy="215444"/>
+            </a:xfrm>
+            <a:prstGeom prst="rect">
+              <a:avLst/>
+            </a:prstGeom>
+            <a:noFill/>
+          </p:spPr>
+          <p:txBody>
+            <a:bodyPr wrap="square" rtlCol="0">
+              <a:spAutoFit/>
+            </a:bodyPr>
+            <a:lstStyle/>
+            <a:p>
+              <a:pPr algn="r"/>
+              <a:r>
+                <a:rPr lang="en-US" altLang="ko-KR" sz="800"/>
+                <a:t>Si-Channel</a:t>
+              </a:r>
+              <a:endParaRPr lang="ko-KR" altLang="en-US" sz="800"/>
+            </a:p>
+          </p:txBody>
+        </p:sp>
+        <p:sp>
+          <p:nvSpPr>
+            <p:cNvPr id="22" name="자유형: 도형 21">
+              <a:extLst>
+                <a:ext uri="{FF2B5EF4-FFF2-40B4-BE49-F238E27FC236}">
+                  <a16:creationId xmlns:a16="http://schemas.microsoft.com/office/drawing/2014/main" id="{EA0C6900-6EE1-28C9-E3C3-28AE266FB7ED}"/>
+                </a:ext>
+              </a:extLst>
+            </p:cNvPr>
+            <p:cNvSpPr/>
+            <p:nvPr/>
+          </p:nvSpPr>
+          <p:spPr>
+            <a:xfrm>
+              <a:off x="3571815" y="5930050"/>
+              <a:ext cx="1041400" cy="1295400"/>
+            </a:xfrm>
+            <a:custGeom>
+              <a:avLst/>
+              <a:gdLst>
+                <a:gd name="connsiteX0" fmla="*/ 0 w 1041400"/>
+                <a:gd name="connsiteY0" fmla="*/ 1295400 h 1295400"/>
+                <a:gd name="connsiteX1" fmla="*/ 400050 w 1041400"/>
+                <a:gd name="connsiteY1" fmla="*/ 1295400 h 1295400"/>
+                <a:gd name="connsiteX2" fmla="*/ 400050 w 1041400"/>
+                <a:gd name="connsiteY2" fmla="*/ 368300 h 1295400"/>
+                <a:gd name="connsiteX3" fmla="*/ 749300 w 1041400"/>
+                <a:gd name="connsiteY3" fmla="*/ 0 h 1295400"/>
+                <a:gd name="connsiteX4" fmla="*/ 749300 w 1041400"/>
+                <a:gd name="connsiteY4" fmla="*/ 431800 h 1295400"/>
+                <a:gd name="connsiteX5" fmla="*/ 1041400 w 1041400"/>
+                <a:gd name="connsiteY5" fmla="*/ 254000 h 1295400"/>
+              </a:gdLst>
+              <a:ahLst/>
+              <a:cxnLst>
+                <a:cxn ang="0">
+                  <a:pos x="connsiteX0" y="connsiteY0"/>
+                </a:cxn>
+                <a:cxn ang="0">
+                  <a:pos x="connsiteX1" y="connsiteY1"/>
+                </a:cxn>
+                <a:cxn ang="0">
+                  <a:pos x="connsiteX2" y="connsiteY2"/>
+                </a:cxn>
+                <a:cxn ang="0">
+                  <a:pos x="connsiteX3" y="connsiteY3"/>
+                </a:cxn>
+                <a:cxn ang="0">
+                  <a:pos x="connsiteX4" y="connsiteY4"/>
+                </a:cxn>
+                <a:cxn ang="0">
+                  <a:pos x="connsiteX5" y="connsiteY5"/>
+                </a:cxn>
+              </a:cxnLst>
+              <a:rect l="l" t="t" r="r" b="b"/>
+              <a:pathLst>
+                <a:path w="1041400" h="1295400">
+                  <a:moveTo>
+                    <a:pt x="0" y="1295400"/>
+                  </a:moveTo>
+                  <a:lnTo>
+                    <a:pt x="400050" y="1295400"/>
+                  </a:lnTo>
+                  <a:lnTo>
+                    <a:pt x="400050" y="368300"/>
+                  </a:lnTo>
+                  <a:lnTo>
+                    <a:pt x="749300" y="0"/>
+                  </a:lnTo>
+                  <a:lnTo>
+                    <a:pt x="749300" y="431800"/>
+                  </a:lnTo>
+                  <a:lnTo>
+                    <a:pt x="1041400" y="254000"/>
+                  </a:lnTo>
+                </a:path>
+              </a:pathLst>
+            </a:custGeom>
+            <a:noFill/>
+          </p:spPr>
+          <p:style>
+            <a:lnRef idx="2">
+              <a:schemeClr val="accent1">
+                <a:shade val="15000"/>
+              </a:schemeClr>
+            </a:lnRef>
+            <a:fillRef idx="1">
+              <a:schemeClr val="accent1"/>
+            </a:fillRef>
+            <a:effectRef idx="0">
+              <a:schemeClr val="accent1"/>
+            </a:effectRef>
+            <a:fontRef idx="minor">
+              <a:schemeClr val="lt1"/>
+            </a:fontRef>
+          </p:style>
+          <p:txBody>
+            <a:bodyPr rtlCol="0" anchor="ctr"/>
+            <a:lstStyle/>
+            <a:p>
+              <a:pPr algn="ctr"/>
+              <a:endParaRPr lang="ko-KR" altLang="en-US"/>
+            </a:p>
+          </p:txBody>
+        </p:sp>
+        <p:cxnSp>
+          <p:nvCxnSpPr>
+            <p:cNvPr id="23" name="직선 연결선 22">
+              <a:extLst>
+                <a:ext uri="{FF2B5EF4-FFF2-40B4-BE49-F238E27FC236}">
+                  <a16:creationId xmlns:a16="http://schemas.microsoft.com/office/drawing/2014/main" id="{58AF1CF0-6BFA-1D01-009C-24DD380851F5}"/>
+                </a:ext>
+              </a:extLst>
+            </p:cNvPr>
+            <p:cNvCxnSpPr>
+              <a:cxnSpLocks/>
+            </p:cNvCxnSpPr>
+            <p:nvPr/>
+          </p:nvCxnSpPr>
+          <p:spPr>
+            <a:xfrm flipH="1">
+              <a:off x="4300760" y="6547727"/>
+              <a:ext cx="342900" cy="175022"/>
+            </a:xfrm>
+            <a:prstGeom prst="line">
+              <a:avLst/>
+            </a:prstGeom>
+            <a:ln>
+              <a:solidFill>
+                <a:srgbClr val="FF2900"/>
+              </a:solidFill>
+              <a:prstDash val="sysDot"/>
+            </a:ln>
+          </p:spPr>
+          <p:style>
+            <a:lnRef idx="1">
+              <a:schemeClr val="accent1"/>
+            </a:lnRef>
+            <a:fillRef idx="0">
+              <a:schemeClr val="accent1"/>
+            </a:fillRef>
+            <a:effectRef idx="0">
+              <a:schemeClr val="accent1"/>
+            </a:effectRef>
+            <a:fontRef idx="minor">
+              <a:schemeClr val="tx1"/>
+            </a:fontRef>
+          </p:style>
+        </p:cxnSp>
+        <p:cxnSp>
+          <p:nvCxnSpPr>
+            <p:cNvPr id="24" name="직선 화살표 연결선 23">
+              <a:extLst>
+                <a:ext uri="{FF2B5EF4-FFF2-40B4-BE49-F238E27FC236}">
+                  <a16:creationId xmlns:a16="http://schemas.microsoft.com/office/drawing/2014/main" id="{9CD70CB8-1286-D50C-B74E-ED7CCA5E7A75}"/>
+                </a:ext>
+              </a:extLst>
+            </p:cNvPr>
+            <p:cNvCxnSpPr>
+              <a:cxnSpLocks/>
+            </p:cNvCxnSpPr>
+            <p:nvPr/>
+          </p:nvCxnSpPr>
+          <p:spPr>
+            <a:xfrm flipH="1">
+              <a:off x="3727390" y="6635238"/>
+              <a:ext cx="690742" cy="0"/>
+            </a:xfrm>
+            <a:prstGeom prst="straightConnector1">
+              <a:avLst/>
+            </a:prstGeom>
+            <a:ln w="28575">
+              <a:solidFill>
+                <a:srgbClr val="FF3505"/>
+              </a:solidFill>
+              <a:tailEnd type="triangle"/>
+            </a:ln>
+          </p:spPr>
+          <p:style>
+            <a:lnRef idx="1">
+              <a:schemeClr val="accent1"/>
+            </a:lnRef>
+            <a:fillRef idx="0">
+              <a:schemeClr val="accent1"/>
+            </a:fillRef>
+            <a:effectRef idx="0">
+              <a:schemeClr val="accent1"/>
+            </a:effectRef>
+            <a:fontRef idx="minor">
+              <a:schemeClr val="tx1"/>
+            </a:fontRef>
+          </p:style>
+        </p:cxnSp>
+        <p:cxnSp>
+          <p:nvCxnSpPr>
+            <p:cNvPr id="25" name="직선 연결선 24">
+              <a:extLst>
+                <a:ext uri="{FF2B5EF4-FFF2-40B4-BE49-F238E27FC236}">
+                  <a16:creationId xmlns:a16="http://schemas.microsoft.com/office/drawing/2014/main" id="{ACA36470-331A-F044-827A-14264A39673D}"/>
+                </a:ext>
+              </a:extLst>
+            </p:cNvPr>
+            <p:cNvCxnSpPr>
+              <a:cxnSpLocks/>
+            </p:cNvCxnSpPr>
+            <p:nvPr/>
+          </p:nvCxnSpPr>
+          <p:spPr>
+            <a:xfrm flipH="1">
+              <a:off x="4269528" y="6547727"/>
+              <a:ext cx="412296" cy="0"/>
+            </a:xfrm>
+            <a:prstGeom prst="line">
+              <a:avLst/>
+            </a:prstGeom>
+            <a:ln>
+              <a:solidFill>
+                <a:schemeClr val="tx1"/>
+              </a:solidFill>
+              <a:prstDash val="dashDot"/>
+            </a:ln>
+          </p:spPr>
+          <p:style>
+            <a:lnRef idx="1">
+              <a:schemeClr val="accent1"/>
+            </a:lnRef>
+            <a:fillRef idx="0">
+              <a:schemeClr val="accent1"/>
+            </a:fillRef>
+            <a:effectRef idx="0">
+              <a:schemeClr val="accent1"/>
+            </a:effectRef>
+            <a:fontRef idx="minor">
+              <a:schemeClr val="tx1"/>
+            </a:fontRef>
+          </p:style>
+        </p:cxnSp>
+        <p:sp>
+          <p:nvSpPr>
+            <p:cNvPr id="26" name="TextBox 25">
+              <a:extLst>
+                <a:ext uri="{FF2B5EF4-FFF2-40B4-BE49-F238E27FC236}">
+                  <a16:creationId xmlns:a16="http://schemas.microsoft.com/office/drawing/2014/main" id="{E1E06E01-D165-1F1E-42F1-FC97D0832022}"/>
+                </a:ext>
+              </a:extLst>
+            </p:cNvPr>
+            <p:cNvSpPr txBox="1"/>
+            <p:nvPr/>
+          </p:nvSpPr>
+          <p:spPr>
+            <a:xfrm>
+              <a:off x="4282991" y="5973964"/>
+              <a:ext cx="402808" cy="215444"/>
+            </a:xfrm>
+            <a:prstGeom prst="rect">
+              <a:avLst/>
+            </a:prstGeom>
+            <a:noFill/>
+          </p:spPr>
+          <p:txBody>
+            <a:bodyPr wrap="square" rtlCol="0">
+              <a:spAutoFit/>
+            </a:bodyPr>
+            <a:lstStyle/>
+            <a:p>
+              <a:pPr algn="ctr"/>
+              <a:r>
+                <a:rPr lang="en-US" altLang="ko-KR" sz="800"/>
+                <a:t>n1</a:t>
+              </a:r>
+              <a:endParaRPr lang="ko-KR" altLang="en-US" sz="800"/>
+            </a:p>
+          </p:txBody>
+        </p:sp>
+        <p:sp>
+          <p:nvSpPr>
+            <p:cNvPr id="27" name="TextBox 26">
+              <a:extLst>
+                <a:ext uri="{FF2B5EF4-FFF2-40B4-BE49-F238E27FC236}">
+                  <a16:creationId xmlns:a16="http://schemas.microsoft.com/office/drawing/2014/main" id="{0FEC287E-2B50-7A32-EA2A-087DFE40EA3C}"/>
+                </a:ext>
+              </a:extLst>
+            </p:cNvPr>
+            <p:cNvSpPr txBox="1"/>
+            <p:nvPr/>
+          </p:nvSpPr>
+          <p:spPr>
+            <a:xfrm>
+              <a:off x="3913589" y="5930032"/>
+              <a:ext cx="402808" cy="215444"/>
+            </a:xfrm>
+            <a:prstGeom prst="rect">
+              <a:avLst/>
+            </a:prstGeom>
+            <a:noFill/>
+          </p:spPr>
+          <p:txBody>
+            <a:bodyPr wrap="square" rtlCol="0">
+              <a:spAutoFit/>
+            </a:bodyPr>
+            <a:lstStyle/>
+            <a:p>
+              <a:pPr algn="ctr"/>
+              <a:r>
+                <a:rPr lang="en-US" altLang="ko-KR" sz="800"/>
+                <a:t>o1</a:t>
+              </a:r>
+              <a:endParaRPr lang="ko-KR" altLang="en-US" sz="800"/>
+            </a:p>
+          </p:txBody>
+        </p:sp>
+        <p:sp>
+          <p:nvSpPr>
+            <p:cNvPr id="28" name="TextBox 27">
+              <a:extLst>
+                <a:ext uri="{FF2B5EF4-FFF2-40B4-BE49-F238E27FC236}">
+                  <a16:creationId xmlns:a16="http://schemas.microsoft.com/office/drawing/2014/main" id="{E612F1FA-16A0-1323-3332-F4AB5E173E15}"/>
+                </a:ext>
+              </a:extLst>
+            </p:cNvPr>
+            <p:cNvSpPr txBox="1"/>
+            <p:nvPr/>
+          </p:nvSpPr>
+          <p:spPr>
+            <a:xfrm>
+              <a:off x="4017936" y="5724658"/>
+              <a:ext cx="607806" cy="215444"/>
+            </a:xfrm>
+            <a:prstGeom prst="rect">
+              <a:avLst/>
+            </a:prstGeom>
+            <a:noFill/>
+          </p:spPr>
+          <p:txBody>
+            <a:bodyPr wrap="square" rtlCol="0">
+              <a:spAutoFit/>
+            </a:bodyPr>
+            <a:lstStyle/>
+            <a:p>
+              <a:pPr algn="ctr"/>
+              <a:r>
+                <a:rPr lang="en-US" altLang="ko-KR" sz="800"/>
+                <a:t>BETOX</a:t>
+              </a:r>
+              <a:endParaRPr lang="ko-KR" altLang="en-US" sz="800"/>
+            </a:p>
+          </p:txBody>
+        </p:sp>
+        <p:sp>
+          <p:nvSpPr>
+            <p:cNvPr id="29" name="자유형: 도형 28">
+              <a:extLst>
+                <a:ext uri="{FF2B5EF4-FFF2-40B4-BE49-F238E27FC236}">
+                  <a16:creationId xmlns:a16="http://schemas.microsoft.com/office/drawing/2014/main" id="{88083C4D-1FCF-774C-BFC6-45A7DDCAF86F}"/>
+                </a:ext>
+              </a:extLst>
+            </p:cNvPr>
+            <p:cNvSpPr/>
+            <p:nvPr/>
+          </p:nvSpPr>
+          <p:spPr>
+            <a:xfrm>
+              <a:off x="3750979" y="6265258"/>
+              <a:ext cx="597694" cy="118685"/>
+            </a:xfrm>
+            <a:custGeom>
+              <a:avLst/>
+              <a:gdLst>
+                <a:gd name="connsiteX0" fmla="*/ 502444 w 502444"/>
+                <a:gd name="connsiteY0" fmla="*/ 54390 h 118685"/>
+                <a:gd name="connsiteX1" fmla="*/ 409575 w 502444"/>
+                <a:gd name="connsiteY1" fmla="*/ 2003 h 118685"/>
+                <a:gd name="connsiteX2" fmla="*/ 345281 w 502444"/>
+                <a:gd name="connsiteY2" fmla="*/ 116303 h 118685"/>
+                <a:gd name="connsiteX3" fmla="*/ 285750 w 502444"/>
+                <a:gd name="connsiteY3" fmla="*/ 11528 h 118685"/>
+                <a:gd name="connsiteX4" fmla="*/ 226219 w 502444"/>
+                <a:gd name="connsiteY4" fmla="*/ 118684 h 118685"/>
+                <a:gd name="connsiteX5" fmla="*/ 183356 w 502444"/>
+                <a:gd name="connsiteY5" fmla="*/ 13909 h 118685"/>
+                <a:gd name="connsiteX6" fmla="*/ 119063 w 502444"/>
+                <a:gd name="connsiteY6" fmla="*/ 116303 h 118685"/>
+                <a:gd name="connsiteX7" fmla="*/ 78581 w 502444"/>
+                <a:gd name="connsiteY7" fmla="*/ 56772 h 118685"/>
+                <a:gd name="connsiteX8" fmla="*/ 0 w 502444"/>
+                <a:gd name="connsiteY8" fmla="*/ 56772 h 118685"/>
+              </a:gdLst>
+              <a:ahLst/>
+              <a:cxnLst>
+                <a:cxn ang="0">
+                  <a:pos x="connsiteX0" y="connsiteY0"/>
+                </a:cxn>
+                <a:cxn ang="0">
+                  <a:pos x="connsiteX1" y="connsiteY1"/>
+                </a:cxn>
+                <a:cxn ang="0">
+                  <a:pos x="connsiteX2" y="connsiteY2"/>
+                </a:cxn>
+                <a:cxn ang="0">
+                  <a:pos x="connsiteX3" y="connsiteY3"/>
+                </a:cxn>
+                <a:cxn ang="0">
+                  <a:pos x="connsiteX4" y="connsiteY4"/>
+                </a:cxn>
+                <a:cxn ang="0">
+                  <a:pos x="connsiteX5" y="connsiteY5"/>
+                </a:cxn>
+                <a:cxn ang="0">
+                  <a:pos x="connsiteX6" y="connsiteY6"/>
+                </a:cxn>
+                <a:cxn ang="0">
+                  <a:pos x="connsiteX7" y="connsiteY7"/>
+                </a:cxn>
+                <a:cxn ang="0">
+                  <a:pos x="connsiteX8" y="connsiteY8"/>
+                </a:cxn>
+              </a:cxnLst>
+              <a:rect l="l" t="t" r="r" b="b"/>
+              <a:pathLst>
+                <a:path w="502444" h="118685">
+                  <a:moveTo>
+                    <a:pt x="502444" y="54390"/>
+                  </a:moveTo>
+                  <a:cubicBezTo>
+                    <a:pt x="469106" y="23037"/>
+                    <a:pt x="435769" y="-8316"/>
+                    <a:pt x="409575" y="2003"/>
+                  </a:cubicBezTo>
+                  <a:cubicBezTo>
+                    <a:pt x="383381" y="12322"/>
+                    <a:pt x="365918" y="114716"/>
+                    <a:pt x="345281" y="116303"/>
+                  </a:cubicBezTo>
+                  <a:cubicBezTo>
+                    <a:pt x="324644" y="117890"/>
+                    <a:pt x="305594" y="11131"/>
+                    <a:pt x="285750" y="11528"/>
+                  </a:cubicBezTo>
+                  <a:cubicBezTo>
+                    <a:pt x="265906" y="11925"/>
+                    <a:pt x="243285" y="118287"/>
+                    <a:pt x="226219" y="118684"/>
+                  </a:cubicBezTo>
+                  <a:cubicBezTo>
+                    <a:pt x="209153" y="119081"/>
+                    <a:pt x="201215" y="14306"/>
+                    <a:pt x="183356" y="13909"/>
+                  </a:cubicBezTo>
+                  <a:cubicBezTo>
+                    <a:pt x="165497" y="13512"/>
+                    <a:pt x="136525" y="109159"/>
+                    <a:pt x="119063" y="116303"/>
+                  </a:cubicBezTo>
+                  <a:cubicBezTo>
+                    <a:pt x="101601" y="123447"/>
+                    <a:pt x="98425" y="66694"/>
+                    <a:pt x="78581" y="56772"/>
+                  </a:cubicBezTo>
+                  <a:cubicBezTo>
+                    <a:pt x="58737" y="46850"/>
+                    <a:pt x="29368" y="51811"/>
+                    <a:pt x="0" y="56772"/>
+                  </a:cubicBezTo>
+                </a:path>
+              </a:pathLst>
+            </a:custGeom>
+            <a:noFill/>
+            <a:ln w="9525">
+              <a:solidFill>
+                <a:srgbClr val="FF0000"/>
+              </a:solidFill>
+              <a:headEnd type="none" w="med" len="med"/>
+              <a:tailEnd type="triangle" w="med" len="med"/>
+            </a:ln>
+          </p:spPr>
+          <p:style>
+            <a:lnRef idx="2">
+              <a:schemeClr val="accent1">
+                <a:shade val="15000"/>
+              </a:schemeClr>
+            </a:lnRef>
+            <a:fillRef idx="1">
+              <a:schemeClr val="accent1"/>
+            </a:fillRef>
+            <a:effectRef idx="0">
+              <a:schemeClr val="accent1"/>
+            </a:effectRef>
+            <a:fontRef idx="minor">
+              <a:schemeClr val="lt1"/>
+            </a:fontRef>
+          </p:style>
+          <p:txBody>
+            <a:bodyPr rtlCol="0" anchor="ctr"/>
+            <a:lstStyle/>
+            <a:p>
+              <a:pPr algn="ctr"/>
+              <a:endParaRPr lang="ko-KR" altLang="en-US"/>
+            </a:p>
+          </p:txBody>
+        </p:sp>
+        <p:sp>
+          <p:nvSpPr>
+            <p:cNvPr id="30" name="곱하기 기호 29">
+              <a:extLst>
+                <a:ext uri="{FF2B5EF4-FFF2-40B4-BE49-F238E27FC236}">
+                  <a16:creationId xmlns:a16="http://schemas.microsoft.com/office/drawing/2014/main" id="{189BDFC1-A4A2-91E1-67B1-4CFED1B02119}"/>
+                </a:ext>
+              </a:extLst>
+            </p:cNvPr>
+            <p:cNvSpPr/>
+            <p:nvPr/>
+          </p:nvSpPr>
+          <p:spPr>
+            <a:xfrm>
+              <a:off x="3993924" y="6143376"/>
+              <a:ext cx="194392" cy="376625"/>
+            </a:xfrm>
+            <a:prstGeom prst="mathMultiply">
+              <a:avLst/>
+            </a:prstGeom>
+            <a:solidFill>
+              <a:srgbClr val="FF2900"/>
+            </a:solidFill>
+          </p:spPr>
+          <p:style>
+            <a:lnRef idx="2">
+              <a:schemeClr val="accent1">
+                <a:shade val="15000"/>
+              </a:schemeClr>
+            </a:lnRef>
+            <a:fillRef idx="1">
+              <a:schemeClr val="accent1"/>
+            </a:fillRef>
+            <a:effectRef idx="0">
+              <a:schemeClr val="accent1"/>
+            </a:effectRef>
+            <a:fontRef idx="minor">
+              <a:schemeClr val="lt1"/>
+            </a:fontRef>
+          </p:style>
+          <p:txBody>
+            <a:bodyPr rtlCol="0" anchor="ctr"/>
+            <a:lstStyle/>
+            <a:p>
+              <a:pPr algn="ctr"/>
+              <a:endParaRPr lang="ko-KR" altLang="en-US"/>
+            </a:p>
+          </p:txBody>
+        </p:sp>
+        <p:pic>
+          <p:nvPicPr>
+            <p:cNvPr id="31" name="그림 30">
+              <a:extLst>
+                <a:ext uri="{FF2B5EF4-FFF2-40B4-BE49-F238E27FC236}">
+                  <a16:creationId xmlns:a16="http://schemas.microsoft.com/office/drawing/2014/main" id="{7B0065D0-D05A-8EFA-ED19-6D42A0EC3F03}"/>
+                </a:ext>
+              </a:extLst>
+            </p:cNvPr>
+            <p:cNvPicPr>
+              <a:picLocks noChangeAspect="1"/>
+            </p:cNvPicPr>
+            <p:nvPr/>
+          </p:nvPicPr>
+          <p:blipFill>
+            <a:blip r:embed="rId5"/>
+            <a:stretch>
+              <a:fillRect/>
+            </a:stretch>
+          </p:blipFill>
+          <p:spPr>
+            <a:xfrm>
+              <a:off x="4343764" y="6242976"/>
+              <a:ext cx="68314" cy="68314"/>
+            </a:xfrm>
+            <a:prstGeom prst="rect">
+              <a:avLst/>
+            </a:prstGeom>
+          </p:spPr>
+        </p:pic>
+        <p:sp>
+          <p:nvSpPr>
+            <p:cNvPr id="32" name="자유형: 도형 31">
+              <a:extLst>
+                <a:ext uri="{FF2B5EF4-FFF2-40B4-BE49-F238E27FC236}">
+                  <a16:creationId xmlns:a16="http://schemas.microsoft.com/office/drawing/2014/main" id="{23778246-7FFD-9A7C-E6A4-E7EBD6306310}"/>
+                </a:ext>
+              </a:extLst>
+            </p:cNvPr>
+            <p:cNvSpPr/>
+            <p:nvPr/>
+          </p:nvSpPr>
+          <p:spPr>
+            <a:xfrm>
+              <a:off x="4416365" y="6311900"/>
+              <a:ext cx="60409" cy="282575"/>
+            </a:xfrm>
+            <a:custGeom>
+              <a:avLst/>
+              <a:gdLst>
+                <a:gd name="connsiteX0" fmla="*/ 0 w 60409"/>
+                <a:gd name="connsiteY0" fmla="*/ 0 h 282575"/>
+                <a:gd name="connsiteX1" fmla="*/ 50800 w 60409"/>
+                <a:gd name="connsiteY1" fmla="*/ 92075 h 282575"/>
+                <a:gd name="connsiteX2" fmla="*/ 60325 w 60409"/>
+                <a:gd name="connsiteY2" fmla="*/ 282575 h 282575"/>
+              </a:gdLst>
+              <a:ahLst/>
+              <a:cxnLst>
+                <a:cxn ang="0">
+                  <a:pos x="connsiteX0" y="connsiteY0"/>
+                </a:cxn>
+                <a:cxn ang="0">
+                  <a:pos x="connsiteX1" y="connsiteY1"/>
+                </a:cxn>
+                <a:cxn ang="0">
+                  <a:pos x="connsiteX2" y="connsiteY2"/>
+                </a:cxn>
+              </a:cxnLst>
+              <a:rect l="l" t="t" r="r" b="b"/>
+              <a:pathLst>
+                <a:path w="60409" h="282575">
+                  <a:moveTo>
+                    <a:pt x="0" y="0"/>
+                  </a:moveTo>
+                  <a:cubicBezTo>
+                    <a:pt x="20373" y="22489"/>
+                    <a:pt x="40746" y="44979"/>
+                    <a:pt x="50800" y="92075"/>
+                  </a:cubicBezTo>
+                  <a:cubicBezTo>
+                    <a:pt x="60854" y="139171"/>
+                    <a:pt x="60589" y="210873"/>
+                    <a:pt x="60325" y="282575"/>
+                  </a:cubicBezTo>
+                </a:path>
+              </a:pathLst>
+            </a:custGeom>
+            <a:noFill/>
+            <a:ln>
+              <a:solidFill>
+                <a:srgbClr val="0000FF"/>
+              </a:solidFill>
+              <a:headEnd type="none" w="med" len="med"/>
+              <a:tailEnd type="triangle" w="med" len="med"/>
+            </a:ln>
+          </p:spPr>
+          <p:style>
+            <a:lnRef idx="2">
+              <a:schemeClr val="accent1">
+                <a:shade val="15000"/>
+              </a:schemeClr>
+            </a:lnRef>
+            <a:fillRef idx="1">
+              <a:schemeClr val="accent1"/>
+            </a:fillRef>
+            <a:effectRef idx="0">
+              <a:schemeClr val="accent1"/>
+            </a:effectRef>
+            <a:fontRef idx="minor">
+              <a:schemeClr val="lt1"/>
+            </a:fontRef>
+          </p:style>
+          <p:txBody>
+            <a:bodyPr rtlCol="0" anchor="ctr"/>
+            <a:lstStyle/>
+            <a:p>
+              <a:pPr algn="ctr"/>
+              <a:endParaRPr lang="ko-KR" altLang="en-US"/>
+            </a:p>
+          </p:txBody>
+        </p:sp>
+        <p:sp>
+          <p:nvSpPr>
+            <p:cNvPr id="33" name="TextBox 32">
+              <a:extLst>
+                <a:ext uri="{FF2B5EF4-FFF2-40B4-BE49-F238E27FC236}">
+                  <a16:creationId xmlns:a16="http://schemas.microsoft.com/office/drawing/2014/main" id="{01330A9B-B694-5153-97D5-CF5D1BB1C47E}"/>
+                </a:ext>
+              </a:extLst>
+            </p:cNvPr>
+            <p:cNvSpPr txBox="1"/>
+            <p:nvPr/>
+          </p:nvSpPr>
+          <p:spPr>
+            <a:xfrm>
+              <a:off x="4549254" y="6416921"/>
+              <a:ext cx="439071" cy="261610"/>
+            </a:xfrm>
+            <a:prstGeom prst="rect">
+              <a:avLst/>
+            </a:prstGeom>
+            <a:noFill/>
+          </p:spPr>
+          <p:txBody>
+            <a:bodyPr wrap="square" rtlCol="0">
+              <a:spAutoFit/>
+            </a:bodyPr>
+            <a:lstStyle/>
+            <a:p>
+              <a:pPr algn="ctr"/>
+              <a:r>
+                <a:rPr lang="en-US" altLang="ko-KR" sz="1100" b="1">
+                  <a:latin typeface="Times New Roman" panose="02020603050405020304" pitchFamily="18" charset="0"/>
+                  <a:cs typeface="Times New Roman" panose="02020603050405020304" pitchFamily="18" charset="0"/>
+                </a:rPr>
+                <a:t>E</a:t>
+              </a:r>
+              <a:r>
+                <a:rPr lang="en-US" altLang="ko-KR" sz="1100" b="1" baseline="-25000">
+                  <a:latin typeface="Times New Roman" panose="02020603050405020304" pitchFamily="18" charset="0"/>
+                  <a:cs typeface="Times New Roman" panose="02020603050405020304" pitchFamily="18" charset="0"/>
+                </a:rPr>
+                <a:t>F</a:t>
+              </a:r>
+              <a:endParaRPr lang="ko-KR" altLang="en-US" sz="1100" b="1" baseline="-25000">
+                <a:latin typeface="Times New Roman" panose="02020603050405020304" pitchFamily="18" charset="0"/>
+                <a:cs typeface="Times New Roman" panose="02020603050405020304" pitchFamily="18" charset="0"/>
+              </a:endParaRPr>
+            </a:p>
+          </p:txBody>
+        </p:sp>
+        <p:sp>
+          <p:nvSpPr>
+            <p:cNvPr id="34" name="TextBox 33">
+              <a:extLst>
+                <a:ext uri="{FF2B5EF4-FFF2-40B4-BE49-F238E27FC236}">
+                  <a16:creationId xmlns:a16="http://schemas.microsoft.com/office/drawing/2014/main" id="{C17B0A07-3AB8-391A-9D8C-D45E4406AC48}"/>
+                </a:ext>
+              </a:extLst>
+            </p:cNvPr>
+            <p:cNvSpPr txBox="1"/>
+            <p:nvPr/>
+          </p:nvSpPr>
+          <p:spPr>
+            <a:xfrm>
+              <a:off x="3313708" y="5488178"/>
+              <a:ext cx="1749215" cy="261610"/>
+            </a:xfrm>
+            <a:prstGeom prst="rect">
+              <a:avLst/>
+            </a:prstGeom>
+            <a:noFill/>
+          </p:spPr>
+          <p:txBody>
+            <a:bodyPr wrap="square" rtlCol="0">
+              <a:spAutoFit/>
+            </a:bodyPr>
+            <a:lstStyle/>
+            <a:p>
+              <a:r>
+                <a:rPr lang="en-US" altLang="ko-KR" sz="1100" b="1">
+                  <a:latin typeface="Times New Roman" panose="02020603050405020304" pitchFamily="18" charset="0"/>
+                  <a:cs typeface="Times New Roman" panose="02020603050405020304" pitchFamily="18" charset="0"/>
+                </a:rPr>
+                <a:t>Retention </a:t>
+              </a:r>
+              <a:r>
+                <a:rPr lang="en-US" altLang="ko-KR" sz="800">
+                  <a:latin typeface="Times New Roman" panose="02020603050405020304" pitchFamily="18" charset="0"/>
+                  <a:cs typeface="Times New Roman" panose="02020603050405020304" pitchFamily="18" charset="0"/>
+                </a:rPr>
+                <a:t>(V</a:t>
+              </a:r>
+              <a:r>
+                <a:rPr lang="en-US" altLang="ko-KR" sz="800" baseline="-25000">
+                  <a:latin typeface="Times New Roman" panose="02020603050405020304" pitchFamily="18" charset="0"/>
+                  <a:cs typeface="Times New Roman" panose="02020603050405020304" pitchFamily="18" charset="0"/>
+                </a:rPr>
+                <a:t>G</a:t>
+              </a:r>
+              <a:r>
+                <a:rPr lang="en-US" altLang="ko-KR" sz="800">
+                  <a:latin typeface="Times New Roman" panose="02020603050405020304" pitchFamily="18" charset="0"/>
+                  <a:cs typeface="Times New Roman" panose="02020603050405020304" pitchFamily="18" charset="0"/>
+                </a:rPr>
+                <a:t> = 0 V, </a:t>
+              </a:r>
+              <a:r>
+                <a:rPr lang="en-US" altLang="ko-KR" sz="800" err="1">
+                  <a:latin typeface="Times New Roman" panose="02020603050405020304" pitchFamily="18" charset="0"/>
+                  <a:cs typeface="Times New Roman" panose="02020603050405020304" pitchFamily="18" charset="0"/>
+                </a:rPr>
+                <a:t>V</a:t>
+              </a:r>
+              <a:r>
+                <a:rPr lang="en-US" altLang="ko-KR" sz="800" baseline="-25000" err="1">
+                  <a:latin typeface="Times New Roman" panose="02020603050405020304" pitchFamily="18" charset="0"/>
+                  <a:cs typeface="Times New Roman" panose="02020603050405020304" pitchFamily="18" charset="0"/>
+                </a:rPr>
+                <a:t>ch</a:t>
+              </a:r>
+              <a:r>
+                <a:rPr lang="en-US" altLang="ko-KR" sz="800">
+                  <a:latin typeface="Times New Roman" panose="02020603050405020304" pitchFamily="18" charset="0"/>
+                  <a:cs typeface="Times New Roman" panose="02020603050405020304" pitchFamily="18" charset="0"/>
+                </a:rPr>
+                <a:t> = -</a:t>
+              </a:r>
+              <a:r>
+                <a:rPr lang="en-US" altLang="ko-KR" sz="800" err="1">
+                  <a:latin typeface="Times New Roman" panose="02020603050405020304" pitchFamily="18" charset="0"/>
+                  <a:cs typeface="Times New Roman" panose="02020603050405020304" pitchFamily="18" charset="0"/>
+                </a:rPr>
+                <a:t>ΔV</a:t>
+              </a:r>
+              <a:r>
+                <a:rPr lang="en-US" altLang="ko-KR" sz="800" baseline="-25000" err="1">
+                  <a:latin typeface="Times New Roman" panose="02020603050405020304" pitchFamily="18" charset="0"/>
+                  <a:cs typeface="Times New Roman" panose="02020603050405020304" pitchFamily="18" charset="0"/>
+                </a:rPr>
+                <a:t>th</a:t>
+              </a:r>
+              <a:r>
+                <a:rPr lang="en-US" altLang="ko-KR" sz="800">
+                  <a:latin typeface="Times New Roman" panose="02020603050405020304" pitchFamily="18" charset="0"/>
+                  <a:cs typeface="Times New Roman" panose="02020603050405020304" pitchFamily="18" charset="0"/>
+                </a:rPr>
+                <a:t>)</a:t>
+              </a:r>
+              <a:endParaRPr lang="en-US" altLang="ko-KR" sz="800" b="1" baseline="-25000">
+                <a:latin typeface="Times New Roman" panose="02020603050405020304" pitchFamily="18" charset="0"/>
+                <a:cs typeface="Times New Roman" panose="02020603050405020304" pitchFamily="18" charset="0"/>
+              </a:endParaRPr>
+            </a:p>
+          </p:txBody>
+        </p:sp>
+        <p:sp>
+          <p:nvSpPr>
+            <p:cNvPr id="35" name="TextBox 34">
+              <a:extLst>
+                <a:ext uri="{FF2B5EF4-FFF2-40B4-BE49-F238E27FC236}">
+                  <a16:creationId xmlns:a16="http://schemas.microsoft.com/office/drawing/2014/main" id="{6650D8C6-3DCC-A1C7-A6A5-D160A0567DF4}"/>
+                </a:ext>
+              </a:extLst>
+            </p:cNvPr>
+            <p:cNvSpPr txBox="1"/>
+            <p:nvPr/>
+          </p:nvSpPr>
+          <p:spPr>
+            <a:xfrm>
+              <a:off x="3388432" y="6514025"/>
+              <a:ext cx="489638" cy="261610"/>
+            </a:xfrm>
+            <a:prstGeom prst="rect">
+              <a:avLst/>
+            </a:prstGeom>
+            <a:noFill/>
+          </p:spPr>
+          <p:txBody>
+            <a:bodyPr wrap="square" rtlCol="0">
+              <a:spAutoFit/>
+            </a:bodyPr>
+            <a:lstStyle/>
+            <a:p>
+              <a:r>
+                <a:rPr lang="en-US" altLang="ko-KR" sz="1100" i="1" err="1">
+                  <a:latin typeface="Times New Roman" panose="02020603050405020304" pitchFamily="18" charset="0"/>
+                  <a:cs typeface="Times New Roman" panose="02020603050405020304" pitchFamily="18" charset="0"/>
+                </a:rPr>
+                <a:t>e</a:t>
+              </a:r>
+              <a:r>
+                <a:rPr lang="en-US" altLang="ko-KR" sz="1100" baseline="-25000" err="1">
+                  <a:latin typeface="Times New Roman" panose="02020603050405020304" pitchFamily="18" charset="0"/>
+                  <a:cs typeface="Times New Roman" panose="02020603050405020304" pitchFamily="18" charset="0"/>
+                </a:rPr>
+                <a:t>TBT</a:t>
+              </a:r>
+              <a:endParaRPr lang="ko-KR" altLang="en-US" sz="1100" baseline="-25000">
+                <a:latin typeface="Times New Roman" panose="02020603050405020304" pitchFamily="18" charset="0"/>
+                <a:cs typeface="Times New Roman" panose="02020603050405020304" pitchFamily="18" charset="0"/>
+              </a:endParaRPr>
+            </a:p>
+          </p:txBody>
+        </p:sp>
+        <p:sp>
+          <p:nvSpPr>
+            <p:cNvPr id="36" name="TextBox 35">
+              <a:extLst>
+                <a:ext uri="{FF2B5EF4-FFF2-40B4-BE49-F238E27FC236}">
+                  <a16:creationId xmlns:a16="http://schemas.microsoft.com/office/drawing/2014/main" id="{593B8EF8-B809-091B-DDC2-B2D67BCCA28D}"/>
+                </a:ext>
+              </a:extLst>
+            </p:cNvPr>
+            <p:cNvSpPr txBox="1"/>
+            <p:nvPr/>
+          </p:nvSpPr>
+          <p:spPr>
+            <a:xfrm>
+              <a:off x="3421808" y="6107380"/>
+              <a:ext cx="489638" cy="261610"/>
+            </a:xfrm>
+            <a:prstGeom prst="rect">
+              <a:avLst/>
+            </a:prstGeom>
+            <a:noFill/>
+          </p:spPr>
+          <p:txBody>
+            <a:bodyPr wrap="square" rtlCol="0">
+              <a:spAutoFit/>
+            </a:bodyPr>
+            <a:lstStyle/>
+            <a:p>
+              <a:r>
+                <a:rPr lang="en-US" altLang="ko-KR" sz="1100" i="1">
+                  <a:latin typeface="Times New Roman" panose="02020603050405020304" pitchFamily="18" charset="0"/>
+                  <a:cs typeface="Times New Roman" panose="02020603050405020304" pitchFamily="18" charset="0"/>
+                </a:rPr>
+                <a:t>e</a:t>
+              </a:r>
+              <a:r>
+                <a:rPr lang="en-US" altLang="ko-KR" sz="1100" baseline="-25000">
+                  <a:latin typeface="Times New Roman" panose="02020603050405020304" pitchFamily="18" charset="0"/>
+                  <a:cs typeface="Times New Roman" panose="02020603050405020304" pitchFamily="18" charset="0"/>
+                </a:rPr>
+                <a:t>DT</a:t>
+              </a:r>
+              <a:endParaRPr lang="ko-KR" altLang="en-US" sz="1100" baseline="-25000">
+                <a:latin typeface="Times New Roman" panose="02020603050405020304" pitchFamily="18" charset="0"/>
+                <a:cs typeface="Times New Roman" panose="02020603050405020304" pitchFamily="18" charset="0"/>
+              </a:endParaRPr>
+            </a:p>
+          </p:txBody>
+        </p:sp>
+      </p:grpSp>
+      <p:sp>
+        <p:nvSpPr>
+          <p:cNvPr id="37" name="TextBox 36">
+            <a:extLst>
+              <a:ext uri="{FF2B5EF4-FFF2-40B4-BE49-F238E27FC236}">
+                <a16:creationId xmlns:a16="http://schemas.microsoft.com/office/drawing/2014/main" id="{0D12BE82-D719-AA97-EF81-E1BD25A99E77}"/>
+              </a:ext>
+            </a:extLst>
+          </p:cNvPr>
+          <p:cNvSpPr txBox="1"/>
+          <p:nvPr/>
+        </p:nvSpPr>
+        <p:spPr>
+          <a:xfrm>
+            <a:off x="7777640" y="6205303"/>
+            <a:ext cx="1366360" cy="261610"/>
+          </a:xfrm>
+          <a:prstGeom prst="rect">
+            <a:avLst/>
+          </a:prstGeom>
+          <a:noFill/>
+        </p:spPr>
+        <p:txBody>
+          <a:bodyPr wrap="square" rtlCol="0">
+            <a:spAutoFit/>
+          </a:bodyPr>
+          <a:lstStyle/>
+          <a:p>
+            <a:pPr algn="r"/>
+            <a:r>
+              <a:rPr lang="en-US" altLang="ko-KR" sz="1050" b="1" i="1" dirty="0">
+                <a:ln w="9525">
+                  <a:solidFill>
+                    <a:schemeClr val="tx1">
+                      <a:alpha val="29000"/>
+                    </a:schemeClr>
+                  </a:solidFill>
+                </a:ln>
+                <a:solidFill>
+                  <a:schemeClr val="bg1">
+                    <a:lumMod val="65000"/>
+                  </a:schemeClr>
+                </a:solidFill>
+                <a:latin typeface="Times New Roman"/>
+                <a:ea typeface="맑은 고딕"/>
+                <a:cs typeface="Times New Roman"/>
+              </a:rPr>
+              <a:t>[1] Jin, TED (2025)</a:t>
+            </a:r>
+            <a:endParaRPr lang="ko-KR" altLang="en-US" sz="1050" b="1" i="1" dirty="0">
+              <a:ln w="9525">
+                <a:solidFill>
+                  <a:schemeClr val="tx1">
+                    <a:alpha val="29000"/>
+                  </a:schemeClr>
+                </a:solidFill>
+              </a:ln>
+              <a:solidFill>
+                <a:schemeClr val="bg1">
+                  <a:lumMod val="65000"/>
+                </a:schemeClr>
+              </a:solidFill>
+              <a:latin typeface="Times New Roman"/>
+              <a:ea typeface="맑은 고딕"/>
+              <a:cs typeface="Times New Roman"/>
+            </a:endParaRPr>
+          </a:p>
+        </p:txBody>
+      </p:sp>
+      <p:sp>
+        <p:nvSpPr>
+          <p:cNvPr id="38" name="TextBox 37">
+            <a:extLst>
+              <a:ext uri="{FF2B5EF4-FFF2-40B4-BE49-F238E27FC236}">
+                <a16:creationId xmlns:a16="http://schemas.microsoft.com/office/drawing/2014/main" id="{61350C7B-0A88-595F-8911-74810F6666FF}"/>
+              </a:ext>
+            </a:extLst>
+          </p:cNvPr>
+          <p:cNvSpPr txBox="1"/>
+          <p:nvPr/>
+        </p:nvSpPr>
+        <p:spPr>
+          <a:xfrm>
+            <a:off x="4882684" y="1302385"/>
+            <a:ext cx="4105674" cy="1631216"/>
+          </a:xfrm>
+          <a:prstGeom prst="rect">
+            <a:avLst/>
+          </a:prstGeom>
+          <a:noFill/>
+        </p:spPr>
+        <p:txBody>
+          <a:bodyPr wrap="square" rtlCol="0">
+            <a:spAutoFit/>
+          </a:bodyPr>
+          <a:lstStyle/>
+          <a:p>
+            <a:r>
+              <a:rPr lang="en-US" altLang="ko-KR" sz="2000" dirty="0">
+                <a:ln w="9525">
+                  <a:solidFill>
+                    <a:schemeClr val="tx1">
+                      <a:alpha val="29000"/>
+                    </a:schemeClr>
+                  </a:solidFill>
+                </a:ln>
+                <a:latin typeface="Times New Roman"/>
+                <a:ea typeface="맑은 고딕"/>
+                <a:cs typeface="Times New Roman"/>
+              </a:rPr>
+              <a:t>Program</a:t>
+            </a:r>
+            <a:r>
+              <a:rPr lang="ko-KR" altLang="en-US" sz="2000" dirty="0">
+                <a:ln w="9525">
+                  <a:solidFill>
+                    <a:schemeClr val="tx1">
+                      <a:alpha val="29000"/>
+                    </a:schemeClr>
+                  </a:solidFill>
+                </a:ln>
+                <a:latin typeface="Times New Roman"/>
+                <a:ea typeface="맑은 고딕"/>
+                <a:cs typeface="Times New Roman"/>
+              </a:rPr>
+              <a:t>에서는 </a:t>
+            </a:r>
+            <a:r>
+              <a:rPr lang="en-US" altLang="ko-KR" sz="2000" dirty="0">
+                <a:ln w="9525">
+                  <a:solidFill>
+                    <a:schemeClr val="tx1">
+                      <a:alpha val="29000"/>
+                    </a:schemeClr>
+                  </a:solidFill>
+                </a:ln>
+                <a:latin typeface="Times New Roman"/>
+                <a:ea typeface="맑은 고딕"/>
+                <a:cs typeface="Times New Roman"/>
+              </a:rPr>
+              <a:t>FN </a:t>
+            </a:r>
+            <a:r>
+              <a:rPr lang="ko-KR" altLang="en-US" sz="2000" dirty="0">
+                <a:ln w="9525">
+                  <a:solidFill>
+                    <a:schemeClr val="tx1">
+                      <a:alpha val="29000"/>
+                    </a:schemeClr>
+                  </a:solidFill>
+                </a:ln>
+                <a:latin typeface="Times New Roman"/>
+                <a:ea typeface="맑은 고딕"/>
+                <a:cs typeface="Times New Roman"/>
+              </a:rPr>
+              <a:t>터널링이 일어날 만큼 강한 전기장이 걸리지만</a:t>
+            </a:r>
+            <a:r>
+              <a:rPr lang="en-US" altLang="ko-KR" sz="2000" dirty="0">
+                <a:ln w="9525">
+                  <a:solidFill>
+                    <a:schemeClr val="tx1">
+                      <a:alpha val="29000"/>
+                    </a:schemeClr>
+                  </a:solidFill>
+                </a:ln>
+                <a:latin typeface="Times New Roman"/>
+                <a:ea typeface="맑은 고딕"/>
+                <a:cs typeface="Times New Roman"/>
+              </a:rPr>
+              <a:t>, retention </a:t>
+            </a:r>
+            <a:r>
+              <a:rPr lang="ko-KR" altLang="en-US" sz="2000" dirty="0">
+                <a:ln w="9525">
+                  <a:solidFill>
+                    <a:schemeClr val="tx1">
+                      <a:alpha val="29000"/>
+                    </a:schemeClr>
+                  </a:solidFill>
+                </a:ln>
+                <a:latin typeface="Times New Roman"/>
+                <a:ea typeface="맑은 고딕"/>
+                <a:cs typeface="Times New Roman"/>
+              </a:rPr>
+              <a:t>상황에서는 </a:t>
+            </a:r>
+            <a:r>
+              <a:rPr lang="en-US" altLang="ko-KR" sz="2000" dirty="0">
+                <a:ln w="9525">
+                  <a:solidFill>
+                    <a:schemeClr val="tx1">
+                      <a:alpha val="29000"/>
+                    </a:schemeClr>
+                  </a:solidFill>
+                </a:ln>
+                <a:latin typeface="Times New Roman"/>
+                <a:ea typeface="맑은 고딕"/>
+                <a:cs typeface="Times New Roman"/>
+              </a:rPr>
+              <a:t>direct</a:t>
+            </a:r>
+            <a:r>
+              <a:rPr lang="ko-KR" altLang="en-US" sz="2000" dirty="0">
+                <a:ln w="9525">
+                  <a:solidFill>
+                    <a:schemeClr val="tx1">
+                      <a:alpha val="29000"/>
+                    </a:schemeClr>
+                  </a:solidFill>
+                </a:ln>
+                <a:latin typeface="Times New Roman"/>
+                <a:ea typeface="맑은 고딕"/>
+                <a:cs typeface="Times New Roman"/>
+              </a:rPr>
+              <a:t> </a:t>
+            </a:r>
+            <a:r>
+              <a:rPr lang="ko-KR" altLang="en-US" sz="2000" dirty="0" err="1">
+                <a:ln w="9525">
+                  <a:solidFill>
+                    <a:schemeClr val="tx1">
+                      <a:alpha val="29000"/>
+                    </a:schemeClr>
+                  </a:solidFill>
+                </a:ln>
+                <a:latin typeface="Times New Roman"/>
+                <a:ea typeface="맑은 고딕"/>
+                <a:cs typeface="Times New Roman"/>
+              </a:rPr>
+              <a:t>터널링</a:t>
+            </a:r>
+            <a:r>
+              <a:rPr lang="ko-KR" altLang="en-US" sz="2000" dirty="0">
+                <a:ln w="9525">
+                  <a:solidFill>
+                    <a:schemeClr val="tx1">
+                      <a:alpha val="29000"/>
+                    </a:schemeClr>
+                  </a:solidFill>
+                </a:ln>
+                <a:latin typeface="Times New Roman"/>
+                <a:ea typeface="맑은 고딕"/>
+                <a:cs typeface="Times New Roman"/>
+              </a:rPr>
+              <a:t> 대신 </a:t>
+            </a:r>
+            <a:r>
+              <a:rPr lang="en-US" altLang="ko-KR" sz="2000" dirty="0">
+                <a:ln w="9525">
+                  <a:solidFill>
+                    <a:schemeClr val="tx1">
+                      <a:alpha val="29000"/>
+                    </a:schemeClr>
+                  </a:solidFill>
+                </a:ln>
+                <a:latin typeface="Times New Roman"/>
+                <a:ea typeface="맑은 고딕"/>
+                <a:cs typeface="Times New Roman"/>
+              </a:rPr>
+              <a:t>trap-to-band </a:t>
+            </a:r>
+            <a:r>
+              <a:rPr lang="ko-KR" altLang="en-US" sz="2000" dirty="0">
+                <a:ln w="9525">
+                  <a:solidFill>
+                    <a:schemeClr val="tx1">
+                      <a:alpha val="29000"/>
+                    </a:schemeClr>
+                  </a:solidFill>
+                </a:ln>
+                <a:latin typeface="Times New Roman"/>
+                <a:ea typeface="맑은 고딕"/>
+                <a:cs typeface="Times New Roman"/>
+              </a:rPr>
+              <a:t>터널링이 주로 </a:t>
+            </a:r>
+            <a:r>
+              <a:rPr lang="ko-KR" altLang="en-US" sz="2000" dirty="0" err="1">
+                <a:ln w="9525">
+                  <a:solidFill>
+                    <a:schemeClr val="tx1">
+                      <a:alpha val="29000"/>
+                    </a:schemeClr>
+                  </a:solidFill>
+                </a:ln>
+                <a:latin typeface="Times New Roman"/>
+                <a:ea typeface="맑은 고딕"/>
+                <a:cs typeface="Times New Roman"/>
+              </a:rPr>
+              <a:t>일어남</a:t>
+            </a:r>
+            <a:endParaRPr lang="ko-KR" altLang="en-US" sz="2000" dirty="0">
               <a:ln w="9525">
                 <a:solidFill>
                   <a:schemeClr val="tx1">
@@ -11421,6 +18221,196 @@
           </a:p>
         </p:txBody>
       </p:sp>
+      <p:sp>
+        <p:nvSpPr>
+          <p:cNvPr id="3" name="TextBox 2">
+            <a:extLst>
+              <a:ext uri="{FF2B5EF4-FFF2-40B4-BE49-F238E27FC236}">
+                <a16:creationId xmlns:a16="http://schemas.microsoft.com/office/drawing/2014/main" id="{8E9E2555-6D5A-9263-CB11-FA6B6D380A4F}"/>
+              </a:ext>
+            </a:extLst>
+          </p:cNvPr>
+          <p:cNvSpPr txBox="1"/>
+          <p:nvPr/>
+        </p:nvSpPr>
+        <p:spPr>
+          <a:xfrm>
+            <a:off x="7777640" y="6205303"/>
+            <a:ext cx="1366360" cy="261610"/>
+          </a:xfrm>
+          <a:prstGeom prst="rect">
+            <a:avLst/>
+          </a:prstGeom>
+          <a:noFill/>
+        </p:spPr>
+        <p:txBody>
+          <a:bodyPr wrap="square" rtlCol="0">
+            <a:spAutoFit/>
+          </a:bodyPr>
+          <a:lstStyle/>
+          <a:p>
+            <a:pPr algn="r"/>
+            <a:r>
+              <a:rPr lang="en-US" altLang="ko-KR" sz="1050" b="1" i="1" dirty="0">
+                <a:ln w="9525">
+                  <a:solidFill>
+                    <a:schemeClr val="tx1">
+                      <a:alpha val="29000"/>
+                    </a:schemeClr>
+                  </a:solidFill>
+                </a:ln>
+                <a:solidFill>
+                  <a:schemeClr val="bg1">
+                    <a:lumMod val="65000"/>
+                  </a:schemeClr>
+                </a:solidFill>
+                <a:latin typeface="Times New Roman"/>
+                <a:ea typeface="맑은 고딕"/>
+                <a:cs typeface="Times New Roman"/>
+              </a:rPr>
+              <a:t>[1] Jin, TED (2025)</a:t>
+            </a:r>
+            <a:endParaRPr lang="ko-KR" altLang="en-US" sz="1050" b="1" i="1" dirty="0">
+              <a:ln w="9525">
+                <a:solidFill>
+                  <a:schemeClr val="tx1">
+                    <a:alpha val="29000"/>
+                  </a:schemeClr>
+                </a:solidFill>
+              </a:ln>
+              <a:solidFill>
+                <a:schemeClr val="bg1">
+                  <a:lumMod val="65000"/>
+                </a:schemeClr>
+              </a:solidFill>
+              <a:latin typeface="Times New Roman"/>
+              <a:ea typeface="맑은 고딕"/>
+              <a:cs typeface="Times New Roman"/>
+            </a:endParaRPr>
+          </a:p>
+        </p:txBody>
+      </p:sp>
+      <p:pic>
+        <p:nvPicPr>
+          <p:cNvPr id="5" name="그림 4">
+            <a:extLst>
+              <a:ext uri="{FF2B5EF4-FFF2-40B4-BE49-F238E27FC236}">
+                <a16:creationId xmlns:a16="http://schemas.microsoft.com/office/drawing/2014/main" id="{83654E95-7B48-71F3-9382-573C6053EC9B}"/>
+              </a:ext>
+            </a:extLst>
+          </p:cNvPr>
+          <p:cNvPicPr>
+            <a:picLocks noChangeAspect="1"/>
+          </p:cNvPicPr>
+          <p:nvPr/>
+        </p:nvPicPr>
+        <p:blipFill>
+          <a:blip r:embed="rId2"/>
+          <a:stretch>
+            <a:fillRect/>
+          </a:stretch>
+        </p:blipFill>
+        <p:spPr>
+          <a:xfrm>
+            <a:off x="3295123" y="1203236"/>
+            <a:ext cx="2438927" cy="412647"/>
+          </a:xfrm>
+          <a:prstGeom prst="rect">
+            <a:avLst/>
+          </a:prstGeom>
+        </p:spPr>
+      </p:pic>
+      <p:pic>
+        <p:nvPicPr>
+          <p:cNvPr id="7" name="그림 6">
+            <a:extLst>
+              <a:ext uri="{FF2B5EF4-FFF2-40B4-BE49-F238E27FC236}">
+                <a16:creationId xmlns:a16="http://schemas.microsoft.com/office/drawing/2014/main" id="{D0E53AB0-8193-AD84-2947-BC2CA446A50B}"/>
+              </a:ext>
+            </a:extLst>
+          </p:cNvPr>
+          <p:cNvPicPr>
+            <a:picLocks noChangeAspect="1"/>
+          </p:cNvPicPr>
+          <p:nvPr/>
+        </p:nvPicPr>
+        <p:blipFill>
+          <a:blip r:embed="rId3"/>
+          <a:stretch>
+            <a:fillRect/>
+          </a:stretch>
+        </p:blipFill>
+        <p:spPr>
+          <a:xfrm>
+            <a:off x="2831533" y="3041276"/>
+            <a:ext cx="3918517" cy="699078"/>
+          </a:xfrm>
+          <a:prstGeom prst="rect">
+            <a:avLst/>
+          </a:prstGeom>
+        </p:spPr>
+      </p:pic>
+      <p:pic>
+        <p:nvPicPr>
+          <p:cNvPr id="9" name="그림 8">
+            <a:extLst>
+              <a:ext uri="{FF2B5EF4-FFF2-40B4-BE49-F238E27FC236}">
+                <a16:creationId xmlns:a16="http://schemas.microsoft.com/office/drawing/2014/main" id="{CF5FF37E-6AED-5563-AB75-CD3E193D95D5}"/>
+              </a:ext>
+            </a:extLst>
+          </p:cNvPr>
+          <p:cNvPicPr>
+            <a:picLocks noChangeAspect="1"/>
+          </p:cNvPicPr>
+          <p:nvPr/>
+        </p:nvPicPr>
+        <p:blipFill>
+          <a:blip r:embed="rId4"/>
+          <a:stretch>
+            <a:fillRect/>
+          </a:stretch>
+        </p:blipFill>
+        <p:spPr>
+          <a:xfrm>
+            <a:off x="956480" y="4823427"/>
+            <a:ext cx="3558106" cy="520699"/>
+          </a:xfrm>
+          <a:prstGeom prst="rect">
+            <a:avLst/>
+          </a:prstGeom>
+        </p:spPr>
+      </p:pic>
+      <p:pic>
+        <p:nvPicPr>
+          <p:cNvPr id="11" name="그림 10">
+            <a:extLst>
+              <a:ext uri="{FF2B5EF4-FFF2-40B4-BE49-F238E27FC236}">
+                <a16:creationId xmlns:a16="http://schemas.microsoft.com/office/drawing/2014/main" id="{3E5B9C51-92F8-FA00-5CCD-CC60ED6BB9CC}"/>
+              </a:ext>
+            </a:extLst>
+          </p:cNvPr>
+          <p:cNvPicPr>
+            <a:picLocks noChangeAspect="1"/>
+          </p:cNvPicPr>
+          <p:nvPr/>
+        </p:nvPicPr>
+        <p:blipFill>
+          <a:blip r:embed="rId5"/>
+          <a:srcRect l="12273"/>
+          <a:stretch>
+            <a:fillRect/>
+          </a:stretch>
+        </p:blipFill>
+        <p:spPr>
+          <a:xfrm>
+            <a:off x="4572000" y="4753195"/>
+            <a:ext cx="3805756" cy="590931"/>
+          </a:xfrm>
+          <a:prstGeom prst="rect">
+            <a:avLst/>
+          </a:prstGeom>
+        </p:spPr>
+      </p:pic>
     </p:spTree>
     <p:extLst>
       <p:ext uri="{BB962C8B-B14F-4D97-AF65-F5344CB8AC3E}">
@@ -11435,71 +18425,6 @@
 </file>
 
 <file path=ppt/slides/slide5.xml><?xml version="1.0" encoding="utf-8"?>
-<p:sld xmlns:a="http://schemas.openxmlformats.org/drawingml/2006/main" xmlns:r="http://schemas.openxmlformats.org/officeDocument/2006/relationships" xmlns:p="http://schemas.openxmlformats.org/presentationml/2006/main">
-  <p:cSld>
-    <p:spTree>
-      <p:nvGrpSpPr>
-        <p:cNvPr id="1" name="">
-          <a:extLst>
-            <a:ext uri="{FF2B5EF4-FFF2-40B4-BE49-F238E27FC236}">
-              <a16:creationId xmlns:a16="http://schemas.microsoft.com/office/drawing/2014/main" id="{8A04AFBC-FA2B-9EFB-C39C-64EFC87E7ECA}"/>
-            </a:ext>
-          </a:extLst>
-        </p:cNvPr>
-        <p:cNvGrpSpPr/>
-        <p:nvPr/>
-      </p:nvGrpSpPr>
-      <p:grpSpPr>
-        <a:xfrm>
-          <a:off x="0" y="0"/>
-          <a:ext cx="0" cy="0"/>
-          <a:chOff x="0" y="0"/>
-          <a:chExt cx="0" cy="0"/>
-        </a:xfrm>
-      </p:grpSpPr>
-      <p:sp>
-        <p:nvSpPr>
-          <p:cNvPr id="2" name="제목 1">
-            <a:extLst>
-              <a:ext uri="{FF2B5EF4-FFF2-40B4-BE49-F238E27FC236}">
-                <a16:creationId xmlns:a16="http://schemas.microsoft.com/office/drawing/2014/main" id="{70EEFD29-E6BE-CE20-6575-EDCED6D30CA6}"/>
-              </a:ext>
-            </a:extLst>
-          </p:cNvPr>
-          <p:cNvSpPr>
-            <a:spLocks noGrp="1"/>
-          </p:cNvSpPr>
-          <p:nvPr>
-            <p:ph type="title"/>
-          </p:nvPr>
-        </p:nvSpPr>
-        <p:spPr/>
-        <p:txBody>
-          <a:bodyPr/>
-          <a:lstStyle/>
-          <a:p>
-            <a:r>
-              <a:rPr lang="en-US" altLang="ko-KR" dirty="0"/>
-              <a:t>Constant Trap Volume Modeling</a:t>
-            </a:r>
-            <a:endParaRPr lang="ko-KR" altLang="en-US" dirty="0"/>
-          </a:p>
-        </p:txBody>
-      </p:sp>
-    </p:spTree>
-    <p:extLst>
-      <p:ext uri="{BB962C8B-B14F-4D97-AF65-F5344CB8AC3E}">
-        <p14:creationId xmlns:p14="http://schemas.microsoft.com/office/powerpoint/2010/main" val="1205345238"/>
-      </p:ext>
-    </p:extLst>
-  </p:cSld>
-  <p:clrMapOvr>
-    <a:masterClrMapping/>
-  </p:clrMapOvr>
-</p:sld>
-</file>
-
-<file path=ppt/slides/slide6.xml><?xml version="1.0" encoding="utf-8"?>
 <p:sld xmlns:a="http://schemas.openxmlformats.org/drawingml/2006/main" xmlns:r="http://schemas.openxmlformats.org/officeDocument/2006/relationships" xmlns:p="http://schemas.openxmlformats.org/presentationml/2006/main">
   <p:cSld>
     <p:spTree>
@@ -11539,6 +18464,1124 @@
           <a:p>
             <a:r>
               <a:rPr lang="en-US" altLang="ko-KR" dirty="0"/>
+              <a:t>CTN Trapped Electron </a:t>
+            </a:r>
+            <a:r>
+              <a:rPr lang="en-US" altLang="ko-KR" dirty="0" err="1"/>
+              <a:t>Detrapping</a:t>
+            </a:r>
+            <a:endParaRPr lang="ko-KR" altLang="en-US" dirty="0"/>
+          </a:p>
+        </p:txBody>
+      </p:sp>
+      <p:sp>
+        <p:nvSpPr>
+          <p:cNvPr id="5" name="TextBox 4">
+            <a:extLst>
+              <a:ext uri="{FF2B5EF4-FFF2-40B4-BE49-F238E27FC236}">
+                <a16:creationId xmlns:a16="http://schemas.microsoft.com/office/drawing/2014/main" id="{72B9E240-0629-BB38-4F1A-31651C51E6ED}"/>
+              </a:ext>
+            </a:extLst>
+          </p:cNvPr>
+          <p:cNvSpPr txBox="1"/>
+          <p:nvPr/>
+        </p:nvSpPr>
+        <p:spPr>
+          <a:xfrm>
+            <a:off x="409443" y="1097965"/>
+            <a:ext cx="8640428" cy="400110"/>
+          </a:xfrm>
+          <a:prstGeom prst="rect">
+            <a:avLst/>
+          </a:prstGeom>
+          <a:noFill/>
+        </p:spPr>
+        <p:txBody>
+          <a:bodyPr wrap="square" rtlCol="0">
+            <a:spAutoFit/>
+          </a:bodyPr>
+          <a:lstStyle/>
+          <a:p>
+            <a:r>
+              <a:rPr lang="en-US" altLang="ko-KR" sz="2000" dirty="0">
+                <a:ln w="9525">
+                  <a:solidFill>
+                    <a:schemeClr val="tx1">
+                      <a:alpha val="29000"/>
+                    </a:schemeClr>
+                  </a:solidFill>
+                </a:ln>
+                <a:latin typeface="Times New Roman"/>
+                <a:ea typeface="맑은 고딕"/>
+                <a:cs typeface="Times New Roman"/>
+              </a:rPr>
+              <a:t>BETOX</a:t>
+            </a:r>
+            <a:r>
+              <a:rPr lang="ko-KR" altLang="en-US" sz="2000" dirty="0">
+                <a:ln w="9525">
+                  <a:solidFill>
+                    <a:schemeClr val="tx1">
+                      <a:alpha val="29000"/>
+                    </a:schemeClr>
+                  </a:solidFill>
+                </a:ln>
+                <a:latin typeface="Times New Roman"/>
+                <a:ea typeface="맑은 고딕"/>
+                <a:cs typeface="Times New Roman"/>
+              </a:rPr>
+              <a:t> 내의 전자들의 </a:t>
+            </a:r>
+            <a:r>
+              <a:rPr lang="en-US" altLang="ko-KR" sz="2000" dirty="0" err="1">
+                <a:ln w="9525">
+                  <a:solidFill>
+                    <a:schemeClr val="tx1">
+                      <a:alpha val="29000"/>
+                    </a:schemeClr>
+                  </a:solidFill>
+                </a:ln>
+                <a:latin typeface="Times New Roman"/>
+                <a:ea typeface="맑은 고딕"/>
+                <a:cs typeface="Times New Roman"/>
+              </a:rPr>
+              <a:t>Detrapping</a:t>
+            </a:r>
+            <a:r>
+              <a:rPr lang="ko-KR" altLang="en-US" sz="2000" dirty="0">
+                <a:ln w="9525">
+                  <a:solidFill>
+                    <a:schemeClr val="tx1">
+                      <a:alpha val="29000"/>
+                    </a:schemeClr>
+                  </a:solidFill>
+                </a:ln>
+                <a:latin typeface="Times New Roman"/>
+                <a:ea typeface="맑은 고딕"/>
+                <a:cs typeface="Times New Roman"/>
+              </a:rPr>
+              <a:t>이 </a:t>
+            </a:r>
+            <a:r>
+              <a:rPr lang="en-US" altLang="ko-KR" sz="2000" dirty="0">
+                <a:ln w="9525">
+                  <a:solidFill>
+                    <a:schemeClr val="tx1">
+                      <a:alpha val="29000"/>
+                    </a:schemeClr>
+                  </a:solidFill>
+                </a:ln>
+                <a:latin typeface="Times New Roman"/>
+                <a:ea typeface="맑은 고딕"/>
+                <a:cs typeface="Times New Roman"/>
+              </a:rPr>
+              <a:t>CTN</a:t>
+            </a:r>
+            <a:r>
+              <a:rPr lang="ko-KR" altLang="en-US" sz="2000" dirty="0">
+                <a:ln w="9525">
+                  <a:solidFill>
+                    <a:schemeClr val="tx1">
+                      <a:alpha val="29000"/>
+                    </a:schemeClr>
+                  </a:solidFill>
+                </a:ln>
+                <a:latin typeface="Times New Roman"/>
+                <a:ea typeface="맑은 고딕"/>
+                <a:cs typeface="Times New Roman"/>
+              </a:rPr>
+              <a:t>에서도 동일하게 모델링 적용 가능 </a:t>
+            </a:r>
+          </a:p>
+        </p:txBody>
+      </p:sp>
+      <p:sp>
+        <p:nvSpPr>
+          <p:cNvPr id="6" name="TextBox 5">
+            <a:extLst>
+              <a:ext uri="{FF2B5EF4-FFF2-40B4-BE49-F238E27FC236}">
+                <a16:creationId xmlns:a16="http://schemas.microsoft.com/office/drawing/2014/main" id="{1CEE526A-F38A-B804-66AD-0446ED93057E}"/>
+              </a:ext>
+            </a:extLst>
+          </p:cNvPr>
+          <p:cNvSpPr txBox="1"/>
+          <p:nvPr/>
+        </p:nvSpPr>
+        <p:spPr>
+          <a:xfrm>
+            <a:off x="7777640" y="6205303"/>
+            <a:ext cx="1366360" cy="261610"/>
+          </a:xfrm>
+          <a:prstGeom prst="rect">
+            <a:avLst/>
+          </a:prstGeom>
+          <a:noFill/>
+        </p:spPr>
+        <p:txBody>
+          <a:bodyPr wrap="square" rtlCol="0">
+            <a:spAutoFit/>
+          </a:bodyPr>
+          <a:lstStyle/>
+          <a:p>
+            <a:pPr algn="r"/>
+            <a:r>
+              <a:rPr lang="en-US" altLang="ko-KR" sz="1050" b="1" i="1" dirty="0">
+                <a:ln w="9525">
+                  <a:solidFill>
+                    <a:schemeClr val="tx1">
+                      <a:alpha val="29000"/>
+                    </a:schemeClr>
+                  </a:solidFill>
+                </a:ln>
+                <a:solidFill>
+                  <a:schemeClr val="bg1">
+                    <a:lumMod val="65000"/>
+                  </a:schemeClr>
+                </a:solidFill>
+                <a:latin typeface="Times New Roman"/>
+                <a:ea typeface="맑은 고딕"/>
+                <a:cs typeface="Times New Roman"/>
+              </a:rPr>
+              <a:t>[2] Jin, EDL (2026)</a:t>
+            </a:r>
+            <a:endParaRPr lang="ko-KR" altLang="en-US" sz="1050" b="1" i="1" dirty="0">
+              <a:ln w="9525">
+                <a:solidFill>
+                  <a:schemeClr val="tx1">
+                    <a:alpha val="29000"/>
+                  </a:schemeClr>
+                </a:solidFill>
+              </a:ln>
+              <a:solidFill>
+                <a:schemeClr val="bg1">
+                  <a:lumMod val="65000"/>
+                </a:schemeClr>
+              </a:solidFill>
+              <a:latin typeface="Times New Roman"/>
+              <a:ea typeface="맑은 고딕"/>
+              <a:cs typeface="Times New Roman"/>
+            </a:endParaRPr>
+          </a:p>
+        </p:txBody>
+      </p:sp>
+      <p:pic>
+        <p:nvPicPr>
+          <p:cNvPr id="28" name="그림 27" descr="로고, 그래픽, 디자인이(가) 표시된 사진&#10;&#10;자동 생성된 설명">
+            <a:extLst>
+              <a:ext uri="{FF2B5EF4-FFF2-40B4-BE49-F238E27FC236}">
+                <a16:creationId xmlns:a16="http://schemas.microsoft.com/office/drawing/2014/main" id="{D9283FB3-D2EA-71B6-0D43-832C5FA256BA}"/>
+              </a:ext>
+            </a:extLst>
+          </p:cNvPr>
+          <p:cNvPicPr>
+            <a:picLocks noChangeAspect="1"/>
+          </p:cNvPicPr>
+          <p:nvPr/>
+        </p:nvPicPr>
+        <p:blipFill>
+          <a:blip r:embed="rId2" cstate="print">
+            <a:extLst>
+              <a:ext uri="{28A0092B-C50C-407E-A947-70E740481C1C}">
+                <a14:useLocalDpi xmlns:a14="http://schemas.microsoft.com/office/drawing/2010/main" val="0"/>
+              </a:ext>
+            </a:extLst>
+          </a:blip>
+          <a:srcRect l="48303" t="12315" r="12187"/>
+          <a:stretch/>
+        </p:blipFill>
+        <p:spPr>
+          <a:xfrm>
+            <a:off x="879316" y="1497361"/>
+            <a:ext cx="2064544" cy="2577269"/>
+          </a:xfrm>
+          <a:prstGeom prst="rect">
+            <a:avLst/>
+          </a:prstGeom>
+        </p:spPr>
+      </p:pic>
+      <p:cxnSp>
+        <p:nvCxnSpPr>
+          <p:cNvPr id="30" name="직선 화살표 연결선 29">
+            <a:extLst>
+              <a:ext uri="{FF2B5EF4-FFF2-40B4-BE49-F238E27FC236}">
+                <a16:creationId xmlns:a16="http://schemas.microsoft.com/office/drawing/2014/main" id="{683CB947-9797-7136-EFB0-3EE761F6EEA4}"/>
+              </a:ext>
+            </a:extLst>
+          </p:cNvPr>
+          <p:cNvCxnSpPr/>
+          <p:nvPr/>
+        </p:nvCxnSpPr>
+        <p:spPr>
+          <a:xfrm flipH="1" flipV="1">
+            <a:off x="1540054" y="3351576"/>
+            <a:ext cx="126668" cy="38384"/>
+          </a:xfrm>
+          <a:prstGeom prst="straightConnector1">
+            <a:avLst/>
+          </a:prstGeom>
+          <a:ln>
+            <a:solidFill>
+              <a:srgbClr val="BF7687"/>
+            </a:solidFill>
+            <a:tailEnd type="triangle"/>
+          </a:ln>
+        </p:spPr>
+        <p:style>
+          <a:lnRef idx="2">
+            <a:schemeClr val="accent1"/>
+          </a:lnRef>
+          <a:fillRef idx="0">
+            <a:schemeClr val="accent1"/>
+          </a:fillRef>
+          <a:effectRef idx="1">
+            <a:schemeClr val="accent1"/>
+          </a:effectRef>
+          <a:fontRef idx="minor">
+            <a:schemeClr val="tx1"/>
+          </a:fontRef>
+        </p:style>
+      </p:cxnSp>
+      <p:cxnSp>
+        <p:nvCxnSpPr>
+          <p:cNvPr id="31" name="직선 화살표 연결선 30">
+            <a:extLst>
+              <a:ext uri="{FF2B5EF4-FFF2-40B4-BE49-F238E27FC236}">
+                <a16:creationId xmlns:a16="http://schemas.microsoft.com/office/drawing/2014/main" id="{274B63A8-E235-4497-5093-7D94C692928B}"/>
+              </a:ext>
+            </a:extLst>
+          </p:cNvPr>
+          <p:cNvCxnSpPr/>
+          <p:nvPr/>
+        </p:nvCxnSpPr>
+        <p:spPr>
+          <a:xfrm flipH="1" flipV="1">
+            <a:off x="1540054" y="3269423"/>
+            <a:ext cx="126668" cy="38384"/>
+          </a:xfrm>
+          <a:prstGeom prst="straightConnector1">
+            <a:avLst/>
+          </a:prstGeom>
+          <a:ln>
+            <a:solidFill>
+              <a:srgbClr val="BF7687"/>
+            </a:solidFill>
+            <a:tailEnd type="triangle"/>
+          </a:ln>
+        </p:spPr>
+        <p:style>
+          <a:lnRef idx="2">
+            <a:schemeClr val="accent1"/>
+          </a:lnRef>
+          <a:fillRef idx="0">
+            <a:schemeClr val="accent1"/>
+          </a:fillRef>
+          <a:effectRef idx="1">
+            <a:schemeClr val="accent1"/>
+          </a:effectRef>
+          <a:fontRef idx="minor">
+            <a:schemeClr val="tx1"/>
+          </a:fontRef>
+        </p:style>
+      </p:cxnSp>
+      <p:cxnSp>
+        <p:nvCxnSpPr>
+          <p:cNvPr id="32" name="직선 화살표 연결선 31">
+            <a:extLst>
+              <a:ext uri="{FF2B5EF4-FFF2-40B4-BE49-F238E27FC236}">
+                <a16:creationId xmlns:a16="http://schemas.microsoft.com/office/drawing/2014/main" id="{63A5FE3D-1ECC-DD84-A284-F60E2954D76F}"/>
+              </a:ext>
+            </a:extLst>
+          </p:cNvPr>
+          <p:cNvCxnSpPr/>
+          <p:nvPr/>
+        </p:nvCxnSpPr>
+        <p:spPr>
+          <a:xfrm flipH="1" flipV="1">
+            <a:off x="1540054" y="3187270"/>
+            <a:ext cx="126668" cy="38384"/>
+          </a:xfrm>
+          <a:prstGeom prst="straightConnector1">
+            <a:avLst/>
+          </a:prstGeom>
+          <a:ln>
+            <a:solidFill>
+              <a:srgbClr val="BF7687"/>
+            </a:solidFill>
+            <a:tailEnd type="triangle"/>
+          </a:ln>
+        </p:spPr>
+        <p:style>
+          <a:lnRef idx="2">
+            <a:schemeClr val="accent1"/>
+          </a:lnRef>
+          <a:fillRef idx="0">
+            <a:schemeClr val="accent1"/>
+          </a:fillRef>
+          <a:effectRef idx="1">
+            <a:schemeClr val="accent1"/>
+          </a:effectRef>
+          <a:fontRef idx="minor">
+            <a:schemeClr val="tx1"/>
+          </a:fontRef>
+        </p:style>
+      </p:cxnSp>
+      <p:cxnSp>
+        <p:nvCxnSpPr>
+          <p:cNvPr id="33" name="직선 화살표 연결선 32">
+            <a:extLst>
+              <a:ext uri="{FF2B5EF4-FFF2-40B4-BE49-F238E27FC236}">
+                <a16:creationId xmlns:a16="http://schemas.microsoft.com/office/drawing/2014/main" id="{443B4534-DFB9-8E50-95CD-EABA02011F20}"/>
+              </a:ext>
+            </a:extLst>
+          </p:cNvPr>
+          <p:cNvCxnSpPr/>
+          <p:nvPr/>
+        </p:nvCxnSpPr>
+        <p:spPr>
+          <a:xfrm flipH="1" flipV="1">
+            <a:off x="1540054" y="3105117"/>
+            <a:ext cx="126668" cy="38384"/>
+          </a:xfrm>
+          <a:prstGeom prst="straightConnector1">
+            <a:avLst/>
+          </a:prstGeom>
+          <a:ln>
+            <a:solidFill>
+              <a:srgbClr val="BF7687"/>
+            </a:solidFill>
+            <a:tailEnd type="triangle"/>
+          </a:ln>
+        </p:spPr>
+        <p:style>
+          <a:lnRef idx="2">
+            <a:schemeClr val="accent1"/>
+          </a:lnRef>
+          <a:fillRef idx="0">
+            <a:schemeClr val="accent1"/>
+          </a:fillRef>
+          <a:effectRef idx="1">
+            <a:schemeClr val="accent1"/>
+          </a:effectRef>
+          <a:fontRef idx="minor">
+            <a:schemeClr val="tx1"/>
+          </a:fontRef>
+        </p:style>
+      </p:cxnSp>
+      <p:cxnSp>
+        <p:nvCxnSpPr>
+          <p:cNvPr id="34" name="직선 화살표 연결선 33">
+            <a:extLst>
+              <a:ext uri="{FF2B5EF4-FFF2-40B4-BE49-F238E27FC236}">
+                <a16:creationId xmlns:a16="http://schemas.microsoft.com/office/drawing/2014/main" id="{8CBFA218-0965-EAA5-2837-E7348413EC46}"/>
+              </a:ext>
+            </a:extLst>
+          </p:cNvPr>
+          <p:cNvCxnSpPr/>
+          <p:nvPr/>
+        </p:nvCxnSpPr>
+        <p:spPr>
+          <a:xfrm flipH="1" flipV="1">
+            <a:off x="1540054" y="3022964"/>
+            <a:ext cx="126668" cy="38384"/>
+          </a:xfrm>
+          <a:prstGeom prst="straightConnector1">
+            <a:avLst/>
+          </a:prstGeom>
+          <a:ln>
+            <a:solidFill>
+              <a:srgbClr val="BF7687"/>
+            </a:solidFill>
+            <a:tailEnd type="triangle"/>
+          </a:ln>
+        </p:spPr>
+        <p:style>
+          <a:lnRef idx="2">
+            <a:schemeClr val="accent1"/>
+          </a:lnRef>
+          <a:fillRef idx="0">
+            <a:schemeClr val="accent1"/>
+          </a:fillRef>
+          <a:effectRef idx="1">
+            <a:schemeClr val="accent1"/>
+          </a:effectRef>
+          <a:fontRef idx="minor">
+            <a:schemeClr val="tx1"/>
+          </a:fontRef>
+        </p:style>
+      </p:cxnSp>
+      <p:cxnSp>
+        <p:nvCxnSpPr>
+          <p:cNvPr id="35" name="직선 화살표 연결선 34">
+            <a:extLst>
+              <a:ext uri="{FF2B5EF4-FFF2-40B4-BE49-F238E27FC236}">
+                <a16:creationId xmlns:a16="http://schemas.microsoft.com/office/drawing/2014/main" id="{0876A02E-A8A9-B268-4B9B-8878098356B1}"/>
+              </a:ext>
+            </a:extLst>
+          </p:cNvPr>
+          <p:cNvCxnSpPr/>
+          <p:nvPr/>
+        </p:nvCxnSpPr>
+        <p:spPr>
+          <a:xfrm flipH="1" flipV="1">
+            <a:off x="1540054" y="2935107"/>
+            <a:ext cx="126668" cy="38384"/>
+          </a:xfrm>
+          <a:prstGeom prst="straightConnector1">
+            <a:avLst/>
+          </a:prstGeom>
+          <a:ln>
+            <a:solidFill>
+              <a:srgbClr val="BF7687"/>
+            </a:solidFill>
+            <a:tailEnd type="triangle"/>
+          </a:ln>
+        </p:spPr>
+        <p:style>
+          <a:lnRef idx="2">
+            <a:schemeClr val="accent1"/>
+          </a:lnRef>
+          <a:fillRef idx="0">
+            <a:schemeClr val="accent1"/>
+          </a:fillRef>
+          <a:effectRef idx="1">
+            <a:schemeClr val="accent1"/>
+          </a:effectRef>
+          <a:fontRef idx="minor">
+            <a:schemeClr val="tx1"/>
+          </a:fontRef>
+        </p:style>
+      </p:cxnSp>
+      <p:cxnSp>
+        <p:nvCxnSpPr>
+          <p:cNvPr id="36" name="직선 화살표 연결선 35">
+            <a:extLst>
+              <a:ext uri="{FF2B5EF4-FFF2-40B4-BE49-F238E27FC236}">
+                <a16:creationId xmlns:a16="http://schemas.microsoft.com/office/drawing/2014/main" id="{1982F78C-7A9C-5942-2849-AFC20C870665}"/>
+              </a:ext>
+            </a:extLst>
+          </p:cNvPr>
+          <p:cNvCxnSpPr/>
+          <p:nvPr/>
+        </p:nvCxnSpPr>
+        <p:spPr>
+          <a:xfrm flipH="1" flipV="1">
+            <a:off x="1540054" y="2859725"/>
+            <a:ext cx="126668" cy="38384"/>
+          </a:xfrm>
+          <a:prstGeom prst="straightConnector1">
+            <a:avLst/>
+          </a:prstGeom>
+          <a:ln>
+            <a:solidFill>
+              <a:srgbClr val="BF7687"/>
+            </a:solidFill>
+            <a:tailEnd type="triangle"/>
+          </a:ln>
+        </p:spPr>
+        <p:style>
+          <a:lnRef idx="2">
+            <a:schemeClr val="accent1"/>
+          </a:lnRef>
+          <a:fillRef idx="0">
+            <a:schemeClr val="accent1"/>
+          </a:fillRef>
+          <a:effectRef idx="1">
+            <a:schemeClr val="accent1"/>
+          </a:effectRef>
+          <a:fontRef idx="minor">
+            <a:schemeClr val="tx1"/>
+          </a:fontRef>
+        </p:style>
+      </p:cxnSp>
+      <p:cxnSp>
+        <p:nvCxnSpPr>
+          <p:cNvPr id="37" name="직선 화살표 연결선 36">
+            <a:extLst>
+              <a:ext uri="{FF2B5EF4-FFF2-40B4-BE49-F238E27FC236}">
+                <a16:creationId xmlns:a16="http://schemas.microsoft.com/office/drawing/2014/main" id="{462E0603-9A36-C1DE-7D06-B99455C6AF91}"/>
+              </a:ext>
+            </a:extLst>
+          </p:cNvPr>
+          <p:cNvCxnSpPr/>
+          <p:nvPr/>
+        </p:nvCxnSpPr>
+        <p:spPr>
+          <a:xfrm flipH="1" flipV="1">
+            <a:off x="1540054" y="2785996"/>
+            <a:ext cx="126668" cy="38384"/>
+          </a:xfrm>
+          <a:prstGeom prst="straightConnector1">
+            <a:avLst/>
+          </a:prstGeom>
+          <a:ln>
+            <a:solidFill>
+              <a:srgbClr val="BF7687"/>
+            </a:solidFill>
+            <a:tailEnd type="triangle"/>
+          </a:ln>
+        </p:spPr>
+        <p:style>
+          <a:lnRef idx="2">
+            <a:schemeClr val="accent1"/>
+          </a:lnRef>
+          <a:fillRef idx="0">
+            <a:schemeClr val="accent1"/>
+          </a:fillRef>
+          <a:effectRef idx="1">
+            <a:schemeClr val="accent1"/>
+          </a:effectRef>
+          <a:fontRef idx="minor">
+            <a:schemeClr val="tx1"/>
+          </a:fontRef>
+        </p:style>
+      </p:cxnSp>
+      <p:sp>
+        <p:nvSpPr>
+          <p:cNvPr id="38" name="TextBox 37">
+            <a:extLst>
+              <a:ext uri="{FF2B5EF4-FFF2-40B4-BE49-F238E27FC236}">
+                <a16:creationId xmlns:a16="http://schemas.microsoft.com/office/drawing/2014/main" id="{34D2D558-A2D7-86C2-BAF0-913869202D05}"/>
+              </a:ext>
+            </a:extLst>
+          </p:cNvPr>
+          <p:cNvSpPr txBox="1"/>
+          <p:nvPr/>
+        </p:nvSpPr>
+        <p:spPr>
+          <a:xfrm>
+            <a:off x="957153" y="4085693"/>
+            <a:ext cx="1687414" cy="307777"/>
+          </a:xfrm>
+          <a:prstGeom prst="rect">
+            <a:avLst/>
+          </a:prstGeom>
+          <a:noFill/>
+        </p:spPr>
+        <p:txBody>
+          <a:bodyPr wrap="square" rtlCol="0">
+            <a:spAutoFit/>
+          </a:bodyPr>
+          <a:lstStyle/>
+          <a:p>
+            <a:pPr algn="ctr"/>
+            <a:r>
+              <a:rPr lang="en-US" altLang="ko-KR" sz="1400" dirty="0"/>
+              <a:t>Trapped</a:t>
+            </a:r>
+            <a:r>
+              <a:rPr lang="ko-KR" altLang="en-US" sz="1400" dirty="0"/>
+              <a:t> </a:t>
+            </a:r>
+            <a:r>
+              <a:rPr lang="en-US" altLang="ko-KR" sz="1400" dirty="0"/>
+              <a:t>Electrons</a:t>
+            </a:r>
+            <a:endParaRPr lang="ko-KR" altLang="en-US" sz="1400" dirty="0"/>
+          </a:p>
+        </p:txBody>
+      </p:sp>
+      <p:cxnSp>
+        <p:nvCxnSpPr>
+          <p:cNvPr id="39" name="직선 연결선 38">
+            <a:extLst>
+              <a:ext uri="{FF2B5EF4-FFF2-40B4-BE49-F238E27FC236}">
+                <a16:creationId xmlns:a16="http://schemas.microsoft.com/office/drawing/2014/main" id="{1D72DBFE-C971-F8C0-6846-92B874290EA1}"/>
+              </a:ext>
+            </a:extLst>
+          </p:cNvPr>
+          <p:cNvCxnSpPr>
+            <a:cxnSpLocks/>
+            <a:endCxn id="38" idx="0"/>
+          </p:cNvCxnSpPr>
+          <p:nvPr/>
+        </p:nvCxnSpPr>
+        <p:spPr>
+          <a:xfrm>
+            <a:off x="1693704" y="3419389"/>
+            <a:ext cx="107156" cy="666304"/>
+          </a:xfrm>
+          <a:prstGeom prst="line">
+            <a:avLst/>
+          </a:prstGeom>
+          <a:ln>
+            <a:solidFill>
+              <a:schemeClr val="tx1"/>
+            </a:solidFill>
+          </a:ln>
+        </p:spPr>
+        <p:style>
+          <a:lnRef idx="2">
+            <a:schemeClr val="accent1"/>
+          </a:lnRef>
+          <a:fillRef idx="0">
+            <a:schemeClr val="accent1"/>
+          </a:fillRef>
+          <a:effectRef idx="1">
+            <a:schemeClr val="accent1"/>
+          </a:effectRef>
+          <a:fontRef idx="minor">
+            <a:schemeClr val="tx1"/>
+          </a:fontRef>
+        </p:style>
+      </p:cxnSp>
+      <p:cxnSp>
+        <p:nvCxnSpPr>
+          <p:cNvPr id="40" name="직선 연결선 39">
+            <a:extLst>
+              <a:ext uri="{FF2B5EF4-FFF2-40B4-BE49-F238E27FC236}">
+                <a16:creationId xmlns:a16="http://schemas.microsoft.com/office/drawing/2014/main" id="{3317F8B3-E9BE-4B90-24B5-997D956FDD33}"/>
+              </a:ext>
+            </a:extLst>
+          </p:cNvPr>
+          <p:cNvCxnSpPr>
+            <a:cxnSpLocks/>
+            <a:endCxn id="38" idx="0"/>
+          </p:cNvCxnSpPr>
+          <p:nvPr/>
+        </p:nvCxnSpPr>
+        <p:spPr>
+          <a:xfrm flipH="1">
+            <a:off x="1800860" y="3429456"/>
+            <a:ext cx="39287" cy="656237"/>
+          </a:xfrm>
+          <a:prstGeom prst="line">
+            <a:avLst/>
+          </a:prstGeom>
+          <a:ln>
+            <a:solidFill>
+              <a:schemeClr val="tx1"/>
+            </a:solidFill>
+          </a:ln>
+        </p:spPr>
+        <p:style>
+          <a:lnRef idx="2">
+            <a:schemeClr val="accent1"/>
+          </a:lnRef>
+          <a:fillRef idx="0">
+            <a:schemeClr val="accent1"/>
+          </a:fillRef>
+          <a:effectRef idx="1">
+            <a:schemeClr val="accent1"/>
+          </a:effectRef>
+          <a:fontRef idx="minor">
+            <a:schemeClr val="tx1"/>
+          </a:fontRef>
+        </p:style>
+      </p:cxnSp>
+      <p:cxnSp>
+        <p:nvCxnSpPr>
+          <p:cNvPr id="47" name="직선 화살표 연결선 46">
+            <a:extLst>
+              <a:ext uri="{FF2B5EF4-FFF2-40B4-BE49-F238E27FC236}">
+                <a16:creationId xmlns:a16="http://schemas.microsoft.com/office/drawing/2014/main" id="{BC0F3FB5-4CDA-1A16-D2F8-01A712A3CEE0}"/>
+              </a:ext>
+            </a:extLst>
+          </p:cNvPr>
+          <p:cNvCxnSpPr>
+            <a:cxnSpLocks/>
+          </p:cNvCxnSpPr>
+          <p:nvPr/>
+        </p:nvCxnSpPr>
+        <p:spPr>
+          <a:xfrm flipH="1" flipV="1">
+            <a:off x="1563478" y="2746494"/>
+            <a:ext cx="257025" cy="77886"/>
+          </a:xfrm>
+          <a:prstGeom prst="straightConnector1">
+            <a:avLst/>
+          </a:prstGeom>
+          <a:ln>
+            <a:solidFill>
+              <a:srgbClr val="FFFF00"/>
+            </a:solidFill>
+            <a:tailEnd type="triangle"/>
+          </a:ln>
+        </p:spPr>
+        <p:style>
+          <a:lnRef idx="2">
+            <a:schemeClr val="accent1"/>
+          </a:lnRef>
+          <a:fillRef idx="0">
+            <a:schemeClr val="accent1"/>
+          </a:fillRef>
+          <a:effectRef idx="1">
+            <a:schemeClr val="accent1"/>
+          </a:effectRef>
+          <a:fontRef idx="minor">
+            <a:schemeClr val="tx1"/>
+          </a:fontRef>
+        </p:style>
+      </p:cxnSp>
+      <p:cxnSp>
+        <p:nvCxnSpPr>
+          <p:cNvPr id="49" name="직선 화살표 연결선 48">
+            <a:extLst>
+              <a:ext uri="{FF2B5EF4-FFF2-40B4-BE49-F238E27FC236}">
+                <a16:creationId xmlns:a16="http://schemas.microsoft.com/office/drawing/2014/main" id="{589CDBDA-86E8-390E-1093-FE541EA9EE82}"/>
+              </a:ext>
+            </a:extLst>
+          </p:cNvPr>
+          <p:cNvCxnSpPr>
+            <a:cxnSpLocks/>
+          </p:cNvCxnSpPr>
+          <p:nvPr/>
+        </p:nvCxnSpPr>
+        <p:spPr>
+          <a:xfrm flipH="1" flipV="1">
+            <a:off x="1563478" y="2878293"/>
+            <a:ext cx="257025" cy="77886"/>
+          </a:xfrm>
+          <a:prstGeom prst="straightConnector1">
+            <a:avLst/>
+          </a:prstGeom>
+          <a:ln>
+            <a:solidFill>
+              <a:srgbClr val="FFFF00"/>
+            </a:solidFill>
+            <a:tailEnd type="triangle"/>
+          </a:ln>
+        </p:spPr>
+        <p:style>
+          <a:lnRef idx="2">
+            <a:schemeClr val="accent1"/>
+          </a:lnRef>
+          <a:fillRef idx="0">
+            <a:schemeClr val="accent1"/>
+          </a:fillRef>
+          <a:effectRef idx="1">
+            <a:schemeClr val="accent1"/>
+          </a:effectRef>
+          <a:fontRef idx="minor">
+            <a:schemeClr val="tx1"/>
+          </a:fontRef>
+        </p:style>
+      </p:cxnSp>
+      <p:cxnSp>
+        <p:nvCxnSpPr>
+          <p:cNvPr id="50" name="직선 화살표 연결선 49">
+            <a:extLst>
+              <a:ext uri="{FF2B5EF4-FFF2-40B4-BE49-F238E27FC236}">
+                <a16:creationId xmlns:a16="http://schemas.microsoft.com/office/drawing/2014/main" id="{910BFD99-CD26-8CCB-1531-D10FA69ACEF2}"/>
+              </a:ext>
+            </a:extLst>
+          </p:cNvPr>
+          <p:cNvCxnSpPr>
+            <a:cxnSpLocks/>
+          </p:cNvCxnSpPr>
+          <p:nvPr/>
+        </p:nvCxnSpPr>
+        <p:spPr>
+          <a:xfrm flipH="1" flipV="1">
+            <a:off x="1563478" y="3010092"/>
+            <a:ext cx="257025" cy="77886"/>
+          </a:xfrm>
+          <a:prstGeom prst="straightConnector1">
+            <a:avLst/>
+          </a:prstGeom>
+          <a:ln>
+            <a:solidFill>
+              <a:srgbClr val="FFFF00"/>
+            </a:solidFill>
+            <a:tailEnd type="triangle"/>
+          </a:ln>
+        </p:spPr>
+        <p:style>
+          <a:lnRef idx="2">
+            <a:schemeClr val="accent1"/>
+          </a:lnRef>
+          <a:fillRef idx="0">
+            <a:schemeClr val="accent1"/>
+          </a:fillRef>
+          <a:effectRef idx="1">
+            <a:schemeClr val="accent1"/>
+          </a:effectRef>
+          <a:fontRef idx="minor">
+            <a:schemeClr val="tx1"/>
+          </a:fontRef>
+        </p:style>
+      </p:cxnSp>
+      <p:cxnSp>
+        <p:nvCxnSpPr>
+          <p:cNvPr id="51" name="직선 화살표 연결선 50">
+            <a:extLst>
+              <a:ext uri="{FF2B5EF4-FFF2-40B4-BE49-F238E27FC236}">
+                <a16:creationId xmlns:a16="http://schemas.microsoft.com/office/drawing/2014/main" id="{FBBC5560-8F27-43DE-F80C-CD036F98D0FD}"/>
+              </a:ext>
+            </a:extLst>
+          </p:cNvPr>
+          <p:cNvCxnSpPr>
+            <a:cxnSpLocks/>
+          </p:cNvCxnSpPr>
+          <p:nvPr/>
+        </p:nvCxnSpPr>
+        <p:spPr>
+          <a:xfrm flipH="1" flipV="1">
+            <a:off x="1563478" y="3141891"/>
+            <a:ext cx="257025" cy="77886"/>
+          </a:xfrm>
+          <a:prstGeom prst="straightConnector1">
+            <a:avLst/>
+          </a:prstGeom>
+          <a:ln>
+            <a:solidFill>
+              <a:srgbClr val="FFFF00"/>
+            </a:solidFill>
+            <a:tailEnd type="triangle"/>
+          </a:ln>
+        </p:spPr>
+        <p:style>
+          <a:lnRef idx="2">
+            <a:schemeClr val="accent1"/>
+          </a:lnRef>
+          <a:fillRef idx="0">
+            <a:schemeClr val="accent1"/>
+          </a:fillRef>
+          <a:effectRef idx="1">
+            <a:schemeClr val="accent1"/>
+          </a:effectRef>
+          <a:fontRef idx="minor">
+            <a:schemeClr val="tx1"/>
+          </a:fontRef>
+        </p:style>
+      </p:cxnSp>
+      <p:cxnSp>
+        <p:nvCxnSpPr>
+          <p:cNvPr id="52" name="직선 화살표 연결선 51">
+            <a:extLst>
+              <a:ext uri="{FF2B5EF4-FFF2-40B4-BE49-F238E27FC236}">
+                <a16:creationId xmlns:a16="http://schemas.microsoft.com/office/drawing/2014/main" id="{659DB24F-59CA-2D35-7F79-22B40FC99AB8}"/>
+              </a:ext>
+            </a:extLst>
+          </p:cNvPr>
+          <p:cNvCxnSpPr>
+            <a:cxnSpLocks/>
+          </p:cNvCxnSpPr>
+          <p:nvPr/>
+        </p:nvCxnSpPr>
+        <p:spPr>
+          <a:xfrm flipH="1" flipV="1">
+            <a:off x="1563478" y="3273690"/>
+            <a:ext cx="257025" cy="77886"/>
+          </a:xfrm>
+          <a:prstGeom prst="straightConnector1">
+            <a:avLst/>
+          </a:prstGeom>
+          <a:ln>
+            <a:solidFill>
+              <a:srgbClr val="FFFF00"/>
+            </a:solidFill>
+            <a:tailEnd type="triangle"/>
+          </a:ln>
+        </p:spPr>
+        <p:style>
+          <a:lnRef idx="2">
+            <a:schemeClr val="accent1"/>
+          </a:lnRef>
+          <a:fillRef idx="0">
+            <a:schemeClr val="accent1"/>
+          </a:fillRef>
+          <a:effectRef idx="1">
+            <a:schemeClr val="accent1"/>
+          </a:effectRef>
+          <a:fontRef idx="minor">
+            <a:schemeClr val="tx1"/>
+          </a:fontRef>
+        </p:style>
+      </p:cxnSp>
+      <p:cxnSp>
+        <p:nvCxnSpPr>
+          <p:cNvPr id="55" name="직선 화살표 연결선 54">
+            <a:extLst>
+              <a:ext uri="{FF2B5EF4-FFF2-40B4-BE49-F238E27FC236}">
+                <a16:creationId xmlns:a16="http://schemas.microsoft.com/office/drawing/2014/main" id="{80097355-F4A7-EC4F-6957-BDBD02958024}"/>
+              </a:ext>
+            </a:extLst>
+          </p:cNvPr>
+          <p:cNvCxnSpPr>
+            <a:cxnSpLocks/>
+          </p:cNvCxnSpPr>
+          <p:nvPr/>
+        </p:nvCxnSpPr>
+        <p:spPr>
+          <a:xfrm flipH="1" flipV="1">
+            <a:off x="1956394" y="2961254"/>
+            <a:ext cx="326431" cy="98918"/>
+          </a:xfrm>
+          <a:prstGeom prst="straightConnector1">
+            <a:avLst/>
+          </a:prstGeom>
+          <a:ln>
+            <a:solidFill>
+              <a:srgbClr val="FFFF00"/>
+            </a:solidFill>
+            <a:headEnd type="triangle" w="med" len="med"/>
+            <a:tailEnd type="none" w="med" len="med"/>
+          </a:ln>
+        </p:spPr>
+        <p:style>
+          <a:lnRef idx="2">
+            <a:schemeClr val="accent1"/>
+          </a:lnRef>
+          <a:fillRef idx="0">
+            <a:schemeClr val="accent1"/>
+          </a:fillRef>
+          <a:effectRef idx="1">
+            <a:schemeClr val="accent1"/>
+          </a:effectRef>
+          <a:fontRef idx="minor">
+            <a:schemeClr val="tx1"/>
+          </a:fontRef>
+        </p:style>
+      </p:cxnSp>
+      <p:cxnSp>
+        <p:nvCxnSpPr>
+          <p:cNvPr id="56" name="직선 화살표 연결선 55">
+            <a:extLst>
+              <a:ext uri="{FF2B5EF4-FFF2-40B4-BE49-F238E27FC236}">
+                <a16:creationId xmlns:a16="http://schemas.microsoft.com/office/drawing/2014/main" id="{961F4608-2DFB-30FC-1703-FEBAF566A476}"/>
+              </a:ext>
+            </a:extLst>
+          </p:cNvPr>
+          <p:cNvCxnSpPr>
+            <a:cxnSpLocks/>
+          </p:cNvCxnSpPr>
+          <p:nvPr/>
+        </p:nvCxnSpPr>
+        <p:spPr>
+          <a:xfrm flipH="1" flipV="1">
+            <a:off x="1956394" y="3120243"/>
+            <a:ext cx="326431" cy="98918"/>
+          </a:xfrm>
+          <a:prstGeom prst="straightConnector1">
+            <a:avLst/>
+          </a:prstGeom>
+          <a:ln>
+            <a:solidFill>
+              <a:srgbClr val="FFFF00"/>
+            </a:solidFill>
+            <a:headEnd type="triangle" w="med" len="med"/>
+            <a:tailEnd type="none" w="med" len="med"/>
+          </a:ln>
+        </p:spPr>
+        <p:style>
+          <a:lnRef idx="2">
+            <a:schemeClr val="accent1"/>
+          </a:lnRef>
+          <a:fillRef idx="0">
+            <a:schemeClr val="accent1"/>
+          </a:fillRef>
+          <a:effectRef idx="1">
+            <a:schemeClr val="accent1"/>
+          </a:effectRef>
+          <a:fontRef idx="minor">
+            <a:schemeClr val="tx1"/>
+          </a:fontRef>
+        </p:style>
+      </p:cxnSp>
+      <p:cxnSp>
+        <p:nvCxnSpPr>
+          <p:cNvPr id="57" name="직선 화살표 연결선 56">
+            <a:extLst>
+              <a:ext uri="{FF2B5EF4-FFF2-40B4-BE49-F238E27FC236}">
+                <a16:creationId xmlns:a16="http://schemas.microsoft.com/office/drawing/2014/main" id="{CF4811C3-81CD-3DAB-2C09-81AFFD2D3C6D}"/>
+              </a:ext>
+            </a:extLst>
+          </p:cNvPr>
+          <p:cNvCxnSpPr>
+            <a:cxnSpLocks/>
+          </p:cNvCxnSpPr>
+          <p:nvPr/>
+        </p:nvCxnSpPr>
+        <p:spPr>
+          <a:xfrm flipH="1" flipV="1">
+            <a:off x="1956394" y="3279232"/>
+            <a:ext cx="326431" cy="98918"/>
+          </a:xfrm>
+          <a:prstGeom prst="straightConnector1">
+            <a:avLst/>
+          </a:prstGeom>
+          <a:ln>
+            <a:solidFill>
+              <a:srgbClr val="FFFF00"/>
+            </a:solidFill>
+            <a:headEnd type="triangle" w="med" len="med"/>
+            <a:tailEnd type="none" w="med" len="med"/>
+          </a:ln>
+        </p:spPr>
+        <p:style>
+          <a:lnRef idx="2">
+            <a:schemeClr val="accent1"/>
+          </a:lnRef>
+          <a:fillRef idx="0">
+            <a:schemeClr val="accent1"/>
+          </a:fillRef>
+          <a:effectRef idx="1">
+            <a:schemeClr val="accent1"/>
+          </a:effectRef>
+          <a:fontRef idx="minor">
+            <a:schemeClr val="tx1"/>
+          </a:fontRef>
+        </p:style>
+      </p:cxnSp>
+    </p:spTree>
+    <p:extLst>
+      <p:ext uri="{BB962C8B-B14F-4D97-AF65-F5344CB8AC3E}">
+        <p14:creationId xmlns:p14="http://schemas.microsoft.com/office/powerpoint/2010/main" val="2899342611"/>
+      </p:ext>
+    </p:extLst>
+  </p:cSld>
+  <p:clrMapOvr>
+    <a:masterClrMapping/>
+  </p:clrMapOvr>
+</p:sld>
+</file>
+
+<file path=ppt/slides/slide6.xml><?xml version="1.0" encoding="utf-8"?>
+<p:sld xmlns:a="http://schemas.openxmlformats.org/drawingml/2006/main" xmlns:r="http://schemas.openxmlformats.org/officeDocument/2006/relationships" xmlns:p="http://schemas.openxmlformats.org/presentationml/2006/main">
+  <p:cSld>
+    <p:spTree>
+      <p:nvGrpSpPr>
+        <p:cNvPr id="1" name="">
+          <a:extLst>
+            <a:ext uri="{FF2B5EF4-FFF2-40B4-BE49-F238E27FC236}">
+              <a16:creationId xmlns:a16="http://schemas.microsoft.com/office/drawing/2014/main" id="{BC66EED9-289A-C75D-E259-CC198740588A}"/>
+            </a:ext>
+          </a:extLst>
+        </p:cNvPr>
+        <p:cNvGrpSpPr/>
+        <p:nvPr/>
+      </p:nvGrpSpPr>
+      <p:grpSpPr>
+        <a:xfrm>
+          <a:off x="0" y="0"/>
+          <a:ext cx="0" cy="0"/>
+          <a:chOff x="0" y="0"/>
+          <a:chExt cx="0" cy="0"/>
+        </a:xfrm>
+      </p:grpSpPr>
+      <p:sp>
+        <p:nvSpPr>
+          <p:cNvPr id="2" name="제목 1">
+            <a:extLst>
+              <a:ext uri="{FF2B5EF4-FFF2-40B4-BE49-F238E27FC236}">
+                <a16:creationId xmlns:a16="http://schemas.microsoft.com/office/drawing/2014/main" id="{FE5C5F83-BEED-3220-1ABB-195354AAD446}"/>
+              </a:ext>
+            </a:extLst>
+          </p:cNvPr>
+          <p:cNvSpPr>
+            <a:spLocks noGrp="1"/>
+          </p:cNvSpPr>
+          <p:nvPr>
+            <p:ph type="title"/>
+          </p:nvPr>
+        </p:nvSpPr>
+        <p:spPr/>
+        <p:txBody>
+          <a:bodyPr/>
+          <a:lstStyle/>
+          <a:p>
+            <a:r>
+              <a:rPr lang="en-US" altLang="ko-KR" dirty="0"/>
               <a:t>Detailed Poisson Solution</a:t>
             </a:r>
             <a:endParaRPr lang="ko-KR" altLang="en-US" dirty="0"/>
@@ -11550,7 +19593,7 @@
           <p:cNvPr id="4" name="그림 3" descr="텍스트, 폰트, 친필, 화이트이(가) 표시된 사진&#10;&#10;AI 생성 콘텐츠는 정확하지 않을 수 있습니다.">
             <a:extLst>
               <a:ext uri="{FF2B5EF4-FFF2-40B4-BE49-F238E27FC236}">
-                <a16:creationId xmlns:a16="http://schemas.microsoft.com/office/drawing/2014/main" id="{50D68C67-112F-D59D-798A-61F8EF6A504B}"/>
+                <a16:creationId xmlns:a16="http://schemas.microsoft.com/office/drawing/2014/main" id="{A957F814-81C0-B11D-82BA-3C10AE605C52}"/>
               </a:ext>
             </a:extLst>
           </p:cNvPr>
@@ -11580,7 +19623,7 @@
           <p:cNvPr id="5" name="TextBox 4">
             <a:extLst>
               <a:ext uri="{FF2B5EF4-FFF2-40B4-BE49-F238E27FC236}">
-                <a16:creationId xmlns:a16="http://schemas.microsoft.com/office/drawing/2014/main" id="{72B9E240-0629-BB38-4F1A-31651C51E6ED}"/>
+                <a16:creationId xmlns:a16="http://schemas.microsoft.com/office/drawing/2014/main" id="{C205B187-72BA-F9FE-A791-B18A4C829D83}"/>
               </a:ext>
             </a:extLst>
           </p:cNvPr>
@@ -11638,7 +19681,7 @@
           <p:cNvPr id="8" name="그림 7">
             <a:extLst>
               <a:ext uri="{FF2B5EF4-FFF2-40B4-BE49-F238E27FC236}">
-                <a16:creationId xmlns:a16="http://schemas.microsoft.com/office/drawing/2014/main" id="{E9269352-53A1-F43B-BC43-3E1D24378CB0}"/>
+                <a16:creationId xmlns:a16="http://schemas.microsoft.com/office/drawing/2014/main" id="{2E6F4FE7-A57F-6A32-681A-2E4753E4708E}"/>
               </a:ext>
             </a:extLst>
           </p:cNvPr>
@@ -11668,7 +19711,7 @@
           <p:cNvPr id="10" name="그림 9">
             <a:extLst>
               <a:ext uri="{FF2B5EF4-FFF2-40B4-BE49-F238E27FC236}">
-                <a16:creationId xmlns:a16="http://schemas.microsoft.com/office/drawing/2014/main" id="{3132E6C7-A2AF-6132-94DB-8B32FB60157A}"/>
+                <a16:creationId xmlns:a16="http://schemas.microsoft.com/office/drawing/2014/main" id="{D250DDF5-DA6E-192F-24F4-DF6B5E8F2B91}"/>
               </a:ext>
             </a:extLst>
           </p:cNvPr>
@@ -11698,7 +19741,7 @@
           <p:cNvPr id="12" name="그림 11" descr="텍스트, 도표, 폰트, 친필이(가) 표시된 사진&#10;&#10;AI 생성 콘텐츠는 정확하지 않을 수 있습니다.">
             <a:extLst>
               <a:ext uri="{FF2B5EF4-FFF2-40B4-BE49-F238E27FC236}">
-                <a16:creationId xmlns:a16="http://schemas.microsoft.com/office/drawing/2014/main" id="{CD1A7A15-DD41-20BB-F2BE-2717748BB1B4}"/>
+                <a16:creationId xmlns:a16="http://schemas.microsoft.com/office/drawing/2014/main" id="{EBAEC66E-9B73-0F63-EB4A-185634E4260F}"/>
               </a:ext>
             </a:extLst>
           </p:cNvPr>
@@ -11728,7 +19771,7 @@
           <p:cNvPr id="13" name="TextBox 12">
             <a:extLst>
               <a:ext uri="{FF2B5EF4-FFF2-40B4-BE49-F238E27FC236}">
-                <a16:creationId xmlns:a16="http://schemas.microsoft.com/office/drawing/2014/main" id="{1E8D1F3B-22D4-E4A9-9940-9ACEFFA2A103}"/>
+                <a16:creationId xmlns:a16="http://schemas.microsoft.com/office/drawing/2014/main" id="{A38A7378-CDF4-68F4-07FE-EFADAA096305}"/>
               </a:ext>
             </a:extLst>
           </p:cNvPr>
@@ -11786,7 +19829,7 @@
           <p:cNvPr id="14" name="TextBox 13">
             <a:extLst>
               <a:ext uri="{FF2B5EF4-FFF2-40B4-BE49-F238E27FC236}">
-                <a16:creationId xmlns:a16="http://schemas.microsoft.com/office/drawing/2014/main" id="{D5615ADC-A943-7868-73AE-F3A6F75CFDC0}"/>
+                <a16:creationId xmlns:a16="http://schemas.microsoft.com/office/drawing/2014/main" id="{48F19C8A-DB6C-16EB-E305-67194412DE18}"/>
               </a:ext>
             </a:extLst>
           </p:cNvPr>
@@ -11845,7 +19888,7 @@
           <p:cNvPr id="15" name="왼쪽 중괄호 14">
             <a:extLst>
               <a:ext uri="{FF2B5EF4-FFF2-40B4-BE49-F238E27FC236}">
-                <a16:creationId xmlns:a16="http://schemas.microsoft.com/office/drawing/2014/main" id="{9DE84A4D-FA64-C446-F2F2-C9AFF8A348AD}"/>
+                <a16:creationId xmlns:a16="http://schemas.microsoft.com/office/drawing/2014/main" id="{40FB273B-07DE-550B-C6ED-5B1B98A01187}"/>
               </a:ext>
             </a:extLst>
           </p:cNvPr>
@@ -11889,10 +19932,10 @@
       </p:sp>
       <p:sp>
         <p:nvSpPr>
-          <p:cNvPr id="3" name="TextBox 2">
+          <p:cNvPr id="6" name="TextBox 5">
             <a:extLst>
               <a:ext uri="{FF2B5EF4-FFF2-40B4-BE49-F238E27FC236}">
-                <a16:creationId xmlns:a16="http://schemas.microsoft.com/office/drawing/2014/main" id="{45C87C69-9A81-859B-28F5-041833A7424F}"/>
+                <a16:creationId xmlns:a16="http://schemas.microsoft.com/office/drawing/2014/main" id="{FC1F7021-0B12-BAA3-907B-50DE16D8817E}"/>
               </a:ext>
             </a:extLst>
           </p:cNvPr>
@@ -11901,8 +19944,8 @@
         </p:nvSpPr>
         <p:spPr>
           <a:xfrm>
-            <a:off x="0" y="0"/>
-            <a:ext cx="580103" cy="276999"/>
+            <a:off x="7777640" y="6205303"/>
+            <a:ext cx="1366360" cy="261610"/>
           </a:xfrm>
           <a:prstGeom prst="rect">
             <a:avLst/>
@@ -11915,8 +19958,9 @@
           </a:bodyPr>
           <a:lstStyle/>
           <a:p>
-            <a:r>
-              <a:rPr lang="en-US" altLang="ko-KR" sz="1200" dirty="0">
+            <a:pPr algn="r"/>
+            <a:r>
+              <a:rPr lang="en-US" altLang="ko-KR" sz="1050" b="1" i="1" dirty="0">
                 <a:ln w="9525">
                   <a:solidFill>
                     <a:schemeClr val="tx1">
@@ -11924,13 +19968,18 @@
                     </a:schemeClr>
                   </a:solidFill>
                 </a:ln>
+                <a:solidFill>
+                  <a:schemeClr val="bg1">
+                    <a:lumMod val="65000"/>
+                  </a:schemeClr>
+                </a:solidFill>
                 <a:latin typeface="Times New Roman"/>
                 <a:ea typeface="맑은 고딕"/>
                 <a:cs typeface="Times New Roman"/>
               </a:rPr>
-              <a:t>(EDL) </a:t>
-            </a:r>
-            <a:endParaRPr lang="ko-KR" altLang="en-US" sz="1200" dirty="0">
+              <a:t>[2] Jin, EDL (2026)</a:t>
+            </a:r>
+            <a:endParaRPr lang="ko-KR" altLang="en-US" sz="1050" b="1" i="1" dirty="0">
               <a:ln w="9525">
                 <a:solidFill>
                   <a:schemeClr val="tx1">
@@ -11938,6 +19987,11 @@
                   </a:schemeClr>
                 </a:solidFill>
               </a:ln>
+              <a:solidFill>
+                <a:schemeClr val="bg1">
+                  <a:lumMod val="65000"/>
+                </a:schemeClr>
+              </a:solidFill>
               <a:latin typeface="Times New Roman"/>
               <a:ea typeface="맑은 고딕"/>
               <a:cs typeface="Times New Roman"/>
@@ -11948,7 +20002,7 @@
     </p:spTree>
     <p:extLst>
       <p:ext uri="{BB962C8B-B14F-4D97-AF65-F5344CB8AC3E}">
-        <p14:creationId xmlns:p14="http://schemas.microsoft.com/office/powerpoint/2010/main" val="2899342611"/>
+        <p14:creationId xmlns:p14="http://schemas.microsoft.com/office/powerpoint/2010/main" val="3213724876"/>
       </p:ext>
     </p:extLst>
   </p:cSld>
@@ -12284,64 +20338,6 @@
           </a:p>
         </p:txBody>
       </p:sp>
-      <p:sp>
-        <p:nvSpPr>
-          <p:cNvPr id="3" name="TextBox 2">
-            <a:extLst>
-              <a:ext uri="{FF2B5EF4-FFF2-40B4-BE49-F238E27FC236}">
-                <a16:creationId xmlns:a16="http://schemas.microsoft.com/office/drawing/2014/main" id="{648883FD-A382-0CF6-235B-917F9864D37F}"/>
-              </a:ext>
-            </a:extLst>
-          </p:cNvPr>
-          <p:cNvSpPr txBox="1"/>
-          <p:nvPr/>
-        </p:nvSpPr>
-        <p:spPr>
-          <a:xfrm>
-            <a:off x="0" y="0"/>
-            <a:ext cx="580103" cy="276999"/>
-          </a:xfrm>
-          <a:prstGeom prst="rect">
-            <a:avLst/>
-          </a:prstGeom>
-          <a:noFill/>
-        </p:spPr>
-        <p:txBody>
-          <a:bodyPr wrap="square" rtlCol="0">
-            <a:spAutoFit/>
-          </a:bodyPr>
-          <a:lstStyle/>
-          <a:p>
-            <a:r>
-              <a:rPr lang="en-US" altLang="ko-KR" sz="1200" dirty="0">
-                <a:ln w="9525">
-                  <a:solidFill>
-                    <a:schemeClr val="tx1">
-                      <a:alpha val="29000"/>
-                    </a:schemeClr>
-                  </a:solidFill>
-                </a:ln>
-                <a:latin typeface="Times New Roman"/>
-                <a:ea typeface="맑은 고딕"/>
-                <a:cs typeface="Times New Roman"/>
-              </a:rPr>
-              <a:t>(EDL) </a:t>
-            </a:r>
-            <a:endParaRPr lang="ko-KR" altLang="en-US" sz="1200" dirty="0">
-              <a:ln w="9525">
-                <a:solidFill>
-                  <a:schemeClr val="tx1">
-                    <a:alpha val="29000"/>
-                  </a:schemeClr>
-                </a:solidFill>
-              </a:ln>
-              <a:latin typeface="Times New Roman"/>
-              <a:ea typeface="맑은 고딕"/>
-              <a:cs typeface="Times New Roman"/>
-            </a:endParaRPr>
-          </a:p>
-        </p:txBody>
-      </p:sp>
     </p:spTree>
     <p:extLst>
       <p:ext uri="{BB962C8B-B14F-4D97-AF65-F5344CB8AC3E}">
@@ -12467,64 +20463,6 @@
           </a:prstGeom>
         </p:spPr>
       </p:pic>
-      <p:sp>
-        <p:nvSpPr>
-          <p:cNvPr id="3" name="TextBox 2">
-            <a:extLst>
-              <a:ext uri="{FF2B5EF4-FFF2-40B4-BE49-F238E27FC236}">
-                <a16:creationId xmlns:a16="http://schemas.microsoft.com/office/drawing/2014/main" id="{92E077DD-8669-05BE-05BA-1B84CB51944A}"/>
-              </a:ext>
-            </a:extLst>
-          </p:cNvPr>
-          <p:cNvSpPr txBox="1"/>
-          <p:nvPr/>
-        </p:nvSpPr>
-        <p:spPr>
-          <a:xfrm>
-            <a:off x="0" y="0"/>
-            <a:ext cx="580103" cy="276999"/>
-          </a:xfrm>
-          <a:prstGeom prst="rect">
-            <a:avLst/>
-          </a:prstGeom>
-          <a:noFill/>
-        </p:spPr>
-        <p:txBody>
-          <a:bodyPr wrap="square" rtlCol="0">
-            <a:spAutoFit/>
-          </a:bodyPr>
-          <a:lstStyle/>
-          <a:p>
-            <a:r>
-              <a:rPr lang="en-US" altLang="ko-KR" sz="1200" dirty="0">
-                <a:ln w="9525">
-                  <a:solidFill>
-                    <a:schemeClr val="tx1">
-                      <a:alpha val="29000"/>
-                    </a:schemeClr>
-                  </a:solidFill>
-                </a:ln>
-                <a:latin typeface="Times New Roman"/>
-                <a:ea typeface="맑은 고딕"/>
-                <a:cs typeface="Times New Roman"/>
-              </a:rPr>
-              <a:t>(EDL) </a:t>
-            </a:r>
-            <a:endParaRPr lang="ko-KR" altLang="en-US" sz="1200" dirty="0">
-              <a:ln w="9525">
-                <a:solidFill>
-                  <a:schemeClr val="tx1">
-                    <a:alpha val="29000"/>
-                  </a:schemeClr>
-                </a:solidFill>
-              </a:ln>
-              <a:latin typeface="Times New Roman"/>
-              <a:ea typeface="맑은 고딕"/>
-              <a:cs typeface="Times New Roman"/>
-            </a:endParaRPr>
-          </a:p>
-        </p:txBody>
-      </p:sp>
     </p:spTree>
     <p:extLst>
       <p:ext uri="{BB962C8B-B14F-4D97-AF65-F5344CB8AC3E}">
@@ -13606,64 +21544,6 @@
               <a:t>trap bin 수와 evaluated time point 수에 의해 결정</a:t>
             </a:r>
             <a:endParaRPr lang="en-US" sz="1450" dirty="0"/>
-          </a:p>
-        </p:txBody>
-      </p:sp>
-      <p:sp>
-        <p:nvSpPr>
-          <p:cNvPr id="8" name="TextBox 7">
-            <a:extLst>
-              <a:ext uri="{FF2B5EF4-FFF2-40B4-BE49-F238E27FC236}">
-                <a16:creationId xmlns:a16="http://schemas.microsoft.com/office/drawing/2014/main" id="{8B596EEA-BB46-2E6D-0C26-FABBC86C4841}"/>
-              </a:ext>
-            </a:extLst>
-          </p:cNvPr>
-          <p:cNvSpPr txBox="1"/>
-          <p:nvPr/>
-        </p:nvSpPr>
-        <p:spPr>
-          <a:xfrm>
-            <a:off x="0" y="0"/>
-            <a:ext cx="580103" cy="276999"/>
-          </a:xfrm>
-          <a:prstGeom prst="rect">
-            <a:avLst/>
-          </a:prstGeom>
-          <a:noFill/>
-        </p:spPr>
-        <p:txBody>
-          <a:bodyPr wrap="square" rtlCol="0">
-            <a:spAutoFit/>
-          </a:bodyPr>
-          <a:lstStyle/>
-          <a:p>
-            <a:r>
-              <a:rPr lang="en-US" altLang="ko-KR" sz="1200" dirty="0">
-                <a:ln w="9525">
-                  <a:solidFill>
-                    <a:schemeClr val="tx1">
-                      <a:alpha val="29000"/>
-                    </a:schemeClr>
-                  </a:solidFill>
-                </a:ln>
-                <a:latin typeface="Times New Roman"/>
-                <a:ea typeface="맑은 고딕"/>
-                <a:cs typeface="Times New Roman"/>
-              </a:rPr>
-              <a:t>(EDL) </a:t>
-            </a:r>
-            <a:endParaRPr lang="ko-KR" altLang="en-US" sz="1200" dirty="0">
-              <a:ln w="9525">
-                <a:solidFill>
-                  <a:schemeClr val="tx1">
-                    <a:alpha val="29000"/>
-                  </a:schemeClr>
-                </a:solidFill>
-              </a:ln>
-              <a:latin typeface="Times New Roman"/>
-              <a:ea typeface="맑은 고딕"/>
-              <a:cs typeface="Times New Roman"/>
-            </a:endParaRPr>
           </a:p>
         </p:txBody>
       </p:sp>
